--- a/One-Abbott_共享应用平台_技术架构图集.pptx
+++ b/One-Abbott_共享应用平台_技术架构图集.pptx
@@ -6142,7 +6142,7 @@
         <p:spPr>
           <a:xfrm>
             <a:off x="676656" y="3401568"/>
-            <a:ext cx="1691640" cy="603504"/>
+            <a:ext cx="2286000" cy="603504"/>
           </a:xfrm>
           <a:prstGeom prst="roundRect">
             <a:avLst>
@@ -6195,8 +6195,8 @@
         </p:nvSpPr>
         <p:spPr>
           <a:xfrm>
-            <a:off x="722376" y="3442715"/>
-            <a:ext cx="1600200" cy="128016"/>
+            <a:off x="722376" y="3442716"/>
+            <a:ext cx="2194560" cy="128016"/>
           </a:xfrm>
           <a:prstGeom prst="rect">
             <a:avLst/>
@@ -6242,7 +6242,7 @@
         <p:spPr>
           <a:xfrm>
             <a:off x="722376" y="3607308"/>
-            <a:ext cx="1600200" cy="118872"/>
+            <a:ext cx="2194560" cy="118872"/>
           </a:xfrm>
           <a:prstGeom prst="rect">
             <a:avLst/>
@@ -6288,7 +6288,7 @@
         <p:spPr>
           <a:xfrm>
             <a:off x="722376" y="3785615"/>
-            <a:ext cx="1600200" cy="118872"/>
+            <a:ext cx="2194560" cy="118872"/>
           </a:xfrm>
           <a:prstGeom prst="rect">
             <a:avLst/>
@@ -6333,200 +6333,8 @@
         </p:nvSpPr>
         <p:spPr>
           <a:xfrm>
-            <a:off x="2432304" y="3401568"/>
-            <a:ext cx="1691640" cy="603504"/>
-          </a:xfrm>
-          <a:prstGeom prst="roundRect">
-            <a:avLst>
-              <a:gd name="adj" fmla="val 7575"/>
-            </a:avLst>
-          </a:prstGeom>
-          <a:solidFill>
-            <a:srgbClr val="F5F3FF"/>
-          </a:solidFill>
-          <a:ln w="15240">
-            <a:solidFill>
-              <a:srgbClr val="DDD6FE"/>
-            </a:solidFill>
-          </a:ln>
-          <a:effectLst>
-            <a:outerShdw blurRad="55000" dist="22000" dir="5400000" rotWithShape="0">
-              <a:srgbClr val="0F172A">
-                <a:alpha val="12000"/>
-              </a:srgbClr>
-            </a:outerShdw>
-          </a:effectLst>
-        </p:spPr>
-        <p:style>
-          <a:lnRef idx="1">
-            <a:schemeClr val="accent1"/>
-          </a:lnRef>
-          <a:fillRef idx="3">
-            <a:schemeClr val="accent1"/>
-          </a:fillRef>
-          <a:effectRef idx="2">
-            <a:schemeClr val="accent1"/>
-          </a:effectRef>
-          <a:fontRef idx="minor">
-            <a:schemeClr val="lt1"/>
-          </a:fontRef>
-        </p:style>
-        <p:txBody>
-          <a:bodyPr rtlCol="0" anchor="ctr"/>
-          <a:lstStyle/>
-          <a:p>
-            <a:pPr algn="ctr"/>
-          </a:p>
-        </p:txBody>
-      </p:sp>
-      <p:sp>
-        <p:nvSpPr>
-          <p:cNvPr id="73" name="TextBox 72"/>
-          <p:cNvSpPr txBox="1"/>
-          <p:nvPr/>
-        </p:nvSpPr>
-        <p:spPr>
-          <a:xfrm>
-            <a:off x="2478024" y="3442715"/>
-            <a:ext cx="1600200" cy="128016"/>
-          </a:xfrm>
-          <a:prstGeom prst="rect">
-            <a:avLst/>
-          </a:prstGeom>
-          <a:noFill/>
-        </p:spPr>
-        <p:txBody>
-          <a:bodyPr wrap="square" lIns="0" rIns="0" tIns="0" bIns="0" anchor="t">
-            <a:noAutofit/>
-          </a:bodyPr>
-          <a:lstStyle/>
-          <a:p>
-            <a:pPr algn="ctr">
-              <a:lnSpc>
-                <a:spcPct val="112000"/>
-              </a:lnSpc>
-              <a:spcBef>
-                <a:spcPts val="0"/>
-              </a:spcBef>
-              <a:spcAft>
-                <a:spcPts val="0"/>
-              </a:spcAft>
-            </a:pPr>
-            <a:r>
-              <a:rPr sz="720" b="1" i="0">
-                <a:solidFill>
-                  <a:srgbClr val="0F172A"/>
-                </a:solidFill>
-                <a:latin typeface="Segoe UI"/>
-                <a:ea typeface="Microsoft YaHei"/>
-              </a:rPr>
-              <a:t>AI Hub</a:t>
-            </a:r>
-          </a:p>
-        </p:txBody>
-      </p:sp>
-      <p:sp>
-        <p:nvSpPr>
-          <p:cNvPr id="74" name="TextBox 73"/>
-          <p:cNvSpPr txBox="1"/>
-          <p:nvPr/>
-        </p:nvSpPr>
-        <p:spPr>
-          <a:xfrm>
-            <a:off x="2478024" y="3607308"/>
-            <a:ext cx="1600200" cy="118872"/>
-          </a:xfrm>
-          <a:prstGeom prst="rect">
-            <a:avLst/>
-          </a:prstGeom>
-          <a:noFill/>
-        </p:spPr>
-        <p:txBody>
-          <a:bodyPr wrap="square" lIns="0" rIns="0" tIns="0" bIns="0" anchor="t">
-            <a:noAutofit/>
-          </a:bodyPr>
-          <a:lstStyle/>
-          <a:p>
-            <a:pPr algn="ctr">
-              <a:lnSpc>
-                <a:spcPct val="112000"/>
-              </a:lnSpc>
-              <a:spcBef>
-                <a:spcPts val="0"/>
-              </a:spcBef>
-              <a:spcAft>
-                <a:spcPts val="0"/>
-              </a:spcAft>
-            </a:pPr>
-            <a:r>
-              <a:rPr sz="570" b="0" i="0">
-                <a:solidFill>
-                  <a:srgbClr val="64748B"/>
-                </a:solidFill>
-                <a:latin typeface="Segoe UI"/>
-                <a:ea typeface="Microsoft YaHei"/>
-              </a:rPr>
-              <a:t>model-gateway · RAG · Copilot</a:t>
-            </a:r>
-          </a:p>
-        </p:txBody>
-      </p:sp>
-      <p:sp>
-        <p:nvSpPr>
-          <p:cNvPr id="75" name="TextBox 74"/>
-          <p:cNvSpPr txBox="1"/>
-          <p:nvPr/>
-        </p:nvSpPr>
-        <p:spPr>
-          <a:xfrm>
-            <a:off x="2478024" y="3785615"/>
-            <a:ext cx="1600200" cy="118872"/>
-          </a:xfrm>
-          <a:prstGeom prst="rect">
-            <a:avLst/>
-          </a:prstGeom>
-          <a:noFill/>
-        </p:spPr>
-        <p:txBody>
-          <a:bodyPr wrap="square" lIns="0" rIns="0" tIns="0" bIns="0" anchor="t">
-            <a:noAutofit/>
-          </a:bodyPr>
-          <a:lstStyle/>
-          <a:p>
-            <a:pPr algn="ctr">
-              <a:lnSpc>
-                <a:spcPct val="112000"/>
-              </a:lnSpc>
-              <a:spcBef>
-                <a:spcPts val="0"/>
-              </a:spcBef>
-              <a:spcAft>
-                <a:spcPts val="0"/>
-              </a:spcAft>
-            </a:pPr>
-            <a:r>
-              <a:rPr sz="560" b="1" i="0">
-                <a:solidFill>
-                  <a:srgbClr val="1E40AF"/>
-                </a:solidFill>
-                <a:latin typeface="Segoe UI"/>
-                <a:ea typeface="Microsoft YaHei"/>
-              </a:rPr>
-              <a:t>复用：API · MF</a:t>
-            </a:r>
-          </a:p>
-        </p:txBody>
-      </p:sp>
-      <p:sp>
-        <p:nvSpPr>
-          <p:cNvPr id="76" name="Rounded Rectangle 75"/>
-          <p:cNvSpPr/>
-          <p:nvPr/>
-        </p:nvSpPr>
-        <p:spPr>
-          <a:xfrm>
-            <a:off x="4187952" y="3401568"/>
-            <a:ext cx="1691640" cy="603504"/>
+            <a:off x="3035808" y="3401568"/>
+            <a:ext cx="2286000" cy="603504"/>
           </a:xfrm>
           <a:prstGeom prst="roundRect">
             <a:avLst>
@@ -6573,14 +6381,14 @@
       </p:sp>
       <p:sp>
         <p:nvSpPr>
-          <p:cNvPr id="77" name="TextBox 76"/>
+          <p:cNvPr id="73" name="TextBox 72"/>
           <p:cNvSpPr txBox="1"/>
           <p:nvPr/>
         </p:nvSpPr>
         <p:spPr>
           <a:xfrm>
-            <a:off x="4233672" y="3442715"/>
-            <a:ext cx="1600200" cy="128016"/>
+            <a:off x="3081528" y="3442716"/>
+            <a:ext cx="2194560" cy="128016"/>
           </a:xfrm>
           <a:prstGeom prst="rect">
             <a:avLst/>
@@ -6619,14 +6427,14 @@
       </p:sp>
       <p:sp>
         <p:nvSpPr>
-          <p:cNvPr id="78" name="TextBox 77"/>
+          <p:cNvPr id="74" name="TextBox 73"/>
           <p:cNvSpPr txBox="1"/>
           <p:nvPr/>
         </p:nvSpPr>
         <p:spPr>
           <a:xfrm>
-            <a:off x="4233672" y="3607308"/>
-            <a:ext cx="1600200" cy="118872"/>
+            <a:off x="3081528" y="3607308"/>
+            <a:ext cx="2194560" cy="118872"/>
           </a:xfrm>
           <a:prstGeom prst="rect">
             <a:avLst/>
@@ -6665,14 +6473,14 @@
       </p:sp>
       <p:sp>
         <p:nvSpPr>
-          <p:cNvPr id="79" name="TextBox 78"/>
+          <p:cNvPr id="75" name="TextBox 74"/>
           <p:cNvSpPr txBox="1"/>
           <p:nvPr/>
         </p:nvSpPr>
         <p:spPr>
           <a:xfrm>
-            <a:off x="4233672" y="3785615"/>
-            <a:ext cx="1600200" cy="118872"/>
+            <a:off x="3081528" y="3785615"/>
+            <a:ext cx="2194560" cy="118872"/>
           </a:xfrm>
           <a:prstGeom prst="rect">
             <a:avLst/>
@@ -6711,14 +6519,14 @@
       </p:sp>
       <p:sp>
         <p:nvSpPr>
-          <p:cNvPr id="80" name="Rounded Rectangle 79"/>
+          <p:cNvPr id="76" name="Rounded Rectangle 75"/>
           <p:cNvSpPr/>
           <p:nvPr/>
         </p:nvSpPr>
         <p:spPr>
           <a:xfrm>
-            <a:off x="5943600" y="3401568"/>
-            <a:ext cx="1691640" cy="603504"/>
+            <a:off x="5394960" y="3401568"/>
+            <a:ext cx="2286000" cy="603504"/>
           </a:xfrm>
           <a:prstGeom prst="roundRect">
             <a:avLst>
@@ -6765,14 +6573,14 @@
       </p:sp>
       <p:sp>
         <p:nvSpPr>
-          <p:cNvPr id="81" name="TextBox 80"/>
+          <p:cNvPr id="77" name="TextBox 76"/>
           <p:cNvSpPr txBox="1"/>
           <p:nvPr/>
         </p:nvSpPr>
         <p:spPr>
           <a:xfrm>
-            <a:off x="5989320" y="3442715"/>
-            <a:ext cx="1600200" cy="128016"/>
+            <a:off x="5440680" y="3442716"/>
+            <a:ext cx="2194560" cy="128016"/>
           </a:xfrm>
           <a:prstGeom prst="rect">
             <a:avLst/>
@@ -6811,14 +6619,14 @@
       </p:sp>
       <p:sp>
         <p:nvSpPr>
-          <p:cNvPr id="82" name="TextBox 81"/>
+          <p:cNvPr id="78" name="TextBox 77"/>
           <p:cNvSpPr txBox="1"/>
           <p:nvPr/>
         </p:nvSpPr>
         <p:spPr>
           <a:xfrm>
-            <a:off x="5989320" y="3607308"/>
-            <a:ext cx="1600200" cy="118872"/>
+            <a:off x="5440680" y="3607308"/>
+            <a:ext cx="2194560" cy="118872"/>
           </a:xfrm>
           <a:prstGeom prst="rect">
             <a:avLst/>
@@ -6850,21 +6658,21 @@
                 <a:latin typeface="Segoe UI"/>
                 <a:ea typeface="Microsoft YaHei"/>
               </a:rPr>
-              <a:t>identity · 通知 · 工作流 · 审计</a:t>
-            </a:r>
-          </a:p>
-        </p:txBody>
-      </p:sp>
-      <p:sp>
-        <p:nvSpPr>
-          <p:cNvPr id="83" name="TextBox 82"/>
+              <a:t>身份 · 通知 · 工作流 · 规则 · 审计 · 文件</a:t>
+            </a:r>
+          </a:p>
+        </p:txBody>
+      </p:sp>
+      <p:sp>
+        <p:nvSpPr>
+          <p:cNvPr id="79" name="TextBox 78"/>
           <p:cNvSpPr txBox="1"/>
           <p:nvPr/>
         </p:nvSpPr>
         <p:spPr>
           <a:xfrm>
-            <a:off x="5989320" y="3785615"/>
-            <a:ext cx="1600200" cy="118872"/>
+            <a:off x="5440680" y="3785615"/>
+            <a:ext cx="2194560" cy="118872"/>
           </a:xfrm>
           <a:prstGeom prst="rect">
             <a:avLst/>
@@ -6896,14 +6704,14 @@
                 <a:latin typeface="Segoe UI"/>
                 <a:ea typeface="Microsoft YaHei"/>
               </a:rPr>
-              <a:t>复用：API</a:t>
-            </a:r>
-          </a:p>
-        </p:txBody>
-      </p:sp>
-      <p:sp>
-        <p:nvSpPr>
-          <p:cNvPr id="84" name="TextBox 83"/>
+              <a:t>所有 Hub 共用的技术能力 · API / SDK 复用</a:t>
+            </a:r>
+          </a:p>
+        </p:txBody>
+      </p:sp>
+      <p:sp>
+        <p:nvSpPr>
+          <p:cNvPr id="80" name="TextBox 79"/>
           <p:cNvSpPr txBox="1"/>
           <p:nvPr/>
         </p:nvSpPr>
@@ -6949,7 +6757,7 @@
       </p:sp>
       <p:cxnSp>
         <p:nvCxnSpPr>
-          <p:cNvPr id="85" name="Connector 84"/>
+          <p:cNvPr id="81" name="Connector 80"/>
           <p:cNvCxnSpPr/>
           <p:nvPr/>
         </p:nvCxnSpPr>
@@ -6972,7 +6780,7 @@
       </p:cxnSp>
       <p:cxnSp>
         <p:nvCxnSpPr>
-          <p:cNvPr id="86" name="Connector 85"/>
+          <p:cNvPr id="82" name="Connector 81"/>
           <p:cNvCxnSpPr/>
           <p:nvPr/>
         </p:nvCxnSpPr>
@@ -6995,7 +6803,7 @@
       </p:cxnSp>
       <p:sp>
         <p:nvSpPr>
-          <p:cNvPr id="87" name="TextBox 86"/>
+          <p:cNvPr id="83" name="TextBox 82"/>
           <p:cNvSpPr txBox="1"/>
           <p:nvPr/>
         </p:nvSpPr>
@@ -7041,7 +6849,7 @@
       </p:sp>
       <p:sp>
         <p:nvSpPr>
-          <p:cNvPr id="88" name="Rounded Rectangle 87"/>
+          <p:cNvPr id="84" name="Rounded Rectangle 83"/>
           <p:cNvSpPr/>
           <p:nvPr/>
         </p:nvSpPr>
@@ -7089,7 +6897,7 @@
       </p:sp>
       <p:sp>
         <p:nvSpPr>
-          <p:cNvPr id="89" name="Rounded Rectangle 88"/>
+          <p:cNvPr id="85" name="Rounded Rectangle 84"/>
           <p:cNvSpPr/>
           <p:nvPr/>
         </p:nvSpPr>
@@ -7137,7 +6945,7 @@
       </p:sp>
       <p:sp>
         <p:nvSpPr>
-          <p:cNvPr id="90" name="TextBox 89"/>
+          <p:cNvPr id="86" name="TextBox 85"/>
           <p:cNvSpPr txBox="1"/>
           <p:nvPr/>
         </p:nvSpPr>
@@ -7183,7 +6991,7 @@
       </p:sp>
       <p:sp>
         <p:nvSpPr>
-          <p:cNvPr id="91" name="Rounded Rectangle 90"/>
+          <p:cNvPr id="87" name="Rounded Rectangle 86"/>
           <p:cNvSpPr/>
           <p:nvPr/>
         </p:nvSpPr>
@@ -7231,7 +7039,7 @@
       </p:sp>
       <p:sp>
         <p:nvSpPr>
-          <p:cNvPr id="92" name="TextBox 91"/>
+          <p:cNvPr id="88" name="TextBox 87"/>
           <p:cNvSpPr txBox="1"/>
           <p:nvPr/>
         </p:nvSpPr>
@@ -7300,7 +7108,7 @@
       </p:sp>
       <p:sp>
         <p:nvSpPr>
-          <p:cNvPr id="93" name="Rounded Rectangle 92"/>
+          <p:cNvPr id="89" name="Rounded Rectangle 88"/>
           <p:cNvSpPr/>
           <p:nvPr/>
         </p:nvSpPr>
@@ -7348,7 +7156,7 @@
       </p:sp>
       <p:sp>
         <p:nvSpPr>
-          <p:cNvPr id="94" name="TextBox 93"/>
+          <p:cNvPr id="90" name="TextBox 89"/>
           <p:cNvSpPr txBox="1"/>
           <p:nvPr/>
         </p:nvSpPr>
@@ -7417,7 +7225,7 @@
       </p:sp>
       <p:cxnSp>
         <p:nvCxnSpPr>
-          <p:cNvPr id="95" name="Connector 94"/>
+          <p:cNvPr id="91" name="Connector 90"/>
           <p:cNvCxnSpPr/>
           <p:nvPr/>
         </p:nvCxnSpPr>
@@ -7440,7 +7248,7 @@
       </p:cxnSp>
       <p:cxnSp>
         <p:nvCxnSpPr>
-          <p:cNvPr id="96" name="Connector 95"/>
+          <p:cNvPr id="92" name="Connector 91"/>
           <p:cNvCxnSpPr/>
           <p:nvPr/>
         </p:nvCxnSpPr>
@@ -7463,7 +7271,7 @@
       </p:cxnSp>
       <p:sp>
         <p:nvSpPr>
-          <p:cNvPr id="97" name="Rounded Rectangle 96"/>
+          <p:cNvPr id="93" name="Rounded Rectangle 92"/>
           <p:cNvSpPr/>
           <p:nvPr/>
         </p:nvSpPr>
@@ -7511,7 +7319,7 @@
       </p:sp>
       <p:sp>
         <p:nvSpPr>
-          <p:cNvPr id="98" name="TextBox 97"/>
+          <p:cNvPr id="94" name="TextBox 93"/>
           <p:cNvSpPr txBox="1"/>
           <p:nvPr/>
         </p:nvSpPr>
@@ -7557,7 +7365,7 @@
       </p:sp>
       <p:sp>
         <p:nvSpPr>
-          <p:cNvPr id="99" name="Rounded Rectangle 98"/>
+          <p:cNvPr id="95" name="Rounded Rectangle 94"/>
           <p:cNvSpPr/>
           <p:nvPr/>
         </p:nvSpPr>
@@ -7605,7 +7413,7 @@
       </p:sp>
       <p:sp>
         <p:nvSpPr>
-          <p:cNvPr id="100" name="TextBox 99"/>
+          <p:cNvPr id="96" name="TextBox 95"/>
           <p:cNvSpPr txBox="1"/>
           <p:nvPr/>
         </p:nvSpPr>
@@ -7674,7 +7482,7 @@
       </p:sp>
       <p:sp>
         <p:nvSpPr>
-          <p:cNvPr id="101" name="Rounded Rectangle 100"/>
+          <p:cNvPr id="97" name="Rounded Rectangle 96"/>
           <p:cNvSpPr/>
           <p:nvPr/>
         </p:nvSpPr>
@@ -7722,7 +7530,7 @@
       </p:sp>
       <p:sp>
         <p:nvSpPr>
-          <p:cNvPr id="102" name="TextBox 101"/>
+          <p:cNvPr id="98" name="TextBox 97"/>
           <p:cNvSpPr txBox="1"/>
           <p:nvPr/>
         </p:nvSpPr>
@@ -7791,7 +7599,7 @@
       </p:sp>
       <p:sp>
         <p:nvSpPr>
-          <p:cNvPr id="103" name="Rounded Rectangle 102"/>
+          <p:cNvPr id="99" name="Rounded Rectangle 98"/>
           <p:cNvSpPr/>
           <p:nvPr/>
         </p:nvSpPr>
@@ -7839,7 +7647,7 @@
       </p:sp>
       <p:sp>
         <p:nvSpPr>
-          <p:cNvPr id="104" name="TextBox 103"/>
+          <p:cNvPr id="100" name="TextBox 99"/>
           <p:cNvSpPr txBox="1"/>
           <p:nvPr/>
         </p:nvSpPr>
@@ -7908,7 +7716,7 @@
       </p:sp>
       <p:sp>
         <p:nvSpPr>
-          <p:cNvPr id="105" name="Rounded Rectangle 104"/>
+          <p:cNvPr id="101" name="Rounded Rectangle 100"/>
           <p:cNvSpPr/>
           <p:nvPr/>
         </p:nvSpPr>
@@ -7956,7 +7764,7 @@
       </p:sp>
       <p:sp>
         <p:nvSpPr>
-          <p:cNvPr id="106" name="TextBox 105"/>
+          <p:cNvPr id="102" name="TextBox 101"/>
           <p:cNvSpPr txBox="1"/>
           <p:nvPr/>
         </p:nvSpPr>
@@ -8025,7 +7833,7 @@
       </p:sp>
       <p:sp>
         <p:nvSpPr>
-          <p:cNvPr id="107" name="Rounded Rectangle 106"/>
+          <p:cNvPr id="103" name="Rounded Rectangle 102"/>
           <p:cNvSpPr/>
           <p:nvPr/>
         </p:nvSpPr>
@@ -8079,7 +7887,7 @@
       </p:sp>
       <p:sp>
         <p:nvSpPr>
-          <p:cNvPr id="108" name="TextBox 107"/>
+          <p:cNvPr id="104" name="TextBox 103"/>
           <p:cNvSpPr txBox="1"/>
           <p:nvPr/>
         </p:nvSpPr>
@@ -8125,7 +7933,7 @@
       </p:sp>
       <p:sp>
         <p:nvSpPr>
-          <p:cNvPr id="109" name="Rounded Rectangle 108"/>
+          <p:cNvPr id="105" name="Rounded Rectangle 104"/>
           <p:cNvSpPr/>
           <p:nvPr/>
         </p:nvSpPr>
@@ -8174,7 +7982,7 @@
       </p:sp>
       <p:sp>
         <p:nvSpPr>
-          <p:cNvPr id="110" name="TextBox 109"/>
+          <p:cNvPr id="106" name="TextBox 105"/>
           <p:cNvSpPr txBox="1"/>
           <p:nvPr/>
         </p:nvSpPr>
@@ -8220,7 +8028,7 @@
       </p:sp>
       <p:sp>
         <p:nvSpPr>
-          <p:cNvPr id="111" name="TextBox 110"/>
+          <p:cNvPr id="107" name="TextBox 106"/>
           <p:cNvSpPr txBox="1"/>
           <p:nvPr/>
         </p:nvSpPr>
@@ -8266,7 +8074,7 @@
       </p:sp>
       <p:sp>
         <p:nvSpPr>
-          <p:cNvPr id="112" name="TextBox 111"/>
+          <p:cNvPr id="108" name="TextBox 107"/>
           <p:cNvSpPr txBox="1"/>
           <p:nvPr/>
         </p:nvSpPr>
@@ -8312,7 +8120,7 @@
       </p:sp>
       <p:sp>
         <p:nvSpPr>
-          <p:cNvPr id="113" name="TextBox 112"/>
+          <p:cNvPr id="109" name="TextBox 108"/>
           <p:cNvSpPr txBox="1"/>
           <p:nvPr/>
         </p:nvSpPr>
@@ -8358,7 +8166,7 @@
       </p:sp>
       <p:sp>
         <p:nvSpPr>
-          <p:cNvPr id="114" name="TextBox 113"/>
+          <p:cNvPr id="110" name="TextBox 109"/>
           <p:cNvSpPr txBox="1"/>
           <p:nvPr/>
         </p:nvSpPr>
@@ -8404,7 +8212,7 @@
       </p:sp>
       <p:cxnSp>
         <p:nvCxnSpPr>
-          <p:cNvPr id="115" name="Connector 114"/>
+          <p:cNvPr id="111" name="Connector 110"/>
           <p:cNvCxnSpPr/>
           <p:nvPr/>
         </p:nvCxnSpPr>
@@ -8427,7 +8235,7 @@
       </p:cxnSp>
       <p:sp>
         <p:nvSpPr>
-          <p:cNvPr id="116" name="Rounded Rectangle 115"/>
+          <p:cNvPr id="112" name="Rounded Rectangle 111"/>
           <p:cNvSpPr/>
           <p:nvPr/>
         </p:nvSpPr>
@@ -8475,7 +8283,7 @@
       </p:sp>
       <p:sp>
         <p:nvSpPr>
-          <p:cNvPr id="117" name="TextBox 116"/>
+          <p:cNvPr id="113" name="TextBox 112"/>
           <p:cNvSpPr txBox="1"/>
           <p:nvPr/>
         </p:nvSpPr>
@@ -8521,7 +8329,7 @@
       </p:sp>
       <p:sp>
         <p:nvSpPr>
-          <p:cNvPr id="118" name="TextBox 117"/>
+          <p:cNvPr id="114" name="TextBox 113"/>
           <p:cNvSpPr txBox="1"/>
           <p:nvPr/>
         </p:nvSpPr>
@@ -8567,7 +8375,7 @@
       </p:sp>
       <p:sp>
         <p:nvSpPr>
-          <p:cNvPr id="119" name="TextBox 118"/>
+          <p:cNvPr id="115" name="TextBox 114"/>
           <p:cNvSpPr txBox="1"/>
           <p:nvPr/>
         </p:nvSpPr>
@@ -8613,7 +8421,7 @@
       </p:sp>
       <p:sp>
         <p:nvSpPr>
-          <p:cNvPr id="120" name="TextBox 119"/>
+          <p:cNvPr id="116" name="TextBox 115"/>
           <p:cNvSpPr txBox="1"/>
           <p:nvPr/>
         </p:nvSpPr>
@@ -8659,7 +8467,7 @@
       </p:sp>
       <p:sp>
         <p:nvSpPr>
-          <p:cNvPr id="121" name="TextBox 120"/>
+          <p:cNvPr id="117" name="TextBox 116"/>
           <p:cNvSpPr txBox="1"/>
           <p:nvPr/>
         </p:nvSpPr>
@@ -8705,7 +8513,7 @@
       </p:sp>
       <p:sp>
         <p:nvSpPr>
-          <p:cNvPr id="122" name="Rounded Rectangle 121"/>
+          <p:cNvPr id="118" name="Rounded Rectangle 117"/>
           <p:cNvSpPr/>
           <p:nvPr/>
         </p:nvSpPr>
@@ -8759,7 +8567,7 @@
       </p:sp>
       <p:sp>
         <p:nvSpPr>
-          <p:cNvPr id="123" name="TextBox 122"/>
+          <p:cNvPr id="119" name="TextBox 118"/>
           <p:cNvSpPr txBox="1"/>
           <p:nvPr/>
         </p:nvSpPr>
@@ -8805,7 +8613,7 @@
       </p:sp>
       <p:sp>
         <p:nvSpPr>
-          <p:cNvPr id="124" name="TextBox 123"/>
+          <p:cNvPr id="120" name="TextBox 119"/>
           <p:cNvSpPr txBox="1"/>
           <p:nvPr/>
         </p:nvSpPr>
@@ -8874,7 +8682,7 @@
       </p:sp>
       <p:sp>
         <p:nvSpPr>
-          <p:cNvPr id="125" name="TextBox 124"/>
+          <p:cNvPr id="121" name="TextBox 120"/>
           <p:cNvSpPr txBox="1"/>
           <p:nvPr/>
         </p:nvSpPr>
@@ -8920,7 +8728,7 @@
       </p:sp>
       <p:sp>
         <p:nvSpPr>
-          <p:cNvPr id="126" name="TextBox 125"/>
+          <p:cNvPr id="122" name="TextBox 121"/>
           <p:cNvSpPr txBox="1"/>
           <p:nvPr/>
         </p:nvSpPr>
@@ -8966,7 +8774,7 @@
       </p:sp>
       <p:sp>
         <p:nvSpPr>
-          <p:cNvPr id="127" name="TextBox 126"/>
+          <p:cNvPr id="123" name="TextBox 122"/>
           <p:cNvSpPr txBox="1"/>
           <p:nvPr/>
         </p:nvSpPr>
@@ -9012,7 +8820,7 @@
       </p:sp>
       <p:sp>
         <p:nvSpPr>
-          <p:cNvPr id="128" name="TextBox 127"/>
+          <p:cNvPr id="124" name="TextBox 123"/>
           <p:cNvSpPr txBox="1"/>
           <p:nvPr/>
         </p:nvSpPr>
@@ -9058,7 +8866,7 @@
       </p:sp>
       <p:cxnSp>
         <p:nvCxnSpPr>
-          <p:cNvPr id="129" name="Connector 128"/>
+          <p:cNvPr id="125" name="Connector 124"/>
           <p:cNvCxnSpPr/>
           <p:nvPr/>
         </p:nvCxnSpPr>
@@ -9080,7 +8888,7 @@
       </p:cxnSp>
       <p:sp>
         <p:nvSpPr>
-          <p:cNvPr id="130" name="TextBox 129"/>
+          <p:cNvPr id="126" name="TextBox 125"/>
           <p:cNvSpPr txBox="1"/>
           <p:nvPr/>
         </p:nvSpPr>
@@ -9126,7 +8934,7 @@
       </p:sp>
       <p:sp>
         <p:nvSpPr>
-          <p:cNvPr id="131" name="Oval 130"/>
+          <p:cNvPr id="127" name="Oval 126"/>
           <p:cNvSpPr/>
           <p:nvPr/>
         </p:nvSpPr>
@@ -9170,7 +8978,7 @@
       </p:sp>
       <p:sp>
         <p:nvSpPr>
-          <p:cNvPr id="132" name="Oval 131"/>
+          <p:cNvPr id="128" name="Oval 127"/>
           <p:cNvSpPr/>
           <p:nvPr/>
         </p:nvSpPr>
@@ -9214,7 +9022,7 @@
       </p:sp>
       <p:sp>
         <p:nvSpPr>
-          <p:cNvPr id="133" name="Oval 132"/>
+          <p:cNvPr id="129" name="Oval 128"/>
           <p:cNvSpPr/>
           <p:nvPr/>
         </p:nvSpPr>
@@ -9260,7 +9068,7 @@
       </p:sp>
       <p:sp>
         <p:nvSpPr>
-          <p:cNvPr id="134" name="Oval 133"/>
+          <p:cNvPr id="130" name="Oval 129"/>
           <p:cNvSpPr/>
           <p:nvPr/>
         </p:nvSpPr>
@@ -9304,7 +9112,7 @@
       </p:sp>
       <p:sp>
         <p:nvSpPr>
-          <p:cNvPr id="135" name="Oval 134"/>
+          <p:cNvPr id="131" name="Oval 130"/>
           <p:cNvSpPr/>
           <p:nvPr/>
         </p:nvSpPr>
@@ -9348,7 +9156,7 @@
       </p:sp>
       <p:sp>
         <p:nvSpPr>
-          <p:cNvPr id="136" name="TextBox 135"/>
+          <p:cNvPr id="132" name="TextBox 131"/>
           <p:cNvSpPr txBox="1"/>
           <p:nvPr/>
         </p:nvSpPr>
@@ -9394,7 +9202,7 @@
       </p:sp>
       <p:sp>
         <p:nvSpPr>
-          <p:cNvPr id="137" name="Oval 136"/>
+          <p:cNvPr id="133" name="Oval 132"/>
           <p:cNvSpPr/>
           <p:nvPr/>
         </p:nvSpPr>
@@ -9438,7 +9246,7 @@
       </p:sp>
       <p:sp>
         <p:nvSpPr>
-          <p:cNvPr id="138" name="Oval 137"/>
+          <p:cNvPr id="134" name="Oval 133"/>
           <p:cNvSpPr/>
           <p:nvPr/>
         </p:nvSpPr>
@@ -9484,7 +9292,7 @@
       </p:sp>
       <p:sp>
         <p:nvSpPr>
-          <p:cNvPr id="139" name="Oval 138"/>
+          <p:cNvPr id="135" name="Oval 134"/>
           <p:cNvSpPr/>
           <p:nvPr/>
         </p:nvSpPr>
@@ -9530,7 +9338,7 @@
       </p:sp>
       <p:sp>
         <p:nvSpPr>
-          <p:cNvPr id="140" name="Oval 139"/>
+          <p:cNvPr id="136" name="Oval 135"/>
           <p:cNvSpPr/>
           <p:nvPr/>
         </p:nvSpPr>
@@ -9574,7 +9382,7 @@
       </p:sp>
       <p:sp>
         <p:nvSpPr>
-          <p:cNvPr id="141" name="Oval 140"/>
+          <p:cNvPr id="137" name="Oval 136"/>
           <p:cNvSpPr/>
           <p:nvPr/>
         </p:nvSpPr>
@@ -9620,7 +9428,7 @@
       </p:sp>
       <p:sp>
         <p:nvSpPr>
-          <p:cNvPr id="142" name="TextBox 141"/>
+          <p:cNvPr id="138" name="TextBox 137"/>
           <p:cNvSpPr txBox="1"/>
           <p:nvPr/>
         </p:nvSpPr>
@@ -9666,7 +9474,7 @@
       </p:sp>
       <p:sp>
         <p:nvSpPr>
-          <p:cNvPr id="143" name="Oval 142"/>
+          <p:cNvPr id="139" name="Oval 138"/>
           <p:cNvSpPr/>
           <p:nvPr/>
         </p:nvSpPr>
@@ -9712,7 +9520,7 @@
       </p:sp>
       <p:sp>
         <p:nvSpPr>
-          <p:cNvPr id="144" name="Oval 143"/>
+          <p:cNvPr id="140" name="Oval 139"/>
           <p:cNvSpPr/>
           <p:nvPr/>
         </p:nvSpPr>
@@ -9756,7 +9564,7 @@
       </p:sp>
       <p:sp>
         <p:nvSpPr>
-          <p:cNvPr id="145" name="Oval 144"/>
+          <p:cNvPr id="141" name="Oval 140"/>
           <p:cNvSpPr/>
           <p:nvPr/>
         </p:nvSpPr>
@@ -9800,7 +9608,7 @@
       </p:sp>
       <p:sp>
         <p:nvSpPr>
-          <p:cNvPr id="146" name="Oval 145"/>
+          <p:cNvPr id="142" name="Oval 141"/>
           <p:cNvSpPr/>
           <p:nvPr/>
         </p:nvSpPr>
@@ -9844,7 +9652,7 @@
       </p:sp>
       <p:sp>
         <p:nvSpPr>
-          <p:cNvPr id="147" name="Oval 146"/>
+          <p:cNvPr id="143" name="Oval 142"/>
           <p:cNvSpPr/>
           <p:nvPr/>
         </p:nvSpPr>
@@ -9888,7 +9696,7 @@
       </p:sp>
       <p:sp>
         <p:nvSpPr>
-          <p:cNvPr id="148" name="TextBox 147"/>
+          <p:cNvPr id="144" name="TextBox 143"/>
           <p:cNvSpPr txBox="1"/>
           <p:nvPr/>
         </p:nvSpPr>
@@ -9934,7 +9742,7 @@
       </p:sp>
       <p:sp>
         <p:nvSpPr>
-          <p:cNvPr id="149" name="TextBox 148"/>
+          <p:cNvPr id="145" name="TextBox 144"/>
           <p:cNvSpPr txBox="1"/>
           <p:nvPr/>
         </p:nvSpPr>
@@ -9980,7 +9788,7 @@
       </p:sp>
       <p:sp>
         <p:nvSpPr>
-          <p:cNvPr id="150" name="Oval 149"/>
+          <p:cNvPr id="146" name="Oval 145"/>
           <p:cNvSpPr/>
           <p:nvPr/>
         </p:nvSpPr>
@@ -10024,7 +9832,7 @@
       </p:sp>
       <p:sp>
         <p:nvSpPr>
-          <p:cNvPr id="151" name="Oval 150"/>
+          <p:cNvPr id="147" name="Oval 146"/>
           <p:cNvSpPr/>
           <p:nvPr/>
         </p:nvSpPr>
@@ -10068,7 +9876,7 @@
       </p:sp>
       <p:sp>
         <p:nvSpPr>
-          <p:cNvPr id="152" name="Oval 151"/>
+          <p:cNvPr id="148" name="Oval 147"/>
           <p:cNvSpPr/>
           <p:nvPr/>
         </p:nvSpPr>
@@ -10112,7 +9920,7 @@
       </p:sp>
       <p:sp>
         <p:nvSpPr>
-          <p:cNvPr id="153" name="TextBox 152"/>
+          <p:cNvPr id="149" name="TextBox 148"/>
           <p:cNvSpPr txBox="1"/>
           <p:nvPr/>
         </p:nvSpPr>
@@ -10158,7 +9966,7 @@
       </p:sp>
       <p:sp>
         <p:nvSpPr>
-          <p:cNvPr id="154" name="TextBox 153"/>
+          <p:cNvPr id="150" name="TextBox 149"/>
           <p:cNvSpPr txBox="1"/>
           <p:nvPr/>
         </p:nvSpPr>
@@ -10204,7 +10012,7 @@
       </p:sp>
       <p:sp>
         <p:nvSpPr>
-          <p:cNvPr id="155" name="TextBox 154"/>
+          <p:cNvPr id="151" name="TextBox 150"/>
           <p:cNvSpPr txBox="1"/>
           <p:nvPr/>
         </p:nvSpPr>
@@ -10250,7 +10058,7 @@
       </p:sp>
       <p:sp>
         <p:nvSpPr>
-          <p:cNvPr id="156" name="TextBox 155"/>
+          <p:cNvPr id="152" name="TextBox 151"/>
           <p:cNvSpPr txBox="1"/>
           <p:nvPr/>
         </p:nvSpPr>
@@ -10296,7 +10104,7 @@
       </p:sp>
       <p:sp>
         <p:nvSpPr>
-          <p:cNvPr id="157" name="Oval 156"/>
+          <p:cNvPr id="153" name="Oval 152"/>
           <p:cNvSpPr/>
           <p:nvPr/>
         </p:nvSpPr>
@@ -10340,7 +10148,7 @@
       </p:sp>
       <p:sp>
         <p:nvSpPr>
-          <p:cNvPr id="158" name="Oval 157"/>
+          <p:cNvPr id="154" name="Oval 153"/>
           <p:cNvSpPr/>
           <p:nvPr/>
         </p:nvSpPr>
@@ -10384,7 +10192,7 @@
       </p:sp>
       <p:sp>
         <p:nvSpPr>
-          <p:cNvPr id="159" name="TextBox 158"/>
+          <p:cNvPr id="155" name="TextBox 154"/>
           <p:cNvSpPr txBox="1"/>
           <p:nvPr/>
         </p:nvSpPr>
@@ -10430,7 +10238,7 @@
       </p:sp>
       <p:sp>
         <p:nvSpPr>
-          <p:cNvPr id="160" name="TextBox 159"/>
+          <p:cNvPr id="156" name="TextBox 155"/>
           <p:cNvSpPr txBox="1"/>
           <p:nvPr/>
         </p:nvSpPr>
@@ -10476,7 +10284,7 @@
       </p:sp>
       <p:sp>
         <p:nvSpPr>
-          <p:cNvPr id="161" name="Oval 160"/>
+          <p:cNvPr id="157" name="Oval 156"/>
           <p:cNvSpPr/>
           <p:nvPr/>
         </p:nvSpPr>
@@ -10520,7 +10328,7 @@
       </p:sp>
       <p:sp>
         <p:nvSpPr>
-          <p:cNvPr id="162" name="Oval 161"/>
+          <p:cNvPr id="158" name="Oval 157"/>
           <p:cNvSpPr/>
           <p:nvPr/>
         </p:nvSpPr>
@@ -10564,7 +10372,7 @@
       </p:sp>
       <p:sp>
         <p:nvSpPr>
-          <p:cNvPr id="163" name="Oval 162"/>
+          <p:cNvPr id="159" name="Oval 158"/>
           <p:cNvSpPr/>
           <p:nvPr/>
         </p:nvSpPr>
@@ -10610,7 +10418,7 @@
       </p:sp>
       <p:sp>
         <p:nvSpPr>
-          <p:cNvPr id="164" name="Oval 163"/>
+          <p:cNvPr id="160" name="Oval 159"/>
           <p:cNvSpPr/>
           <p:nvPr/>
         </p:nvSpPr>
@@ -10654,7 +10462,7 @@
       </p:sp>
       <p:sp>
         <p:nvSpPr>
-          <p:cNvPr id="165" name="Oval 164"/>
+          <p:cNvPr id="161" name="Oval 160"/>
           <p:cNvSpPr/>
           <p:nvPr/>
         </p:nvSpPr>
@@ -10698,7 +10506,7 @@
       </p:sp>
       <p:sp>
         <p:nvSpPr>
-          <p:cNvPr id="166" name="TextBox 165"/>
+          <p:cNvPr id="162" name="TextBox 161"/>
           <p:cNvSpPr txBox="1"/>
           <p:nvPr/>
         </p:nvSpPr>
@@ -10744,7 +10552,7 @@
       </p:sp>
       <p:sp>
         <p:nvSpPr>
-          <p:cNvPr id="167" name="Rounded Rectangle 166"/>
+          <p:cNvPr id="163" name="Rounded Rectangle 162"/>
           <p:cNvSpPr/>
           <p:nvPr/>
         </p:nvSpPr>
@@ -10792,7 +10600,7 @@
       </p:sp>
       <p:sp>
         <p:nvSpPr>
-          <p:cNvPr id="168" name="TextBox 167"/>
+          <p:cNvPr id="164" name="TextBox 163"/>
           <p:cNvSpPr txBox="1"/>
           <p:nvPr/>
         </p:nvSpPr>
@@ -10838,7 +10646,7 @@
       </p:sp>
       <p:sp>
         <p:nvSpPr>
-          <p:cNvPr id="169" name="Rounded Rectangle 168"/>
+          <p:cNvPr id="165" name="Rounded Rectangle 164"/>
           <p:cNvSpPr/>
           <p:nvPr/>
         </p:nvSpPr>
@@ -10886,7 +10694,7 @@
       </p:sp>
       <p:sp>
         <p:nvSpPr>
-          <p:cNvPr id="170" name="TextBox 169"/>
+          <p:cNvPr id="166" name="TextBox 165"/>
           <p:cNvSpPr txBox="1"/>
           <p:nvPr/>
         </p:nvSpPr>
@@ -10932,7 +10740,7 @@
       </p:sp>
       <p:sp>
         <p:nvSpPr>
-          <p:cNvPr id="171" name="Rounded Rectangle 170"/>
+          <p:cNvPr id="167" name="Rounded Rectangle 166"/>
           <p:cNvSpPr/>
           <p:nvPr/>
         </p:nvSpPr>
@@ -10980,7 +10788,7 @@
       </p:sp>
       <p:sp>
         <p:nvSpPr>
-          <p:cNvPr id="172" name="TextBox 171"/>
+          <p:cNvPr id="168" name="TextBox 167"/>
           <p:cNvSpPr txBox="1"/>
           <p:nvPr/>
         </p:nvSpPr>
@@ -11026,7 +10834,7 @@
       </p:sp>
       <p:sp>
         <p:nvSpPr>
-          <p:cNvPr id="173" name="Rounded Rectangle 172"/>
+          <p:cNvPr id="169" name="Rounded Rectangle 168"/>
           <p:cNvSpPr/>
           <p:nvPr/>
         </p:nvSpPr>
@@ -11074,7 +10882,7 @@
       </p:sp>
       <p:sp>
         <p:nvSpPr>
-          <p:cNvPr id="174" name="TextBox 173"/>
+          <p:cNvPr id="170" name="TextBox 169"/>
           <p:cNvSpPr txBox="1"/>
           <p:nvPr/>
         </p:nvSpPr>
@@ -11120,7 +10928,7 @@
       </p:sp>
       <p:sp>
         <p:nvSpPr>
-          <p:cNvPr id="175" name="Rounded Rectangle 174"/>
+          <p:cNvPr id="171" name="Rounded Rectangle 170"/>
           <p:cNvSpPr/>
           <p:nvPr/>
         </p:nvSpPr>
@@ -11168,7 +10976,7 @@
       </p:sp>
       <p:sp>
         <p:nvSpPr>
-          <p:cNvPr id="176" name="TextBox 175"/>
+          <p:cNvPr id="172" name="TextBox 171"/>
           <p:cNvSpPr txBox="1"/>
           <p:nvPr/>
         </p:nvSpPr>
@@ -11214,7 +11022,7 @@
       </p:sp>
       <p:sp>
         <p:nvSpPr>
-          <p:cNvPr id="177" name="TextBox 176"/>
+          <p:cNvPr id="173" name="TextBox 172"/>
           <p:cNvSpPr txBox="1"/>
           <p:nvPr/>
         </p:nvSpPr>

--- a/One-Abbott_共享应用平台_技术架构图集.pptx
+++ b/One-Abbott_共享应用平台_技术架构图集.pptx
@@ -6612,7 +6612,7 @@
                 <a:latin typeface="Segoe UI"/>
                 <a:ea typeface="Microsoft YaHei"/>
               </a:rPr>
-              <a:t>横切服务</a:t>
+              <a:t>通用服务</a:t>
             </a:r>
           </a:p>
         </p:txBody>
@@ -6658,7 +6658,7 @@
                 <a:latin typeface="Segoe UI"/>
                 <a:ea typeface="Microsoft YaHei"/>
               </a:rPr>
-              <a:t>身份 · 通知 · 工作流 · 规则 · 审计 · 文件</a:t>
+              <a:t>身份 · 通知 · 工作流 · 规则 · 审计</a:t>
             </a:r>
           </a:p>
         </p:txBody>
@@ -7218,7 +7218,7 @@
                 <a:latin typeface="Segoe UI"/>
                 <a:ea typeface="Microsoft YaHei"/>
               </a:rPr>
-              <a:t>埋点 → 实时标签 → 湖仓</a:t>
+              <a:t>埋点 → 实时标签</a:t>
             </a:r>
           </a:p>
         </p:txBody>
@@ -7372,7 +7372,7 @@
         <p:spPr>
           <a:xfrm>
             <a:off x="365760" y="5120640"/>
-            <a:ext cx="1783080" cy="457200"/>
+            <a:ext cx="2395728" cy="457200"/>
           </a:xfrm>
           <a:prstGeom prst="roundRect">
             <a:avLst>
@@ -7420,7 +7420,7 @@
         <p:spPr>
           <a:xfrm>
             <a:off x="393192" y="5120640"/>
-            <a:ext cx="1728216" cy="457200"/>
+            <a:ext cx="2340864" cy="457200"/>
           </a:xfrm>
           <a:prstGeom prst="rect">
             <a:avLst/>
@@ -7488,8 +7488,8 @@
         </p:nvSpPr>
         <p:spPr>
           <a:xfrm>
-            <a:off x="2212848" y="5120640"/>
-            <a:ext cx="1783080" cy="457200"/>
+            <a:off x="2825496" y="5120640"/>
+            <a:ext cx="2395728" cy="457200"/>
           </a:xfrm>
           <a:prstGeom prst="roundRect">
             <a:avLst>
@@ -7536,8 +7536,8 @@
         </p:nvSpPr>
         <p:spPr>
           <a:xfrm>
-            <a:off x="2240279" y="5120640"/>
-            <a:ext cx="1728216" cy="457200"/>
+            <a:off x="2852927" y="5120640"/>
+            <a:ext cx="2340864" cy="457200"/>
           </a:xfrm>
           <a:prstGeom prst="rect">
             <a:avLst/>
@@ -7569,7 +7569,7 @@
                 <a:latin typeface="Segoe UI"/>
                 <a:ea typeface="Microsoft YaHei"/>
               </a:rPr>
-              <a:t>湖仓 · Fabric</a:t>
+              <a:t>AI 平台</a:t>
             </a:r>
           </a:p>
           <a:p>
@@ -7592,7 +7592,7 @@
                 <a:latin typeface="Segoe UI"/>
                 <a:ea typeface="Microsoft YaHei"/>
               </a:rPr>
-              <a:t>B→S→G · C360 宽表</a:t>
+              <a:t>模型网关 · RAG · Copilot</a:t>
             </a:r>
           </a:p>
         </p:txBody>
@@ -7605,8 +7605,8 @@
         </p:nvSpPr>
         <p:spPr>
           <a:xfrm>
-            <a:off x="4059935" y="5120640"/>
-            <a:ext cx="1783080" cy="457200"/>
+            <a:off x="5285231" y="5120640"/>
+            <a:ext cx="2395728" cy="457200"/>
           </a:xfrm>
           <a:prstGeom prst="roundRect">
             <a:avLst>
@@ -7653,8 +7653,8 @@
         </p:nvSpPr>
         <p:spPr>
           <a:xfrm>
-            <a:off x="4087368" y="5120640"/>
-            <a:ext cx="1728216" cy="457200"/>
+            <a:off x="5312664" y="5120640"/>
+            <a:ext cx="2340864" cy="457200"/>
           </a:xfrm>
           <a:prstGeom prst="rect">
             <a:avLst/>
@@ -7686,7 +7686,7 @@
                 <a:latin typeface="Segoe UI"/>
                 <a:ea typeface="Microsoft YaHei"/>
               </a:rPr>
-              <a:t>AI 平台</a:t>
+              <a:t>Landing Zone</a:t>
             </a:r>
           </a:p>
           <a:p>
@@ -7709,7 +7709,7 @@
                 <a:latin typeface="Segoe UI"/>
                 <a:ea typeface="Microsoft YaHei"/>
               </a:rPr>
-              <a:t>模型网关 · RAG · Copilot</a:t>
+              <a:t>AKS · GitOps · OTel</a:t>
             </a:r>
           </a:p>
         </p:txBody>
@@ -7717,123 +7717,6 @@
       <p:sp>
         <p:nvSpPr>
           <p:cNvPr id="101" name="Rounded Rectangle 100"/>
-          <p:cNvSpPr/>
-          <p:nvPr/>
-        </p:nvSpPr>
-        <p:spPr>
-          <a:xfrm>
-            <a:off x="5907023" y="5120640"/>
-            <a:ext cx="1783080" cy="457200"/>
-          </a:xfrm>
-          <a:prstGeom prst="roundRect">
-            <a:avLst>
-              <a:gd name="adj" fmla="val 10000"/>
-            </a:avLst>
-          </a:prstGeom>
-          <a:solidFill>
-            <a:srgbClr val="FFFFFF"/>
-          </a:solidFill>
-          <a:ln w="13970">
-            <a:solidFill>
-              <a:srgbClr val="93C5FD"/>
-            </a:solidFill>
-          </a:ln>
-          <a:effectLst/>
-        </p:spPr>
-        <p:style>
-          <a:lnRef idx="1">
-            <a:schemeClr val="accent1"/>
-          </a:lnRef>
-          <a:fillRef idx="3">
-            <a:schemeClr val="accent1"/>
-          </a:fillRef>
-          <a:effectRef idx="2">
-            <a:schemeClr val="accent1"/>
-          </a:effectRef>
-          <a:fontRef idx="minor">
-            <a:schemeClr val="lt1"/>
-          </a:fontRef>
-        </p:style>
-        <p:txBody>
-          <a:bodyPr rtlCol="0" anchor="ctr"/>
-          <a:lstStyle/>
-          <a:p>
-            <a:pPr algn="ctr"/>
-          </a:p>
-        </p:txBody>
-      </p:sp>
-      <p:sp>
-        <p:nvSpPr>
-          <p:cNvPr id="102" name="TextBox 101"/>
-          <p:cNvSpPr txBox="1"/>
-          <p:nvPr/>
-        </p:nvSpPr>
-        <p:spPr>
-          <a:xfrm>
-            <a:off x="5934455" y="5120640"/>
-            <a:ext cx="1728216" cy="457200"/>
-          </a:xfrm>
-          <a:prstGeom prst="rect">
-            <a:avLst/>
-          </a:prstGeom>
-          <a:noFill/>
-        </p:spPr>
-        <p:txBody>
-          <a:bodyPr wrap="square" lIns="0" rIns="0" tIns="0" bIns="0" anchor="ctr">
-            <a:noAutofit/>
-          </a:bodyPr>
-          <a:lstStyle/>
-          <a:p>
-            <a:pPr algn="ctr">
-              <a:lnSpc>
-                <a:spcPct val="108000"/>
-              </a:lnSpc>
-              <a:spcBef>
-                <a:spcPts val="0"/>
-              </a:spcBef>
-              <a:spcAft>
-                <a:spcPts val="0"/>
-              </a:spcAft>
-            </a:pPr>
-            <a:r>
-              <a:rPr sz="700" b="0" i="0">
-                <a:solidFill>
-                  <a:srgbClr val="0F172A"/>
-                </a:solidFill>
-                <a:latin typeface="Segoe UI"/>
-                <a:ea typeface="Microsoft YaHei"/>
-              </a:rPr>
-              <a:t>Landing Zone</a:t>
-            </a:r>
-          </a:p>
-          <a:p>
-            <a:pPr algn="ctr">
-              <a:lnSpc>
-                <a:spcPct val="108000"/>
-              </a:lnSpc>
-              <a:spcBef>
-                <a:spcPts val="0"/>
-              </a:spcBef>
-              <a:spcAft>
-                <a:spcPts val="0"/>
-              </a:spcAft>
-            </a:pPr>
-            <a:r>
-              <a:rPr sz="580" b="0" i="0">
-                <a:solidFill>
-                  <a:srgbClr val="64748B"/>
-                </a:solidFill>
-                <a:latin typeface="Segoe UI"/>
-                <a:ea typeface="Microsoft YaHei"/>
-              </a:rPr>
-              <a:t>AKS · GitOps · OTel</a:t>
-            </a:r>
-          </a:p>
-        </p:txBody>
-      </p:sp>
-      <p:sp>
-        <p:nvSpPr>
-          <p:cNvPr id="103" name="Rounded Rectangle 102"/>
           <p:cNvSpPr/>
           <p:nvPr/>
         </p:nvSpPr>
@@ -7887,7 +7770,7 @@
       </p:sp>
       <p:sp>
         <p:nvSpPr>
-          <p:cNvPr id="104" name="TextBox 103"/>
+          <p:cNvPr id="102" name="TextBox 101"/>
           <p:cNvSpPr txBox="1"/>
           <p:nvPr/>
         </p:nvSpPr>
@@ -7933,7 +7816,7 @@
       </p:sp>
       <p:sp>
         <p:nvSpPr>
-          <p:cNvPr id="105" name="Rounded Rectangle 104"/>
+          <p:cNvPr id="103" name="Rounded Rectangle 102"/>
           <p:cNvSpPr/>
           <p:nvPr/>
         </p:nvSpPr>
@@ -7982,7 +7865,7 @@
       </p:sp>
       <p:sp>
         <p:nvSpPr>
-          <p:cNvPr id="106" name="TextBox 105"/>
+          <p:cNvPr id="104" name="TextBox 103"/>
           <p:cNvSpPr txBox="1"/>
           <p:nvPr/>
         </p:nvSpPr>
@@ -8028,7 +7911,7 @@
       </p:sp>
       <p:sp>
         <p:nvSpPr>
-          <p:cNvPr id="107" name="TextBox 106"/>
+          <p:cNvPr id="105" name="TextBox 104"/>
           <p:cNvSpPr txBox="1"/>
           <p:nvPr/>
         </p:nvSpPr>
@@ -8074,7 +7957,7 @@
       </p:sp>
       <p:sp>
         <p:nvSpPr>
-          <p:cNvPr id="108" name="TextBox 107"/>
+          <p:cNvPr id="106" name="TextBox 105"/>
           <p:cNvSpPr txBox="1"/>
           <p:nvPr/>
         </p:nvSpPr>
@@ -8120,7 +8003,7 @@
       </p:sp>
       <p:sp>
         <p:nvSpPr>
-          <p:cNvPr id="109" name="TextBox 108"/>
+          <p:cNvPr id="107" name="TextBox 106"/>
           <p:cNvSpPr txBox="1"/>
           <p:nvPr/>
         </p:nvSpPr>
@@ -8166,7 +8049,7 @@
       </p:sp>
       <p:sp>
         <p:nvSpPr>
-          <p:cNvPr id="110" name="TextBox 109"/>
+          <p:cNvPr id="108" name="TextBox 107"/>
           <p:cNvSpPr txBox="1"/>
           <p:nvPr/>
         </p:nvSpPr>
@@ -8212,7 +8095,7 @@
       </p:sp>
       <p:cxnSp>
         <p:nvCxnSpPr>
-          <p:cNvPr id="111" name="Connector 110"/>
+          <p:cNvPr id="109" name="Connector 108"/>
           <p:cNvCxnSpPr/>
           <p:nvPr/>
         </p:nvCxnSpPr>
@@ -8235,7 +8118,7 @@
       </p:cxnSp>
       <p:sp>
         <p:nvSpPr>
-          <p:cNvPr id="112" name="Rounded Rectangle 111"/>
+          <p:cNvPr id="110" name="Rounded Rectangle 109"/>
           <p:cNvSpPr/>
           <p:nvPr/>
         </p:nvSpPr>
@@ -8283,7 +8166,7 @@
       </p:sp>
       <p:sp>
         <p:nvSpPr>
-          <p:cNvPr id="113" name="TextBox 112"/>
+          <p:cNvPr id="111" name="TextBox 110"/>
           <p:cNvSpPr txBox="1"/>
           <p:nvPr/>
         </p:nvSpPr>
@@ -8329,7 +8212,7 @@
       </p:sp>
       <p:sp>
         <p:nvSpPr>
-          <p:cNvPr id="114" name="TextBox 113"/>
+          <p:cNvPr id="112" name="TextBox 111"/>
           <p:cNvSpPr txBox="1"/>
           <p:nvPr/>
         </p:nvSpPr>
@@ -8375,7 +8258,7 @@
       </p:sp>
       <p:sp>
         <p:nvSpPr>
-          <p:cNvPr id="115" name="TextBox 114"/>
+          <p:cNvPr id="113" name="TextBox 112"/>
           <p:cNvSpPr txBox="1"/>
           <p:nvPr/>
         </p:nvSpPr>
@@ -8421,7 +8304,7 @@
       </p:sp>
       <p:sp>
         <p:nvSpPr>
-          <p:cNvPr id="116" name="TextBox 115"/>
+          <p:cNvPr id="114" name="TextBox 113"/>
           <p:cNvSpPr txBox="1"/>
           <p:nvPr/>
         </p:nvSpPr>
@@ -8467,7 +8350,7 @@
       </p:sp>
       <p:sp>
         <p:nvSpPr>
-          <p:cNvPr id="117" name="TextBox 116"/>
+          <p:cNvPr id="115" name="TextBox 114"/>
           <p:cNvSpPr txBox="1"/>
           <p:nvPr/>
         </p:nvSpPr>
@@ -8513,7 +8396,7 @@
       </p:sp>
       <p:sp>
         <p:nvSpPr>
-          <p:cNvPr id="118" name="Rounded Rectangle 117"/>
+          <p:cNvPr id="116" name="Rounded Rectangle 115"/>
           <p:cNvSpPr/>
           <p:nvPr/>
         </p:nvSpPr>
@@ -8567,7 +8450,7 @@
       </p:sp>
       <p:sp>
         <p:nvSpPr>
-          <p:cNvPr id="119" name="TextBox 118"/>
+          <p:cNvPr id="117" name="TextBox 116"/>
           <p:cNvSpPr txBox="1"/>
           <p:nvPr/>
         </p:nvSpPr>
@@ -8613,7 +8496,7 @@
       </p:sp>
       <p:sp>
         <p:nvSpPr>
-          <p:cNvPr id="120" name="TextBox 119"/>
+          <p:cNvPr id="118" name="TextBox 117"/>
           <p:cNvSpPr txBox="1"/>
           <p:nvPr/>
         </p:nvSpPr>
@@ -8682,7 +8565,7 @@
       </p:sp>
       <p:sp>
         <p:nvSpPr>
-          <p:cNvPr id="121" name="TextBox 120"/>
+          <p:cNvPr id="119" name="TextBox 118"/>
           <p:cNvSpPr txBox="1"/>
           <p:nvPr/>
         </p:nvSpPr>
@@ -8728,7 +8611,7 @@
       </p:sp>
       <p:sp>
         <p:nvSpPr>
-          <p:cNvPr id="122" name="TextBox 121"/>
+          <p:cNvPr id="120" name="TextBox 119"/>
           <p:cNvSpPr txBox="1"/>
           <p:nvPr/>
         </p:nvSpPr>
@@ -8774,7 +8657,7 @@
       </p:sp>
       <p:sp>
         <p:nvSpPr>
-          <p:cNvPr id="123" name="TextBox 122"/>
+          <p:cNvPr id="121" name="TextBox 120"/>
           <p:cNvSpPr txBox="1"/>
           <p:nvPr/>
         </p:nvSpPr>
@@ -8820,7 +8703,7 @@
       </p:sp>
       <p:sp>
         <p:nvSpPr>
-          <p:cNvPr id="124" name="TextBox 123"/>
+          <p:cNvPr id="122" name="TextBox 121"/>
           <p:cNvSpPr txBox="1"/>
           <p:nvPr/>
         </p:nvSpPr>
@@ -8866,7 +8749,7 @@
       </p:sp>
       <p:cxnSp>
         <p:nvCxnSpPr>
-          <p:cNvPr id="125" name="Connector 124"/>
+          <p:cNvPr id="123" name="Connector 122"/>
           <p:cNvCxnSpPr/>
           <p:nvPr/>
         </p:nvCxnSpPr>
@@ -8888,7 +8771,7 @@
       </p:cxnSp>
       <p:sp>
         <p:nvSpPr>
-          <p:cNvPr id="126" name="TextBox 125"/>
+          <p:cNvPr id="124" name="TextBox 123"/>
           <p:cNvSpPr txBox="1"/>
           <p:nvPr/>
         </p:nvSpPr>
@@ -8934,7 +8817,7 @@
       </p:sp>
       <p:sp>
         <p:nvSpPr>
-          <p:cNvPr id="127" name="Oval 126"/>
+          <p:cNvPr id="125" name="Oval 124"/>
           <p:cNvSpPr/>
           <p:nvPr/>
         </p:nvSpPr>
@@ -8978,7 +8861,7 @@
       </p:sp>
       <p:sp>
         <p:nvSpPr>
-          <p:cNvPr id="128" name="Oval 127"/>
+          <p:cNvPr id="126" name="Oval 125"/>
           <p:cNvSpPr/>
           <p:nvPr/>
         </p:nvSpPr>
@@ -9022,7 +8905,7 @@
       </p:sp>
       <p:sp>
         <p:nvSpPr>
-          <p:cNvPr id="129" name="Oval 128"/>
+          <p:cNvPr id="127" name="Oval 126"/>
           <p:cNvSpPr/>
           <p:nvPr/>
         </p:nvSpPr>
@@ -9068,7 +8951,7 @@
       </p:sp>
       <p:sp>
         <p:nvSpPr>
-          <p:cNvPr id="130" name="Oval 129"/>
+          <p:cNvPr id="128" name="Oval 127"/>
           <p:cNvSpPr/>
           <p:nvPr/>
         </p:nvSpPr>
@@ -9112,7 +8995,7 @@
       </p:sp>
       <p:sp>
         <p:nvSpPr>
-          <p:cNvPr id="131" name="Oval 130"/>
+          <p:cNvPr id="129" name="Oval 128"/>
           <p:cNvSpPr/>
           <p:nvPr/>
         </p:nvSpPr>
@@ -9156,7 +9039,7 @@
       </p:sp>
       <p:sp>
         <p:nvSpPr>
-          <p:cNvPr id="132" name="TextBox 131"/>
+          <p:cNvPr id="130" name="TextBox 129"/>
           <p:cNvSpPr txBox="1"/>
           <p:nvPr/>
         </p:nvSpPr>
@@ -9202,7 +9085,7 @@
       </p:sp>
       <p:sp>
         <p:nvSpPr>
-          <p:cNvPr id="133" name="Oval 132"/>
+          <p:cNvPr id="131" name="Oval 130"/>
           <p:cNvSpPr/>
           <p:nvPr/>
         </p:nvSpPr>
@@ -9246,7 +9129,7 @@
       </p:sp>
       <p:sp>
         <p:nvSpPr>
-          <p:cNvPr id="134" name="Oval 133"/>
+          <p:cNvPr id="132" name="Oval 131"/>
           <p:cNvSpPr/>
           <p:nvPr/>
         </p:nvSpPr>
@@ -9292,7 +9175,7 @@
       </p:sp>
       <p:sp>
         <p:nvSpPr>
-          <p:cNvPr id="135" name="Oval 134"/>
+          <p:cNvPr id="133" name="Oval 132"/>
           <p:cNvSpPr/>
           <p:nvPr/>
         </p:nvSpPr>
@@ -9338,7 +9221,7 @@
       </p:sp>
       <p:sp>
         <p:nvSpPr>
-          <p:cNvPr id="136" name="Oval 135"/>
+          <p:cNvPr id="134" name="Oval 133"/>
           <p:cNvSpPr/>
           <p:nvPr/>
         </p:nvSpPr>
@@ -9382,7 +9265,7 @@
       </p:sp>
       <p:sp>
         <p:nvSpPr>
-          <p:cNvPr id="137" name="Oval 136"/>
+          <p:cNvPr id="135" name="Oval 134"/>
           <p:cNvSpPr/>
           <p:nvPr/>
         </p:nvSpPr>
@@ -9428,7 +9311,7 @@
       </p:sp>
       <p:sp>
         <p:nvSpPr>
-          <p:cNvPr id="138" name="TextBox 137"/>
+          <p:cNvPr id="136" name="TextBox 135"/>
           <p:cNvSpPr txBox="1"/>
           <p:nvPr/>
         </p:nvSpPr>
@@ -9474,7 +9357,7 @@
       </p:sp>
       <p:sp>
         <p:nvSpPr>
-          <p:cNvPr id="139" name="Oval 138"/>
+          <p:cNvPr id="137" name="Oval 136"/>
           <p:cNvSpPr/>
           <p:nvPr/>
         </p:nvSpPr>
@@ -9520,7 +9403,7 @@
       </p:sp>
       <p:sp>
         <p:nvSpPr>
-          <p:cNvPr id="140" name="Oval 139"/>
+          <p:cNvPr id="138" name="Oval 137"/>
           <p:cNvSpPr/>
           <p:nvPr/>
         </p:nvSpPr>
@@ -9564,7 +9447,7 @@
       </p:sp>
       <p:sp>
         <p:nvSpPr>
-          <p:cNvPr id="141" name="Oval 140"/>
+          <p:cNvPr id="139" name="Oval 138"/>
           <p:cNvSpPr/>
           <p:nvPr/>
         </p:nvSpPr>
@@ -9608,7 +9491,7 @@
       </p:sp>
       <p:sp>
         <p:nvSpPr>
-          <p:cNvPr id="142" name="Oval 141"/>
+          <p:cNvPr id="140" name="Oval 139"/>
           <p:cNvSpPr/>
           <p:nvPr/>
         </p:nvSpPr>
@@ -9652,7 +9535,7 @@
       </p:sp>
       <p:sp>
         <p:nvSpPr>
-          <p:cNvPr id="143" name="Oval 142"/>
+          <p:cNvPr id="141" name="Oval 140"/>
           <p:cNvSpPr/>
           <p:nvPr/>
         </p:nvSpPr>
@@ -9696,7 +9579,7 @@
       </p:sp>
       <p:sp>
         <p:nvSpPr>
-          <p:cNvPr id="144" name="TextBox 143"/>
+          <p:cNvPr id="142" name="TextBox 141"/>
           <p:cNvSpPr txBox="1"/>
           <p:nvPr/>
         </p:nvSpPr>
@@ -9742,7 +9625,7 @@
       </p:sp>
       <p:sp>
         <p:nvSpPr>
-          <p:cNvPr id="145" name="TextBox 144"/>
+          <p:cNvPr id="143" name="TextBox 142"/>
           <p:cNvSpPr txBox="1"/>
           <p:nvPr/>
         </p:nvSpPr>
@@ -9788,7 +9671,7 @@
       </p:sp>
       <p:sp>
         <p:nvSpPr>
-          <p:cNvPr id="146" name="Oval 145"/>
+          <p:cNvPr id="144" name="Oval 143"/>
           <p:cNvSpPr/>
           <p:nvPr/>
         </p:nvSpPr>
@@ -9832,7 +9715,7 @@
       </p:sp>
       <p:sp>
         <p:nvSpPr>
-          <p:cNvPr id="147" name="Oval 146"/>
+          <p:cNvPr id="145" name="Oval 144"/>
           <p:cNvSpPr/>
           <p:nvPr/>
         </p:nvSpPr>
@@ -9876,7 +9759,7 @@
       </p:sp>
       <p:sp>
         <p:nvSpPr>
-          <p:cNvPr id="148" name="Oval 147"/>
+          <p:cNvPr id="146" name="Oval 145"/>
           <p:cNvSpPr/>
           <p:nvPr/>
         </p:nvSpPr>
@@ -9920,7 +9803,7 @@
       </p:sp>
       <p:sp>
         <p:nvSpPr>
-          <p:cNvPr id="149" name="TextBox 148"/>
+          <p:cNvPr id="147" name="TextBox 146"/>
           <p:cNvSpPr txBox="1"/>
           <p:nvPr/>
         </p:nvSpPr>
@@ -9966,7 +9849,7 @@
       </p:sp>
       <p:sp>
         <p:nvSpPr>
-          <p:cNvPr id="150" name="TextBox 149"/>
+          <p:cNvPr id="148" name="TextBox 147"/>
           <p:cNvSpPr txBox="1"/>
           <p:nvPr/>
         </p:nvSpPr>
@@ -10012,7 +9895,7 @@
       </p:sp>
       <p:sp>
         <p:nvSpPr>
-          <p:cNvPr id="151" name="TextBox 150"/>
+          <p:cNvPr id="149" name="TextBox 148"/>
           <p:cNvSpPr txBox="1"/>
           <p:nvPr/>
         </p:nvSpPr>
@@ -10058,7 +9941,7 @@
       </p:sp>
       <p:sp>
         <p:nvSpPr>
-          <p:cNvPr id="152" name="TextBox 151"/>
+          <p:cNvPr id="150" name="TextBox 149"/>
           <p:cNvSpPr txBox="1"/>
           <p:nvPr/>
         </p:nvSpPr>
@@ -10104,7 +9987,7 @@
       </p:sp>
       <p:sp>
         <p:nvSpPr>
-          <p:cNvPr id="153" name="Oval 152"/>
+          <p:cNvPr id="151" name="Oval 150"/>
           <p:cNvSpPr/>
           <p:nvPr/>
         </p:nvSpPr>
@@ -10148,7 +10031,7 @@
       </p:sp>
       <p:sp>
         <p:nvSpPr>
-          <p:cNvPr id="154" name="Oval 153"/>
+          <p:cNvPr id="152" name="Oval 151"/>
           <p:cNvSpPr/>
           <p:nvPr/>
         </p:nvSpPr>
@@ -10192,7 +10075,7 @@
       </p:sp>
       <p:sp>
         <p:nvSpPr>
-          <p:cNvPr id="155" name="TextBox 154"/>
+          <p:cNvPr id="153" name="TextBox 152"/>
           <p:cNvSpPr txBox="1"/>
           <p:nvPr/>
         </p:nvSpPr>
@@ -10238,7 +10121,7 @@
       </p:sp>
       <p:sp>
         <p:nvSpPr>
-          <p:cNvPr id="156" name="TextBox 155"/>
+          <p:cNvPr id="154" name="TextBox 153"/>
           <p:cNvSpPr txBox="1"/>
           <p:nvPr/>
         </p:nvSpPr>
@@ -10284,7 +10167,7 @@
       </p:sp>
       <p:sp>
         <p:nvSpPr>
-          <p:cNvPr id="157" name="Oval 156"/>
+          <p:cNvPr id="155" name="Oval 154"/>
           <p:cNvSpPr/>
           <p:nvPr/>
         </p:nvSpPr>
@@ -10328,7 +10211,7 @@
       </p:sp>
       <p:sp>
         <p:nvSpPr>
-          <p:cNvPr id="158" name="Oval 157"/>
+          <p:cNvPr id="156" name="Oval 155"/>
           <p:cNvSpPr/>
           <p:nvPr/>
         </p:nvSpPr>
@@ -10372,7 +10255,7 @@
       </p:sp>
       <p:sp>
         <p:nvSpPr>
-          <p:cNvPr id="159" name="Oval 158"/>
+          <p:cNvPr id="157" name="Oval 156"/>
           <p:cNvSpPr/>
           <p:nvPr/>
         </p:nvSpPr>
@@ -10418,7 +10301,7 @@
       </p:sp>
       <p:sp>
         <p:nvSpPr>
-          <p:cNvPr id="160" name="Oval 159"/>
+          <p:cNvPr id="158" name="Oval 157"/>
           <p:cNvSpPr/>
           <p:nvPr/>
         </p:nvSpPr>
@@ -10462,7 +10345,7 @@
       </p:sp>
       <p:sp>
         <p:nvSpPr>
-          <p:cNvPr id="161" name="Oval 160"/>
+          <p:cNvPr id="159" name="Oval 158"/>
           <p:cNvSpPr/>
           <p:nvPr/>
         </p:nvSpPr>
@@ -10506,7 +10389,7 @@
       </p:sp>
       <p:sp>
         <p:nvSpPr>
-          <p:cNvPr id="162" name="TextBox 161"/>
+          <p:cNvPr id="160" name="TextBox 159"/>
           <p:cNvSpPr txBox="1"/>
           <p:nvPr/>
         </p:nvSpPr>
@@ -10552,7 +10435,7 @@
       </p:sp>
       <p:sp>
         <p:nvSpPr>
-          <p:cNvPr id="163" name="Rounded Rectangle 162"/>
+          <p:cNvPr id="161" name="Rounded Rectangle 160"/>
           <p:cNvSpPr/>
           <p:nvPr/>
         </p:nvSpPr>
@@ -10600,7 +10483,7 @@
       </p:sp>
       <p:sp>
         <p:nvSpPr>
-          <p:cNvPr id="164" name="TextBox 163"/>
+          <p:cNvPr id="162" name="TextBox 161"/>
           <p:cNvSpPr txBox="1"/>
           <p:nvPr/>
         </p:nvSpPr>
@@ -10646,7 +10529,7 @@
       </p:sp>
       <p:sp>
         <p:nvSpPr>
-          <p:cNvPr id="165" name="Rounded Rectangle 164"/>
+          <p:cNvPr id="163" name="Rounded Rectangle 162"/>
           <p:cNvSpPr/>
           <p:nvPr/>
         </p:nvSpPr>
@@ -10694,7 +10577,7 @@
       </p:sp>
       <p:sp>
         <p:nvSpPr>
-          <p:cNvPr id="166" name="TextBox 165"/>
+          <p:cNvPr id="164" name="TextBox 163"/>
           <p:cNvSpPr txBox="1"/>
           <p:nvPr/>
         </p:nvSpPr>
@@ -10740,7 +10623,7 @@
       </p:sp>
       <p:sp>
         <p:nvSpPr>
-          <p:cNvPr id="167" name="Rounded Rectangle 166"/>
+          <p:cNvPr id="165" name="Rounded Rectangle 164"/>
           <p:cNvSpPr/>
           <p:nvPr/>
         </p:nvSpPr>
@@ -10788,7 +10671,7 @@
       </p:sp>
       <p:sp>
         <p:nvSpPr>
-          <p:cNvPr id="168" name="TextBox 167"/>
+          <p:cNvPr id="166" name="TextBox 165"/>
           <p:cNvSpPr txBox="1"/>
           <p:nvPr/>
         </p:nvSpPr>
@@ -10834,7 +10717,7 @@
       </p:sp>
       <p:sp>
         <p:nvSpPr>
-          <p:cNvPr id="169" name="Rounded Rectangle 168"/>
+          <p:cNvPr id="167" name="Rounded Rectangle 166"/>
           <p:cNvSpPr/>
           <p:nvPr/>
         </p:nvSpPr>
@@ -10882,7 +10765,7 @@
       </p:sp>
       <p:sp>
         <p:nvSpPr>
-          <p:cNvPr id="170" name="TextBox 169"/>
+          <p:cNvPr id="168" name="TextBox 167"/>
           <p:cNvSpPr txBox="1"/>
           <p:nvPr/>
         </p:nvSpPr>
@@ -10928,7 +10811,7 @@
       </p:sp>
       <p:sp>
         <p:nvSpPr>
-          <p:cNvPr id="171" name="Rounded Rectangle 170"/>
+          <p:cNvPr id="169" name="Rounded Rectangle 168"/>
           <p:cNvSpPr/>
           <p:nvPr/>
         </p:nvSpPr>
@@ -10976,7 +10859,7 @@
       </p:sp>
       <p:sp>
         <p:nvSpPr>
-          <p:cNvPr id="172" name="TextBox 171"/>
+          <p:cNvPr id="170" name="TextBox 169"/>
           <p:cNvSpPr txBox="1"/>
           <p:nvPr/>
         </p:nvSpPr>
@@ -11022,7 +10905,7 @@
       </p:sp>
       <p:sp>
         <p:nvSpPr>
-          <p:cNvPr id="173" name="TextBox 172"/>
+          <p:cNvPr id="171" name="TextBox 170"/>
           <p:cNvSpPr txBox="1"/>
           <p:nvPr/>
         </p:nvSpPr>
@@ -12028,7 +11911,7 @@
                 <a:latin typeface="Segoe UI"/>
                 <a:ea typeface="Microsoft YaHei"/>
               </a:rPr>
-              <a:t>manifest 版本 / 灰度</a:t>
+              <a:t>manifest 版本管理</a:t>
             </a:r>
           </a:p>
         </p:txBody>
@@ -14000,7 +13883,7 @@
                 <a:latin typeface="Segoe UI"/>
                 <a:ea typeface="Microsoft YaHei"/>
               </a:rPr>
-              <a:t>版本 ＋ 灰度比例</a:t>
+              <a:t>版本清单</a:t>
             </a:r>
           </a:p>
         </p:txBody>
@@ -16003,7 +15886,7 @@
                 <a:latin typeface="Segoe UI"/>
                 <a:ea typeface="Microsoft YaHei"/>
               </a:rPr>
-              <a:t>⑤ 独立交付 · 灰度发布与插件扩展</a:t>
+              <a:t>⑤ 独立交付与插件扩展</a:t>
             </a:r>
           </a:p>
         </p:txBody>
@@ -16017,7 +15900,7 @@
         <p:spPr>
           <a:xfrm>
             <a:off x="6217920" y="4389120"/>
-            <a:ext cx="1024128" cy="402336"/>
+            <a:ext cx="1298448" cy="402336"/>
           </a:xfrm>
           <a:prstGeom prst="roundRect">
             <a:avLst>
@@ -16065,7 +15948,7 @@
         <p:spPr>
           <a:xfrm>
             <a:off x="6245352" y="4389120"/>
-            <a:ext cx="969264" cy="402336"/>
+            <a:ext cx="1243584" cy="402336"/>
           </a:xfrm>
           <a:prstGeom prst="rect">
             <a:avLst/>
@@ -16133,8 +16016,8 @@
         </p:nvCxnSpPr>
         <p:spPr>
           <a:xfrm>
-            <a:off x="7242048" y="4590288"/>
-            <a:ext cx="82296" cy="0"/>
+            <a:off x="7516367" y="4590288"/>
+            <a:ext cx="128016" cy="0"/>
           </a:xfrm>
           <a:prstGeom prst="line">
             <a:avLst/>
@@ -16156,8 +16039,8 @@
         </p:nvSpPr>
         <p:spPr>
           <a:xfrm>
-            <a:off x="7324344" y="4389120"/>
-            <a:ext cx="1024128" cy="402336"/>
+            <a:off x="7644383" y="4389120"/>
+            <a:ext cx="1298448" cy="402336"/>
           </a:xfrm>
           <a:prstGeom prst="roundRect">
             <a:avLst>
@@ -16204,8 +16087,8 @@
         </p:nvSpPr>
         <p:spPr>
           <a:xfrm>
-            <a:off x="7351775" y="4389120"/>
-            <a:ext cx="969264" cy="402336"/>
+            <a:off x="7671815" y="4389120"/>
+            <a:ext cx="1243584" cy="402336"/>
           </a:xfrm>
           <a:prstGeom prst="rect">
             <a:avLst/>
@@ -16273,8 +16156,8 @@
         </p:nvCxnSpPr>
         <p:spPr>
           <a:xfrm>
-            <a:off x="8348471" y="4590288"/>
-            <a:ext cx="82296" cy="0"/>
+            <a:off x="8942832" y="4590288"/>
+            <a:ext cx="128016" cy="0"/>
           </a:xfrm>
           <a:prstGeom prst="line">
             <a:avLst/>
@@ -16296,8 +16179,8 @@
         </p:nvSpPr>
         <p:spPr>
           <a:xfrm>
-            <a:off x="8430767" y="4389120"/>
-            <a:ext cx="1024128" cy="402336"/>
+            <a:off x="9070848" y="4389120"/>
+            <a:ext cx="1298448" cy="402336"/>
           </a:xfrm>
           <a:prstGeom prst="roundRect">
             <a:avLst>
@@ -16344,8 +16227,8 @@
         </p:nvSpPr>
         <p:spPr>
           <a:xfrm>
-            <a:off x="8458199" y="4389120"/>
-            <a:ext cx="969264" cy="402336"/>
+            <a:off x="9098280" y="4389120"/>
+            <a:ext cx="1243584" cy="402336"/>
           </a:xfrm>
           <a:prstGeom prst="rect">
             <a:avLst/>
@@ -16413,8 +16296,8 @@
         </p:nvCxnSpPr>
         <p:spPr>
           <a:xfrm>
-            <a:off x="9454896" y="4590288"/>
-            <a:ext cx="82296" cy="0"/>
+            <a:off x="10369296" y="4590288"/>
+            <a:ext cx="128016" cy="0"/>
           </a:xfrm>
           <a:prstGeom prst="line">
             <a:avLst/>
@@ -16436,8 +16319,8 @@
         </p:nvSpPr>
         <p:spPr>
           <a:xfrm>
-            <a:off x="9537192" y="4389120"/>
-            <a:ext cx="1024128" cy="402336"/>
+            <a:off x="10497312" y="4389120"/>
+            <a:ext cx="1298448" cy="402336"/>
           </a:xfrm>
           <a:prstGeom prst="roundRect">
             <a:avLst>
@@ -16484,8 +16367,8 @@
         </p:nvSpPr>
         <p:spPr>
           <a:xfrm>
-            <a:off x="9564624" y="4389120"/>
-            <a:ext cx="969264" cy="402336"/>
+            <a:off x="10524744" y="4389120"/>
+            <a:ext cx="1243584" cy="402336"/>
           </a:xfrm>
           <a:prstGeom prst="rect">
             <a:avLst/>
@@ -16517,7 +16400,7 @@
                 <a:latin typeface="Segoe UI"/>
                 <a:ea typeface="Microsoft YaHei"/>
               </a:rPr>
-              <a:t>④ 灰度</a:t>
+              <a:t>④ 回滚</a:t>
             </a:r>
           </a:p>
           <a:p>
@@ -16540,146 +16423,6 @@
                 <a:latin typeface="Segoe UI"/>
                 <a:ea typeface="Microsoft YaHei"/>
               </a:rPr>
-              <a:t>1→10→100%</a:t>
-            </a:r>
-          </a:p>
-        </p:txBody>
-      </p:sp>
-      <p:cxnSp>
-        <p:nvCxnSpPr>
-          <p:cNvPr id="109" name="Connector 108"/>
-          <p:cNvCxnSpPr/>
-          <p:nvPr/>
-        </p:nvCxnSpPr>
-        <p:spPr>
-          <a:xfrm>
-            <a:off x="10561320" y="4590288"/>
-            <a:ext cx="82296" cy="0"/>
-          </a:xfrm>
-          <a:prstGeom prst="line">
-            <a:avLst/>
-          </a:prstGeom>
-          <a:ln w="16510">
-            <a:solidFill>
-              <a:srgbClr val="059669"/>
-            </a:solidFill>
-            <a:tailEnd type="triangle" w="med" len="med"/>
-          </a:ln>
-          <a:effectLst/>
-        </p:spPr>
-      </p:cxnSp>
-      <p:sp>
-        <p:nvSpPr>
-          <p:cNvPr id="110" name="Rounded Rectangle 109"/>
-          <p:cNvSpPr/>
-          <p:nvPr/>
-        </p:nvSpPr>
-        <p:spPr>
-          <a:xfrm>
-            <a:off x="10643616" y="4389120"/>
-            <a:ext cx="1024128" cy="402336"/>
-          </a:xfrm>
-          <a:prstGeom prst="roundRect">
-            <a:avLst>
-              <a:gd name="adj" fmla="val 11363"/>
-            </a:avLst>
-          </a:prstGeom>
-          <a:solidFill>
-            <a:srgbClr val="ECFDF5"/>
-          </a:solidFill>
-          <a:ln w="13970">
-            <a:solidFill>
-              <a:srgbClr val="A7F3D0"/>
-            </a:solidFill>
-          </a:ln>
-          <a:effectLst/>
-        </p:spPr>
-        <p:style>
-          <a:lnRef idx="1">
-            <a:schemeClr val="accent1"/>
-          </a:lnRef>
-          <a:fillRef idx="3">
-            <a:schemeClr val="accent1"/>
-          </a:fillRef>
-          <a:effectRef idx="2">
-            <a:schemeClr val="accent1"/>
-          </a:effectRef>
-          <a:fontRef idx="minor">
-            <a:schemeClr val="lt1"/>
-          </a:fontRef>
-        </p:style>
-        <p:txBody>
-          <a:bodyPr rtlCol="0" anchor="ctr"/>
-          <a:lstStyle/>
-          <a:p>
-            <a:pPr algn="ctr"/>
-          </a:p>
-        </p:txBody>
-      </p:sp>
-      <p:sp>
-        <p:nvSpPr>
-          <p:cNvPr id="111" name="TextBox 110"/>
-          <p:cNvSpPr txBox="1"/>
-          <p:nvPr/>
-        </p:nvSpPr>
-        <p:spPr>
-          <a:xfrm>
-            <a:off x="10671048" y="4389120"/>
-            <a:ext cx="969264" cy="402336"/>
-          </a:xfrm>
-          <a:prstGeom prst="rect">
-            <a:avLst/>
-          </a:prstGeom>
-          <a:noFill/>
-        </p:spPr>
-        <p:txBody>
-          <a:bodyPr wrap="square" lIns="0" rIns="0" tIns="0" bIns="0" anchor="ctr">
-            <a:noAutofit/>
-          </a:bodyPr>
-          <a:lstStyle/>
-          <a:p>
-            <a:pPr algn="ctr">
-              <a:lnSpc>
-                <a:spcPct val="108000"/>
-              </a:lnSpc>
-              <a:spcBef>
-                <a:spcPts val="0"/>
-              </a:spcBef>
-              <a:spcAft>
-                <a:spcPts val="0"/>
-              </a:spcAft>
-            </a:pPr>
-            <a:r>
-              <a:rPr sz="640" b="1" i="0">
-                <a:solidFill>
-                  <a:srgbClr val="0F172A"/>
-                </a:solidFill>
-                <a:latin typeface="Segoe UI"/>
-                <a:ea typeface="Microsoft YaHei"/>
-              </a:rPr>
-              <a:t>⑤ 回滚</a:t>
-            </a:r>
-          </a:p>
-          <a:p>
-            <a:pPr algn="ctr">
-              <a:lnSpc>
-                <a:spcPct val="108000"/>
-              </a:lnSpc>
-              <a:spcBef>
-                <a:spcPts val="0"/>
-              </a:spcBef>
-              <a:spcAft>
-                <a:spcPts val="0"/>
-              </a:spcAft>
-            </a:pPr>
-            <a:r>
-              <a:rPr sz="550" b="0" i="0">
-                <a:solidFill>
-                  <a:srgbClr val="64748B"/>
-                </a:solidFill>
-                <a:latin typeface="Segoe UI"/>
-                <a:ea typeface="Microsoft YaHei"/>
-              </a:rPr>
               <a:t>分钟级</a:t>
             </a:r>
           </a:p>
@@ -16687,7 +16430,7 @@
       </p:sp>
       <p:sp>
         <p:nvSpPr>
-          <p:cNvPr id="112" name="TextBox 111"/>
+          <p:cNvPr id="109" name="TextBox 108"/>
           <p:cNvSpPr txBox="1"/>
           <p:nvPr/>
         </p:nvSpPr>
@@ -16733,7 +16476,7 @@
       </p:sp>
       <p:sp>
         <p:nvSpPr>
-          <p:cNvPr id="113" name="Rounded Rectangle 112"/>
+          <p:cNvPr id="110" name="Rounded Rectangle 109"/>
           <p:cNvSpPr/>
           <p:nvPr/>
         </p:nvSpPr>
@@ -16781,7 +16524,7 @@
       </p:sp>
       <p:sp>
         <p:nvSpPr>
-          <p:cNvPr id="114" name="TextBox 113"/>
+          <p:cNvPr id="111" name="TextBox 110"/>
           <p:cNvSpPr txBox="1"/>
           <p:nvPr/>
         </p:nvSpPr>
@@ -16850,7 +16593,7 @@
       </p:sp>
       <p:sp>
         <p:nvSpPr>
-          <p:cNvPr id="115" name="Oval 114"/>
+          <p:cNvPr id="112" name="Oval 111"/>
           <p:cNvSpPr/>
           <p:nvPr/>
         </p:nvSpPr>
@@ -16894,7 +16637,7 @@
       </p:sp>
       <p:sp>
         <p:nvSpPr>
-          <p:cNvPr id="116" name="TextBox 115"/>
+          <p:cNvPr id="113" name="TextBox 112"/>
           <p:cNvSpPr txBox="1"/>
           <p:nvPr/>
         </p:nvSpPr>
@@ -16940,7 +16683,7 @@
       </p:sp>
       <p:sp>
         <p:nvSpPr>
-          <p:cNvPr id="117" name="Oval 116"/>
+          <p:cNvPr id="114" name="Oval 113"/>
           <p:cNvSpPr/>
           <p:nvPr/>
         </p:nvSpPr>
@@ -16984,7 +16727,7 @@
       </p:sp>
       <p:sp>
         <p:nvSpPr>
-          <p:cNvPr id="118" name="TextBox 117"/>
+          <p:cNvPr id="115" name="TextBox 114"/>
           <p:cNvSpPr txBox="1"/>
           <p:nvPr/>
         </p:nvSpPr>
@@ -17030,7 +16773,7 @@
       </p:sp>
       <p:sp>
         <p:nvSpPr>
-          <p:cNvPr id="119" name="Oval 118"/>
+          <p:cNvPr id="116" name="Oval 115"/>
           <p:cNvSpPr/>
           <p:nvPr/>
         </p:nvSpPr>
@@ -17074,14 +16817,14 @@
       </p:sp>
       <p:sp>
         <p:nvSpPr>
-          <p:cNvPr id="120" name="TextBox 119"/>
+          <p:cNvPr id="117" name="TextBox 116"/>
           <p:cNvSpPr txBox="1"/>
           <p:nvPr/>
         </p:nvSpPr>
         <p:spPr>
           <a:xfrm>
             <a:off x="3822191" y="5843016"/>
-            <a:ext cx="1097280" cy="146304"/>
+            <a:ext cx="640080" cy="146304"/>
           </a:xfrm>
           <a:prstGeom prst="rect">
             <a:avLst/>
@@ -17113,20 +16856,20 @@
                 <a:latin typeface="Segoe UI"/>
                 <a:ea typeface="Microsoft YaHei"/>
               </a:rPr>
-              <a:t>发布 / 灰度链路</a:t>
-            </a:r>
-          </a:p>
-        </p:txBody>
-      </p:sp>
-      <p:sp>
-        <p:nvSpPr>
-          <p:cNvPr id="121" name="Oval 120"/>
+              <a:t>发布链路</a:t>
+            </a:r>
+          </a:p>
+        </p:txBody>
+      </p:sp>
+      <p:sp>
+        <p:nvSpPr>
+          <p:cNvPr id="118" name="Oval 117"/>
           <p:cNvSpPr/>
           <p:nvPr/>
         </p:nvSpPr>
         <p:spPr>
           <a:xfrm>
-            <a:off x="5266944" y="5888736"/>
+            <a:off x="4809744" y="5888736"/>
             <a:ext cx="82296" cy="82296"/>
           </a:xfrm>
           <a:prstGeom prst="ellipse">
@@ -17164,13 +16907,13 @@
       </p:sp>
       <p:sp>
         <p:nvSpPr>
-          <p:cNvPr id="122" name="TextBox 121"/>
+          <p:cNvPr id="119" name="TextBox 118"/>
           <p:cNvSpPr txBox="1"/>
           <p:nvPr/>
         </p:nvSpPr>
         <p:spPr>
           <a:xfrm>
-            <a:off x="5394959" y="5843016"/>
+            <a:off x="4937759" y="5843016"/>
             <a:ext cx="914400" cy="146304"/>
           </a:xfrm>
           <a:prstGeom prst="rect">
@@ -17210,7 +16953,7 @@
       </p:sp>
       <p:sp>
         <p:nvSpPr>
-          <p:cNvPr id="123" name="TextBox 122"/>
+          <p:cNvPr id="120" name="TextBox 119"/>
           <p:cNvSpPr txBox="1"/>
           <p:nvPr/>
         </p:nvSpPr>

--- a/One-Abbott_共享应用平台_技术架构图集.pptx
+++ b/One-Abbott_共享应用平台_技术架构图集.pptx
@@ -11109,7 +11109,7 @@
                 <a:ea typeface="Microsoft YaHei"/>
               </a:rPr>
               <a:t>React 18 · TS 5 · Rspack / Vite · Taro 小程序
-独立开发 · 独立部署 · 独立灰度 · 共享治理</a:t>
+独立开发 · 独立部署 · 共享治理</a:t>
             </a:r>
           </a:p>
         </p:txBody>

--- a/One-Abbott_共享应用平台_技术架构图集.pptx
+++ b/One-Abbott_共享应用平台_技术架构图集.pptx
@@ -3245,7 +3245,7 @@
         <p:spPr>
           <a:xfrm>
             <a:off x="201168" y="566928"/>
-            <a:ext cx="7626096" cy="713232"/>
+            <a:ext cx="11786616" cy="713232"/>
           </a:xfrm>
           <a:prstGeom prst="roundRect">
             <a:avLst>
@@ -3339,7 +3339,7 @@
         <p:spPr>
           <a:xfrm>
             <a:off x="365760" y="841248"/>
-            <a:ext cx="1417320" cy="365760"/>
+            <a:ext cx="2212848" cy="365760"/>
           </a:xfrm>
           <a:prstGeom prst="roundRect">
             <a:avLst>
@@ -3387,7 +3387,7 @@
         <p:spPr>
           <a:xfrm>
             <a:off x="393192" y="841248"/>
-            <a:ext cx="1362456" cy="365760"/>
+            <a:ext cx="2157984" cy="365760"/>
           </a:xfrm>
           <a:prstGeom prst="rect">
             <a:avLst/>
@@ -3412,7 +3412,7 @@
               </a:spcAft>
             </a:pPr>
             <a:r>
-              <a:rPr sz="680" b="0" i="0">
+              <a:rPr sz="720" b="0" i="0">
                 <a:solidFill>
                   <a:srgbClr val="0F172A"/>
                 </a:solidFill>
@@ -3435,7 +3435,7 @@
               </a:spcAft>
             </a:pPr>
             <a:r>
-              <a:rPr sz="580" b="0" i="0">
+              <a:rPr sz="600" b="0" i="0">
                 <a:solidFill>
                   <a:srgbClr val="64748B"/>
                 </a:solidFill>
@@ -3455,8 +3455,8 @@
         </p:nvSpPr>
         <p:spPr>
           <a:xfrm>
-            <a:off x="1842516" y="841248"/>
-            <a:ext cx="1417320" cy="365760"/>
+            <a:off x="2651760" y="841248"/>
+            <a:ext cx="2212848" cy="365760"/>
           </a:xfrm>
           <a:prstGeom prst="roundRect">
             <a:avLst>
@@ -3503,8 +3503,8 @@
         </p:nvSpPr>
         <p:spPr>
           <a:xfrm>
-            <a:off x="1869948" y="841248"/>
-            <a:ext cx="1362456" cy="365760"/>
+            <a:off x="2679191" y="841248"/>
+            <a:ext cx="2157984" cy="365760"/>
           </a:xfrm>
           <a:prstGeom prst="rect">
             <a:avLst/>
@@ -3529,7 +3529,7 @@
               </a:spcAft>
             </a:pPr>
             <a:r>
-              <a:rPr sz="680" b="0" i="0">
+              <a:rPr sz="720" b="0" i="0">
                 <a:solidFill>
                   <a:srgbClr val="0F172A"/>
                 </a:solidFill>
@@ -3552,7 +3552,7 @@
               </a:spcAft>
             </a:pPr>
             <a:r>
-              <a:rPr sz="580" b="0" i="0">
+              <a:rPr sz="600" b="0" i="0">
                 <a:solidFill>
                   <a:srgbClr val="64748B"/>
                 </a:solidFill>
@@ -3572,8 +3572,8 @@
         </p:nvSpPr>
         <p:spPr>
           <a:xfrm>
-            <a:off x="3319272" y="841248"/>
-            <a:ext cx="1417320" cy="365760"/>
+            <a:off x="4937760" y="841248"/>
+            <a:ext cx="2212848" cy="365760"/>
           </a:xfrm>
           <a:prstGeom prst="roundRect">
             <a:avLst>
@@ -3620,8 +3620,8 @@
         </p:nvSpPr>
         <p:spPr>
           <a:xfrm>
-            <a:off x="3346703" y="841248"/>
-            <a:ext cx="1362456" cy="365760"/>
+            <a:off x="4965192" y="841248"/>
+            <a:ext cx="2157984" cy="365760"/>
           </a:xfrm>
           <a:prstGeom prst="rect">
             <a:avLst/>
@@ -3646,7 +3646,7 @@
               </a:spcAft>
             </a:pPr>
             <a:r>
-              <a:rPr sz="680" b="0" i="0">
+              <a:rPr sz="720" b="0" i="0">
                 <a:solidFill>
                   <a:srgbClr val="0F172A"/>
                 </a:solidFill>
@@ -3669,7 +3669,7 @@
               </a:spcAft>
             </a:pPr>
             <a:r>
-              <a:rPr sz="580" b="0" i="0">
+              <a:rPr sz="600" b="0" i="0">
                 <a:solidFill>
                   <a:srgbClr val="64748B"/>
                 </a:solidFill>
@@ -3689,8 +3689,8 @@
         </p:nvSpPr>
         <p:spPr>
           <a:xfrm>
-            <a:off x="4796028" y="841248"/>
-            <a:ext cx="1417320" cy="365760"/>
+            <a:off x="7223760" y="841248"/>
+            <a:ext cx="2212848" cy="365760"/>
           </a:xfrm>
           <a:prstGeom prst="roundRect">
             <a:avLst>
@@ -3737,8 +3737,8 @@
         </p:nvSpPr>
         <p:spPr>
           <a:xfrm>
-            <a:off x="4823460" y="841248"/>
-            <a:ext cx="1362456" cy="365760"/>
+            <a:off x="7251192" y="841248"/>
+            <a:ext cx="2157984" cy="365760"/>
           </a:xfrm>
           <a:prstGeom prst="rect">
             <a:avLst/>
@@ -3763,7 +3763,7 @@
               </a:spcAft>
             </a:pPr>
             <a:r>
-              <a:rPr sz="680" b="0" i="0">
+              <a:rPr sz="720" b="0" i="0">
                 <a:solidFill>
                   <a:srgbClr val="0F172A"/>
                 </a:solidFill>
@@ -3786,7 +3786,7 @@
               </a:spcAft>
             </a:pPr>
             <a:r>
-              <a:rPr sz="580" b="0" i="0">
+              <a:rPr sz="600" b="0" i="0">
                 <a:solidFill>
                   <a:srgbClr val="64748B"/>
                 </a:solidFill>
@@ -3806,8 +3806,8 @@
         </p:nvSpPr>
         <p:spPr>
           <a:xfrm>
-            <a:off x="6272784" y="841248"/>
-            <a:ext cx="1417320" cy="365760"/>
+            <a:off x="9509760" y="841248"/>
+            <a:ext cx="2212848" cy="365760"/>
           </a:xfrm>
           <a:prstGeom prst="roundRect">
             <a:avLst>
@@ -3854,8 +3854,8 @@
         </p:nvSpPr>
         <p:spPr>
           <a:xfrm>
-            <a:off x="6300216" y="841248"/>
-            <a:ext cx="1362456" cy="365760"/>
+            <a:off x="9537192" y="841248"/>
+            <a:ext cx="2157984" cy="365760"/>
           </a:xfrm>
           <a:prstGeom prst="rect">
             <a:avLst/>
@@ -3880,7 +3880,7 @@
               </a:spcAft>
             </a:pPr>
             <a:r>
-              <a:rPr sz="680" b="0" i="0">
+              <a:rPr sz="720" b="0" i="0">
                 <a:solidFill>
                   <a:srgbClr val="0F172A"/>
                 </a:solidFill>
@@ -3903,7 +3903,7 @@
               </a:spcAft>
             </a:pPr>
             <a:r>
-              <a:rPr sz="580" b="0" i="0">
+              <a:rPr sz="600" b="0" i="0">
                 <a:solidFill>
                   <a:srgbClr val="64748B"/>
                 </a:solidFill>
@@ -3923,7 +3923,7 @@
         </p:nvCxnSpPr>
         <p:spPr>
           <a:xfrm>
-            <a:off x="2377440" y="1280160"/>
+            <a:off x="3840480" y="1280160"/>
             <a:ext cx="0" cy="91440"/>
           </a:xfrm>
           <a:prstGeom prst="line">
@@ -3946,7 +3946,7 @@
         </p:nvCxnSpPr>
         <p:spPr>
           <a:xfrm>
-            <a:off x="5486400" y="1280160"/>
+            <a:off x="8046720" y="1280160"/>
             <a:ext cx="0" cy="91440"/>
           </a:xfrm>
           <a:prstGeom prst="line">
@@ -3969,7 +3969,7 @@
         </p:nvSpPr>
         <p:spPr>
           <a:xfrm>
-            <a:off x="2468880" y="1275588"/>
+            <a:off x="3931920" y="1275588"/>
             <a:ext cx="1097280" cy="100584"/>
           </a:xfrm>
           <a:prstGeom prst="rect">
@@ -4016,7 +4016,7 @@
         <p:spPr>
           <a:xfrm>
             <a:off x="201168" y="1371600"/>
-            <a:ext cx="7626096" cy="457200"/>
+            <a:ext cx="11786616" cy="457200"/>
           </a:xfrm>
           <a:prstGeom prst="roundRect">
             <a:avLst>
@@ -4110,7 +4110,7 @@
         <p:spPr>
           <a:xfrm>
             <a:off x="1389888" y="1472184"/>
-            <a:ext cx="960120" cy="256032"/>
+            <a:ext cx="1554480" cy="256032"/>
           </a:xfrm>
           <a:prstGeom prst="roundRect">
             <a:avLst>
@@ -4158,7 +4158,7 @@
         <p:spPr>
           <a:xfrm>
             <a:off x="1417320" y="1472184"/>
-            <a:ext cx="905256" cy="256032"/>
+            <a:ext cx="1499616" cy="256032"/>
           </a:xfrm>
           <a:prstGeom prst="rect">
             <a:avLst/>
@@ -4183,7 +4183,7 @@
               </a:spcAft>
             </a:pPr>
             <a:r>
-              <a:rPr sz="640" b="0" i="0">
+              <a:rPr sz="660" b="0" i="0">
                 <a:solidFill>
                   <a:srgbClr val="0F172A"/>
                 </a:solidFill>
@@ -4203,8 +4203,8 @@
         </p:nvSpPr>
         <p:spPr>
           <a:xfrm>
-            <a:off x="2404872" y="1472184"/>
-            <a:ext cx="1371600" cy="256032"/>
+            <a:off x="3017520" y="1472184"/>
+            <a:ext cx="2468880" cy="256032"/>
           </a:xfrm>
           <a:prstGeom prst="roundRect">
             <a:avLst>
@@ -4251,8 +4251,8 @@
         </p:nvSpPr>
         <p:spPr>
           <a:xfrm>
-            <a:off x="2432303" y="1472184"/>
-            <a:ext cx="1316736" cy="256032"/>
+            <a:off x="3044951" y="1472184"/>
+            <a:ext cx="2414016" cy="256032"/>
           </a:xfrm>
           <a:prstGeom prst="rect">
             <a:avLst/>
@@ -4277,7 +4277,7 @@
               </a:spcAft>
             </a:pPr>
             <a:r>
-              <a:rPr sz="640" b="0" i="0">
+              <a:rPr sz="660" b="0" i="0">
                 <a:solidFill>
                   <a:srgbClr val="1E40AF"/>
                 </a:solidFill>
@@ -4297,8 +4297,8 @@
         </p:nvSpPr>
         <p:spPr>
           <a:xfrm>
-            <a:off x="3831336" y="1472184"/>
-            <a:ext cx="1463040" cy="256032"/>
+            <a:off x="5559552" y="1472184"/>
+            <a:ext cx="2651760" cy="256032"/>
           </a:xfrm>
           <a:prstGeom prst="roundRect">
             <a:avLst>
@@ -4345,8 +4345,8 @@
         </p:nvSpPr>
         <p:spPr>
           <a:xfrm>
-            <a:off x="3858768" y="1472184"/>
-            <a:ext cx="1408176" cy="256032"/>
+            <a:off x="5586984" y="1472184"/>
+            <a:ext cx="2596896" cy="256032"/>
           </a:xfrm>
           <a:prstGeom prst="rect">
             <a:avLst/>
@@ -4371,7 +4371,7 @@
               </a:spcAft>
             </a:pPr>
             <a:r>
-              <a:rPr sz="640" b="0" i="0">
+              <a:rPr sz="660" b="0" i="0">
                 <a:solidFill>
                   <a:srgbClr val="1E40AF"/>
                 </a:solidFill>
@@ -4391,8 +4391,8 @@
         </p:nvSpPr>
         <p:spPr>
           <a:xfrm>
-            <a:off x="5349240" y="1472184"/>
-            <a:ext cx="2286000" cy="256032"/>
+            <a:off x="8284464" y="1472184"/>
+            <a:ext cx="3474720" cy="256032"/>
           </a:xfrm>
           <a:prstGeom prst="roundRect">
             <a:avLst>
@@ -4439,8 +4439,8 @@
         </p:nvSpPr>
         <p:spPr>
           <a:xfrm>
-            <a:off x="5376672" y="1472184"/>
-            <a:ext cx="2231136" cy="256032"/>
+            <a:off x="8311896" y="1472184"/>
+            <a:ext cx="3419856" cy="256032"/>
           </a:xfrm>
           <a:prstGeom prst="rect">
             <a:avLst/>
@@ -4465,7 +4465,7 @@
               </a:spcAft>
             </a:pPr>
             <a:r>
-              <a:rPr sz="620" b="0" i="0">
+              <a:rPr sz="640" b="0" i="0">
                 <a:solidFill>
                   <a:srgbClr val="1E40AF"/>
                 </a:solidFill>
@@ -4485,7 +4485,7 @@
         </p:nvCxnSpPr>
         <p:spPr>
           <a:xfrm>
-            <a:off x="2377440" y="1828800"/>
+            <a:off x="3840480" y="1828800"/>
             <a:ext cx="0" cy="91440"/>
           </a:xfrm>
           <a:prstGeom prst="line">
@@ -4508,7 +4508,7 @@
         </p:nvCxnSpPr>
         <p:spPr>
           <a:xfrm>
-            <a:off x="5486400" y="1828800"/>
+            <a:off x="8046720" y="1828800"/>
             <a:ext cx="0" cy="91440"/>
           </a:xfrm>
           <a:prstGeom prst="line">
@@ -4532,7 +4532,7 @@
         <p:spPr>
           <a:xfrm>
             <a:off x="201168" y="1920240"/>
-            <a:ext cx="7626096" cy="530352"/>
+            <a:ext cx="11786616" cy="530352"/>
           </a:xfrm>
           <a:prstGeom prst="roundRect">
             <a:avLst>
@@ -4626,7 +4626,7 @@
         <p:spPr>
           <a:xfrm>
             <a:off x="365760" y="2157984"/>
-            <a:ext cx="1737360" cy="237744"/>
+            <a:ext cx="2761488" cy="237744"/>
           </a:xfrm>
           <a:prstGeom prst="roundRect">
             <a:avLst>
@@ -4674,7 +4674,7 @@
         <p:spPr>
           <a:xfrm>
             <a:off x="393192" y="2157984"/>
-            <a:ext cx="1682495" cy="237744"/>
+            <a:ext cx="2706624" cy="237744"/>
           </a:xfrm>
           <a:prstGeom prst="rect">
             <a:avLst/>
@@ -4699,7 +4699,7 @@
               </a:spcAft>
             </a:pPr>
             <a:r>
-              <a:rPr sz="660" b="0" i="0">
+              <a:rPr sz="680" b="0" i="0">
                 <a:solidFill>
                   <a:srgbClr val="0F172A"/>
                 </a:solidFill>
@@ -4719,8 +4719,8 @@
         </p:nvSpPr>
         <p:spPr>
           <a:xfrm>
-            <a:off x="2167128" y="2157984"/>
-            <a:ext cx="1737360" cy="237744"/>
+            <a:off x="3218688" y="2157984"/>
+            <a:ext cx="2761488" cy="237744"/>
           </a:xfrm>
           <a:prstGeom prst="roundRect">
             <a:avLst>
@@ -4767,8 +4767,8 @@
         </p:nvSpPr>
         <p:spPr>
           <a:xfrm>
-            <a:off x="2194560" y="2157984"/>
-            <a:ext cx="1682495" cy="237744"/>
+            <a:off x="3246120" y="2157984"/>
+            <a:ext cx="2706624" cy="237744"/>
           </a:xfrm>
           <a:prstGeom prst="rect">
             <a:avLst/>
@@ -4793,7 +4793,7 @@
               </a:spcAft>
             </a:pPr>
             <a:r>
-              <a:rPr sz="660" b="0" i="0">
+              <a:rPr sz="680" b="0" i="0">
                 <a:solidFill>
                   <a:srgbClr val="0F172A"/>
                 </a:solidFill>
@@ -4813,8 +4813,8 @@
         </p:nvSpPr>
         <p:spPr>
           <a:xfrm>
-            <a:off x="3968496" y="2157984"/>
-            <a:ext cx="1737360" cy="237744"/>
+            <a:off x="6071616" y="2157984"/>
+            <a:ext cx="2761488" cy="237744"/>
           </a:xfrm>
           <a:prstGeom prst="roundRect">
             <a:avLst>
@@ -4861,8 +4861,8 @@
         </p:nvSpPr>
         <p:spPr>
           <a:xfrm>
-            <a:off x="3995928" y="2157984"/>
-            <a:ext cx="1682495" cy="237744"/>
+            <a:off x="6099048" y="2157984"/>
+            <a:ext cx="2706624" cy="237744"/>
           </a:xfrm>
           <a:prstGeom prst="rect">
             <a:avLst/>
@@ -4887,7 +4887,7 @@
               </a:spcAft>
             </a:pPr>
             <a:r>
-              <a:rPr sz="660" b="0" i="0">
+              <a:rPr sz="680" b="0" i="0">
                 <a:solidFill>
                   <a:srgbClr val="0F172A"/>
                 </a:solidFill>
@@ -4907,8 +4907,8 @@
         </p:nvSpPr>
         <p:spPr>
           <a:xfrm>
-            <a:off x="5769864" y="2157984"/>
-            <a:ext cx="1737360" cy="237744"/>
+            <a:off x="8924544" y="2157984"/>
+            <a:ext cx="2761488" cy="237744"/>
           </a:xfrm>
           <a:prstGeom prst="roundRect">
             <a:avLst>
@@ -4955,8 +4955,8 @@
         </p:nvSpPr>
         <p:spPr>
           <a:xfrm>
-            <a:off x="5797296" y="2157984"/>
-            <a:ext cx="1682495" cy="237744"/>
+            <a:off x="8951976" y="2157984"/>
+            <a:ext cx="2706624" cy="237744"/>
           </a:xfrm>
           <a:prstGeom prst="rect">
             <a:avLst/>
@@ -4981,7 +4981,7 @@
               </a:spcAft>
             </a:pPr>
             <a:r>
-              <a:rPr sz="660" b="0" i="0">
+              <a:rPr sz="680" b="0" i="0">
                 <a:solidFill>
                   <a:srgbClr val="0F172A"/>
                 </a:solidFill>
@@ -5001,7 +5001,7 @@
         </p:nvCxnSpPr>
         <p:spPr>
           <a:xfrm>
-            <a:off x="2377440" y="2450592"/>
+            <a:off x="3840480" y="2450592"/>
             <a:ext cx="0" cy="91440"/>
           </a:xfrm>
           <a:prstGeom prst="line">
@@ -5024,7 +5024,7 @@
         </p:nvCxnSpPr>
         <p:spPr>
           <a:xfrm>
-            <a:off x="5486400" y="2450592"/>
+            <a:off x="8046720" y="2450592"/>
             <a:ext cx="0" cy="91440"/>
           </a:xfrm>
           <a:prstGeom prst="line">
@@ -5047,7 +5047,7 @@
         </p:nvSpPr>
         <p:spPr>
           <a:xfrm>
-            <a:off x="5577840" y="2446020"/>
+            <a:off x="8138160" y="2446020"/>
             <a:ext cx="914400" cy="100584"/>
           </a:xfrm>
           <a:prstGeom prst="rect">
@@ -5094,7 +5094,7 @@
         <p:spPr>
           <a:xfrm>
             <a:off x="201168" y="2542032"/>
-            <a:ext cx="7626096" cy="1719072"/>
+            <a:ext cx="11786616" cy="1719072"/>
           </a:xfrm>
           <a:prstGeom prst="roundRect">
             <a:avLst>
@@ -5187,8 +5187,8 @@
         </p:nvSpPr>
         <p:spPr>
           <a:xfrm>
-            <a:off x="5120640" y="2615184"/>
-            <a:ext cx="2596896" cy="118872"/>
+            <a:off x="8284464" y="2615184"/>
+            <a:ext cx="3611880" cy="118872"/>
           </a:xfrm>
           <a:prstGeom prst="rect">
             <a:avLst/>
@@ -5374,7 +5374,7 @@
         <p:spPr>
           <a:xfrm>
             <a:off x="676656" y="2724912"/>
-            <a:ext cx="1691640" cy="603504"/>
+            <a:ext cx="2670048" cy="603504"/>
           </a:xfrm>
           <a:prstGeom prst="roundRect">
             <a:avLst>
@@ -5428,7 +5428,7 @@
         <p:spPr>
           <a:xfrm>
             <a:off x="722376" y="2766060"/>
-            <a:ext cx="1600200" cy="128016"/>
+            <a:ext cx="2578608" cy="128016"/>
           </a:xfrm>
           <a:prstGeom prst="rect">
             <a:avLst/>
@@ -5474,7 +5474,7 @@
         <p:spPr>
           <a:xfrm>
             <a:off x="722376" y="2930652"/>
-            <a:ext cx="1600200" cy="118872"/>
+            <a:ext cx="2578608" cy="118872"/>
           </a:xfrm>
           <a:prstGeom prst="rect">
             <a:avLst/>
@@ -5520,7 +5520,7 @@
         <p:spPr>
           <a:xfrm>
             <a:off x="722376" y="3108960"/>
-            <a:ext cx="1600200" cy="118872"/>
+            <a:ext cx="2578608" cy="118872"/>
           </a:xfrm>
           <a:prstGeom prst="rect">
             <a:avLst/>
@@ -5565,8 +5565,8 @@
         </p:nvSpPr>
         <p:spPr>
           <a:xfrm>
-            <a:off x="2432304" y="2724912"/>
-            <a:ext cx="1691640" cy="603504"/>
+            <a:off x="3438144" y="2724912"/>
+            <a:ext cx="2670048" cy="603504"/>
           </a:xfrm>
           <a:prstGeom prst="roundRect">
             <a:avLst>
@@ -5619,8 +5619,8 @@
         </p:nvSpPr>
         <p:spPr>
           <a:xfrm>
-            <a:off x="2478024" y="2766060"/>
-            <a:ext cx="1600200" cy="128016"/>
+            <a:off x="3483863" y="2766060"/>
+            <a:ext cx="2578608" cy="128016"/>
           </a:xfrm>
           <a:prstGeom prst="rect">
             <a:avLst/>
@@ -5665,8 +5665,8 @@
         </p:nvSpPr>
         <p:spPr>
           <a:xfrm>
-            <a:off x="2478024" y="2930652"/>
-            <a:ext cx="1600200" cy="118872"/>
+            <a:off x="3483863" y="2930652"/>
+            <a:ext cx="2578608" cy="118872"/>
           </a:xfrm>
           <a:prstGeom prst="rect">
             <a:avLst/>
@@ -5711,8 +5711,8 @@
         </p:nvSpPr>
         <p:spPr>
           <a:xfrm>
-            <a:off x="2478024" y="3108960"/>
-            <a:ext cx="1600200" cy="118872"/>
+            <a:off x="3483863" y="3108960"/>
+            <a:ext cx="2578608" cy="118872"/>
           </a:xfrm>
           <a:prstGeom prst="rect">
             <a:avLst/>
@@ -5757,8 +5757,8 @@
         </p:nvSpPr>
         <p:spPr>
           <a:xfrm>
-            <a:off x="4187952" y="2724912"/>
-            <a:ext cx="1691640" cy="603504"/>
+            <a:off x="6199632" y="2724912"/>
+            <a:ext cx="2670048" cy="603504"/>
           </a:xfrm>
           <a:prstGeom prst="roundRect">
             <a:avLst>
@@ -5811,8 +5811,8 @@
         </p:nvSpPr>
         <p:spPr>
           <a:xfrm>
-            <a:off x="4233672" y="2766060"/>
-            <a:ext cx="1600200" cy="128016"/>
+            <a:off x="6245352" y="2766060"/>
+            <a:ext cx="2578608" cy="128016"/>
           </a:xfrm>
           <a:prstGeom prst="rect">
             <a:avLst/>
@@ -5857,8 +5857,8 @@
         </p:nvSpPr>
         <p:spPr>
           <a:xfrm>
-            <a:off x="4233672" y="2930652"/>
-            <a:ext cx="1600200" cy="118872"/>
+            <a:off x="6245352" y="2930652"/>
+            <a:ext cx="2578608" cy="118872"/>
           </a:xfrm>
           <a:prstGeom prst="rect">
             <a:avLst/>
@@ -5903,8 +5903,8 @@
         </p:nvSpPr>
         <p:spPr>
           <a:xfrm>
-            <a:off x="4233672" y="3108960"/>
-            <a:ext cx="1600200" cy="118872"/>
+            <a:off x="6245352" y="3108960"/>
+            <a:ext cx="2578608" cy="118872"/>
           </a:xfrm>
           <a:prstGeom prst="rect">
             <a:avLst/>
@@ -5949,8 +5949,8 @@
         </p:nvSpPr>
         <p:spPr>
           <a:xfrm>
-            <a:off x="5943600" y="2724912"/>
-            <a:ext cx="1691640" cy="603504"/>
+            <a:off x="8961120" y="2724912"/>
+            <a:ext cx="2670048" cy="603504"/>
           </a:xfrm>
           <a:prstGeom prst="roundRect">
             <a:avLst>
@@ -6003,8 +6003,8 @@
         </p:nvSpPr>
         <p:spPr>
           <a:xfrm>
-            <a:off x="5989320" y="2766060"/>
-            <a:ext cx="1600200" cy="128016"/>
+            <a:off x="9006840" y="2766060"/>
+            <a:ext cx="2578608" cy="128016"/>
           </a:xfrm>
           <a:prstGeom prst="rect">
             <a:avLst/>
@@ -6049,8 +6049,8 @@
         </p:nvSpPr>
         <p:spPr>
           <a:xfrm>
-            <a:off x="5989320" y="2930652"/>
-            <a:ext cx="1600200" cy="118872"/>
+            <a:off x="9006840" y="2930652"/>
+            <a:ext cx="2578608" cy="118872"/>
           </a:xfrm>
           <a:prstGeom prst="rect">
             <a:avLst/>
@@ -6095,8 +6095,8 @@
         </p:nvSpPr>
         <p:spPr>
           <a:xfrm>
-            <a:off x="5989320" y="3108960"/>
-            <a:ext cx="1600200" cy="118872"/>
+            <a:off x="9006840" y="3108960"/>
+            <a:ext cx="2578608" cy="118872"/>
           </a:xfrm>
           <a:prstGeom prst="rect">
             <a:avLst/>
@@ -6142,7 +6142,7 @@
         <p:spPr>
           <a:xfrm>
             <a:off x="676656" y="3401568"/>
-            <a:ext cx="2286000" cy="603504"/>
+            <a:ext cx="3611880" cy="603504"/>
           </a:xfrm>
           <a:prstGeom prst="roundRect">
             <a:avLst>
@@ -6196,7 +6196,7 @@
         <p:spPr>
           <a:xfrm>
             <a:off x="722376" y="3442716"/>
-            <a:ext cx="2194560" cy="128016"/>
+            <a:ext cx="3520440" cy="128016"/>
           </a:xfrm>
           <a:prstGeom prst="rect">
             <a:avLst/>
@@ -6242,7 +6242,7 @@
         <p:spPr>
           <a:xfrm>
             <a:off x="722376" y="3607308"/>
-            <a:ext cx="2194560" cy="118872"/>
+            <a:ext cx="3520440" cy="118872"/>
           </a:xfrm>
           <a:prstGeom prst="rect">
             <a:avLst/>
@@ -6288,7 +6288,7 @@
         <p:spPr>
           <a:xfrm>
             <a:off x="722376" y="3785615"/>
-            <a:ext cx="2194560" cy="118872"/>
+            <a:ext cx="3520440" cy="118872"/>
           </a:xfrm>
           <a:prstGeom prst="rect">
             <a:avLst/>
@@ -6333,8 +6333,8 @@
         </p:nvSpPr>
         <p:spPr>
           <a:xfrm>
-            <a:off x="3035808" y="3401568"/>
-            <a:ext cx="2286000" cy="603504"/>
+            <a:off x="4379976" y="3401568"/>
+            <a:ext cx="3611880" cy="603504"/>
           </a:xfrm>
           <a:prstGeom prst="roundRect">
             <a:avLst>
@@ -6387,8 +6387,8 @@
         </p:nvSpPr>
         <p:spPr>
           <a:xfrm>
-            <a:off x="3081528" y="3442716"/>
-            <a:ext cx="2194560" cy="128016"/>
+            <a:off x="4425696" y="3442716"/>
+            <a:ext cx="3520440" cy="128016"/>
           </a:xfrm>
           <a:prstGeom prst="rect">
             <a:avLst/>
@@ -6433,8 +6433,8 @@
         </p:nvSpPr>
         <p:spPr>
           <a:xfrm>
-            <a:off x="3081528" y="3607308"/>
-            <a:ext cx="2194560" cy="118872"/>
+            <a:off x="4425696" y="3607308"/>
+            <a:ext cx="3520440" cy="118872"/>
           </a:xfrm>
           <a:prstGeom prst="rect">
             <a:avLst/>
@@ -6479,8 +6479,8 @@
         </p:nvSpPr>
         <p:spPr>
           <a:xfrm>
-            <a:off x="3081528" y="3785615"/>
-            <a:ext cx="2194560" cy="118872"/>
+            <a:off x="4425696" y="3785615"/>
+            <a:ext cx="3520440" cy="118872"/>
           </a:xfrm>
           <a:prstGeom prst="rect">
             <a:avLst/>
@@ -6525,8 +6525,8 @@
         </p:nvSpPr>
         <p:spPr>
           <a:xfrm>
-            <a:off x="5394960" y="3401568"/>
-            <a:ext cx="2286000" cy="603504"/>
+            <a:off x="8083296" y="3401568"/>
+            <a:ext cx="3611880" cy="603504"/>
           </a:xfrm>
           <a:prstGeom prst="roundRect">
             <a:avLst>
@@ -6579,8 +6579,8 @@
         </p:nvSpPr>
         <p:spPr>
           <a:xfrm>
-            <a:off x="5440680" y="3442716"/>
-            <a:ext cx="2194560" cy="128016"/>
+            <a:off x="8129016" y="3442716"/>
+            <a:ext cx="3520440" cy="128016"/>
           </a:xfrm>
           <a:prstGeom prst="rect">
             <a:avLst/>
@@ -6625,8 +6625,8 @@
         </p:nvSpPr>
         <p:spPr>
           <a:xfrm>
-            <a:off x="5440680" y="3607308"/>
-            <a:ext cx="2194560" cy="118872"/>
+            <a:off x="8129016" y="3607308"/>
+            <a:ext cx="3520440" cy="118872"/>
           </a:xfrm>
           <a:prstGeom prst="rect">
             <a:avLst/>
@@ -6671,8 +6671,8 @@
         </p:nvSpPr>
         <p:spPr>
           <a:xfrm>
-            <a:off x="5440680" y="3785615"/>
-            <a:ext cx="2194560" cy="118872"/>
+            <a:off x="8129016" y="3785615"/>
+            <a:ext cx="3520440" cy="118872"/>
           </a:xfrm>
           <a:prstGeom prst="rect">
             <a:avLst/>
@@ -6718,7 +6718,7 @@
         <p:spPr>
           <a:xfrm>
             <a:off x="365760" y="4041648"/>
-            <a:ext cx="7315200" cy="137160"/>
+            <a:ext cx="11430000" cy="137160"/>
           </a:xfrm>
           <a:prstGeom prst="rect">
             <a:avLst/>
@@ -6763,7 +6763,7 @@
         </p:nvCxnSpPr>
         <p:spPr>
           <a:xfrm>
-            <a:off x="2377440" y="4261104"/>
+            <a:off x="3840480" y="4261104"/>
             <a:ext cx="0" cy="91440"/>
           </a:xfrm>
           <a:prstGeom prst="line">
@@ -6786,7 +6786,7 @@
         </p:nvCxnSpPr>
         <p:spPr>
           <a:xfrm>
-            <a:off x="5486400" y="4261104"/>
+            <a:off x="8046720" y="4261104"/>
             <a:ext cx="0" cy="91440"/>
           </a:xfrm>
           <a:prstGeom prst="line">
@@ -6809,7 +6809,7 @@
         </p:nvSpPr>
         <p:spPr>
           <a:xfrm>
-            <a:off x="2468880" y="4256532"/>
+            <a:off x="3931920" y="4256532"/>
             <a:ext cx="1097280" cy="100584"/>
           </a:xfrm>
           <a:prstGeom prst="rect">
@@ -6856,7 +6856,7 @@
         <p:spPr>
           <a:xfrm>
             <a:off x="201168" y="4352544"/>
-            <a:ext cx="7626096" cy="420624"/>
+            <a:ext cx="11786616" cy="420624"/>
           </a:xfrm>
           <a:prstGeom prst="roundRect">
             <a:avLst>
@@ -6998,7 +6998,7 @@
         <p:spPr>
           <a:xfrm>
             <a:off x="1261872" y="4434840"/>
-            <a:ext cx="3145536" cy="256032"/>
+            <a:ext cx="5120640" cy="256032"/>
           </a:xfrm>
           <a:prstGeom prst="roundRect">
             <a:avLst>
@@ -7046,7 +7046,7 @@
         <p:spPr>
           <a:xfrm>
             <a:off x="1289304" y="4434840"/>
-            <a:ext cx="3090672" cy="256032"/>
+            <a:ext cx="5065776" cy="256032"/>
           </a:xfrm>
           <a:prstGeom prst="rect">
             <a:avLst/>
@@ -7114,8 +7114,8 @@
         </p:nvSpPr>
         <p:spPr>
           <a:xfrm>
-            <a:off x="4480560" y="4434840"/>
-            <a:ext cx="3145536" cy="256032"/>
+            <a:off x="6455664" y="4434840"/>
+            <a:ext cx="5120640" cy="256032"/>
           </a:xfrm>
           <a:prstGeom prst="roundRect">
             <a:avLst>
@@ -7162,8 +7162,8 @@
         </p:nvSpPr>
         <p:spPr>
           <a:xfrm>
-            <a:off x="4507992" y="4434840"/>
-            <a:ext cx="3090672" cy="256032"/>
+            <a:off x="6483096" y="4434840"/>
+            <a:ext cx="5065776" cy="256032"/>
           </a:xfrm>
           <a:prstGeom prst="rect">
             <a:avLst/>
@@ -7231,7 +7231,7 @@
         </p:nvCxnSpPr>
         <p:spPr>
           <a:xfrm>
-            <a:off x="2377440" y="4773168"/>
+            <a:off x="3840480" y="4773168"/>
             <a:ext cx="0" cy="91440"/>
           </a:xfrm>
           <a:prstGeom prst="line">
@@ -7254,7 +7254,7 @@
         </p:nvCxnSpPr>
         <p:spPr>
           <a:xfrm>
-            <a:off x="5486400" y="4773168"/>
+            <a:off x="8046720" y="4773168"/>
             <a:ext cx="0" cy="91440"/>
           </a:xfrm>
           <a:prstGeom prst="line">
@@ -7278,7 +7278,7 @@
         <p:spPr>
           <a:xfrm>
             <a:off x="201168" y="4864608"/>
-            <a:ext cx="7626096" cy="841248"/>
+            <a:ext cx="11786616" cy="841248"/>
           </a:xfrm>
           <a:prstGeom prst="roundRect">
             <a:avLst>
@@ -7372,7 +7372,7 @@
         <p:spPr>
           <a:xfrm>
             <a:off x="365760" y="5120640"/>
-            <a:ext cx="2395728" cy="457200"/>
+            <a:ext cx="3675887" cy="457200"/>
           </a:xfrm>
           <a:prstGeom prst="roundRect">
             <a:avLst>
@@ -7420,7 +7420,7 @@
         <p:spPr>
           <a:xfrm>
             <a:off x="393192" y="5120640"/>
-            <a:ext cx="2340864" cy="457200"/>
+            <a:ext cx="3621023" cy="457200"/>
           </a:xfrm>
           <a:prstGeom prst="rect">
             <a:avLst/>
@@ -7445,7 +7445,7 @@
               </a:spcAft>
             </a:pPr>
             <a:r>
-              <a:rPr sz="700" b="0" i="0">
+              <a:rPr sz="720" b="0" i="0">
                 <a:solidFill>
                   <a:srgbClr val="0F172A"/>
                 </a:solidFill>
@@ -7468,7 +7468,7 @@
               </a:spcAft>
             </a:pPr>
             <a:r>
-              <a:rPr sz="580" b="0" i="0">
+              <a:rPr sz="600" b="0" i="0">
                 <a:solidFill>
                   <a:srgbClr val="64748B"/>
                 </a:solidFill>
@@ -7488,8 +7488,8 @@
         </p:nvSpPr>
         <p:spPr>
           <a:xfrm>
-            <a:off x="2825496" y="5120640"/>
-            <a:ext cx="2395728" cy="457200"/>
+            <a:off x="4133088" y="5120640"/>
+            <a:ext cx="3675887" cy="457200"/>
           </a:xfrm>
           <a:prstGeom prst="roundRect">
             <a:avLst>
@@ -7536,8 +7536,8 @@
         </p:nvSpPr>
         <p:spPr>
           <a:xfrm>
-            <a:off x="2852927" y="5120640"/>
-            <a:ext cx="2340864" cy="457200"/>
+            <a:off x="4160520" y="5120640"/>
+            <a:ext cx="3621023" cy="457200"/>
           </a:xfrm>
           <a:prstGeom prst="rect">
             <a:avLst/>
@@ -7562,7 +7562,7 @@
               </a:spcAft>
             </a:pPr>
             <a:r>
-              <a:rPr sz="700" b="0" i="0">
+              <a:rPr sz="720" b="0" i="0">
                 <a:solidFill>
                   <a:srgbClr val="0F172A"/>
                 </a:solidFill>
@@ -7585,7 +7585,7 @@
               </a:spcAft>
             </a:pPr>
             <a:r>
-              <a:rPr sz="580" b="0" i="0">
+              <a:rPr sz="600" b="0" i="0">
                 <a:solidFill>
                   <a:srgbClr val="64748B"/>
                 </a:solidFill>
@@ -7605,8 +7605,8 @@
         </p:nvSpPr>
         <p:spPr>
           <a:xfrm>
-            <a:off x="5285231" y="5120640"/>
-            <a:ext cx="2395728" cy="457200"/>
+            <a:off x="7900416" y="5120640"/>
+            <a:ext cx="3675887" cy="457200"/>
           </a:xfrm>
           <a:prstGeom prst="roundRect">
             <a:avLst>
@@ -7653,8 +7653,8 @@
         </p:nvSpPr>
         <p:spPr>
           <a:xfrm>
-            <a:off x="5312664" y="5120640"/>
-            <a:ext cx="2340864" cy="457200"/>
+            <a:off x="7927848" y="5120640"/>
+            <a:ext cx="3621023" cy="457200"/>
           </a:xfrm>
           <a:prstGeom prst="rect">
             <a:avLst/>
@@ -7679,7 +7679,7 @@
               </a:spcAft>
             </a:pPr>
             <a:r>
-              <a:rPr sz="700" b="0" i="0">
+              <a:rPr sz="720" b="0" i="0">
                 <a:solidFill>
                   <a:srgbClr val="0F172A"/>
                 </a:solidFill>
@@ -7702,7 +7702,7 @@
               </a:spcAft>
             </a:pPr>
             <a:r>
-              <a:rPr sz="580" b="0" i="0">
+              <a:rPr sz="600" b="0" i="0">
                 <a:solidFill>
                   <a:srgbClr val="64748B"/>
                 </a:solidFill>
@@ -7722,2731 +7722,12 @@
         </p:nvSpPr>
         <p:spPr>
           <a:xfrm>
-            <a:off x="7918704" y="566928"/>
-            <a:ext cx="4069080" cy="1737360"/>
+            <a:off x="201168" y="5797296"/>
+            <a:ext cx="11786616" cy="402336"/>
           </a:xfrm>
           <a:prstGeom prst="roundRect">
             <a:avLst>
-              <a:gd name="adj" fmla="val 3684"/>
-            </a:avLst>
-          </a:prstGeom>
-          <a:solidFill>
-            <a:srgbClr val="FFFFFF"/>
-          </a:solidFill>
-          <a:ln w="15240">
-            <a:solidFill>
-              <a:srgbClr val="E2E8F0"/>
-            </a:solidFill>
-          </a:ln>
-          <a:effectLst>
-            <a:outerShdw blurRad="55000" dist="22000" dir="5400000" rotWithShape="0">
-              <a:srgbClr val="0F172A">
-                <a:alpha val="12000"/>
-              </a:srgbClr>
-            </a:outerShdw>
-          </a:effectLst>
-        </p:spPr>
-        <p:style>
-          <a:lnRef idx="1">
-            <a:schemeClr val="accent1"/>
-          </a:lnRef>
-          <a:fillRef idx="3">
-            <a:schemeClr val="accent1"/>
-          </a:fillRef>
-          <a:effectRef idx="2">
-            <a:schemeClr val="accent1"/>
-          </a:effectRef>
-          <a:fontRef idx="minor">
-            <a:schemeClr val="lt1"/>
-          </a:fontRef>
-        </p:style>
-        <p:txBody>
-          <a:bodyPr rtlCol="0" anchor="ctr"/>
-          <a:lstStyle/>
-          <a:p>
-            <a:pPr algn="ctr"/>
-          </a:p>
-        </p:txBody>
-      </p:sp>
-      <p:sp>
-        <p:nvSpPr>
-          <p:cNvPr id="102" name="TextBox 101"/>
-          <p:cNvSpPr txBox="1"/>
-          <p:nvPr/>
-        </p:nvSpPr>
-        <p:spPr>
-          <a:xfrm>
-            <a:off x="8028431" y="640080"/>
-            <a:ext cx="3849624" cy="146304"/>
-          </a:xfrm>
-          <a:prstGeom prst="rect">
-            <a:avLst/>
-          </a:prstGeom>
-          <a:noFill/>
-        </p:spPr>
-        <p:txBody>
-          <a:bodyPr wrap="square" lIns="0" rIns="0" tIns="0" bIns="0" anchor="t">
-            <a:noAutofit/>
-          </a:bodyPr>
-          <a:lstStyle/>
-          <a:p>
-            <a:pPr algn="l">
-              <a:lnSpc>
-                <a:spcPct val="112000"/>
-              </a:lnSpc>
-              <a:spcBef>
-                <a:spcPts val="0"/>
-              </a:spcBef>
-              <a:spcAft>
-                <a:spcPts val="0"/>
-              </a:spcAft>
-            </a:pPr>
-            <a:r>
-              <a:rPr sz="819" b="1" i="0">
-                <a:solidFill>
-                  <a:srgbClr val="0F172A"/>
-                </a:solidFill>
-                <a:latin typeface="Segoe UI"/>
-                <a:ea typeface="Microsoft YaHei"/>
-              </a:rPr>
-              <a:t>从重复建设到平台复用（archi.md §6）</a:t>
-            </a:r>
-          </a:p>
-        </p:txBody>
-      </p:sp>
-      <p:sp>
-        <p:nvSpPr>
-          <p:cNvPr id="103" name="Rounded Rectangle 102"/>
-          <p:cNvSpPr/>
-          <p:nvPr/>
-        </p:nvSpPr>
-        <p:spPr>
-          <a:xfrm>
-            <a:off x="8028431" y="859536"/>
-            <a:ext cx="1700784" cy="1316736"/>
-          </a:xfrm>
-          <a:prstGeom prst="roundRect">
-            <a:avLst>
-              <a:gd name="adj" fmla="val 3472"/>
-            </a:avLst>
-          </a:prstGeom>
-          <a:solidFill>
-            <a:srgbClr val="FFF1F2"/>
-          </a:solidFill>
-          <a:ln w="13970">
-            <a:solidFill>
-              <a:srgbClr val="F87171"/>
-            </a:solidFill>
-            <a:prstDash val="dash"/>
-          </a:ln>
-          <a:effectLst/>
-        </p:spPr>
-        <p:style>
-          <a:lnRef idx="1">
-            <a:schemeClr val="accent1"/>
-          </a:lnRef>
-          <a:fillRef idx="3">
-            <a:schemeClr val="accent1"/>
-          </a:fillRef>
-          <a:effectRef idx="2">
-            <a:schemeClr val="accent1"/>
-          </a:effectRef>
-          <a:fontRef idx="minor">
-            <a:schemeClr val="lt1"/>
-          </a:fontRef>
-        </p:style>
-        <p:txBody>
-          <a:bodyPr rtlCol="0" anchor="ctr"/>
-          <a:lstStyle/>
-          <a:p>
-            <a:pPr algn="ctr"/>
-          </a:p>
-        </p:txBody>
-      </p:sp>
-      <p:sp>
-        <p:nvSpPr>
-          <p:cNvPr id="104" name="TextBox 103"/>
-          <p:cNvSpPr txBox="1"/>
-          <p:nvPr/>
-        </p:nvSpPr>
-        <p:spPr>
-          <a:xfrm>
-            <a:off x="8119872" y="914400"/>
-            <a:ext cx="1517904" cy="128016"/>
-          </a:xfrm>
-          <a:prstGeom prst="rect">
-            <a:avLst/>
-          </a:prstGeom>
-          <a:noFill/>
-        </p:spPr>
-        <p:txBody>
-          <a:bodyPr wrap="square" lIns="0" rIns="0" tIns="0" bIns="0" anchor="t">
-            <a:noAutofit/>
-          </a:bodyPr>
-          <a:lstStyle/>
-          <a:p>
-            <a:pPr algn="l">
-              <a:lnSpc>
-                <a:spcPct val="112000"/>
-              </a:lnSpc>
-              <a:spcBef>
-                <a:spcPts val="0"/>
-              </a:spcBef>
-              <a:spcAft>
-                <a:spcPts val="0"/>
-              </a:spcAft>
-            </a:pPr>
-            <a:r>
-              <a:rPr sz="700" b="1" i="0">
-                <a:solidFill>
-                  <a:srgbClr val="B91C1C"/>
-                </a:solidFill>
-                <a:latin typeface="Segoe UI"/>
-                <a:ea typeface="Microsoft YaHei"/>
-              </a:rPr>
-              <a:t>当前 · 各自建设 ✗</a:t>
-            </a:r>
-          </a:p>
-        </p:txBody>
-      </p:sp>
-      <p:sp>
-        <p:nvSpPr>
-          <p:cNvPr id="105" name="TextBox 104"/>
-          <p:cNvSpPr txBox="1"/>
-          <p:nvPr/>
-        </p:nvSpPr>
-        <p:spPr>
-          <a:xfrm>
-            <a:off x="8119872" y="1097280"/>
-            <a:ext cx="1536192" cy="182880"/>
-          </a:xfrm>
-          <a:prstGeom prst="rect">
-            <a:avLst/>
-          </a:prstGeom>
-          <a:noFill/>
-        </p:spPr>
-        <p:txBody>
-          <a:bodyPr wrap="square" lIns="0" rIns="0" tIns="0" bIns="0" anchor="t">
-            <a:noAutofit/>
-          </a:bodyPr>
-          <a:lstStyle/>
-          <a:p>
-            <a:pPr algn="l">
-              <a:lnSpc>
-                <a:spcPct val="112000"/>
-              </a:lnSpc>
-              <a:spcBef>
-                <a:spcPts val="0"/>
-              </a:spcBef>
-              <a:spcAft>
-                <a:spcPts val="0"/>
-              </a:spcAft>
-            </a:pPr>
-            <a:r>
-              <a:rPr sz="590" b="0" i="0">
-                <a:solidFill>
-                  <a:srgbClr val="475569"/>
-                </a:solidFill>
-                <a:latin typeface="Segoe UI"/>
-                <a:ea typeface="Microsoft YaHei"/>
-              </a:rPr>
-              <a:t>ADC / EPD / MD / APOC</a:t>
-            </a:r>
-          </a:p>
-        </p:txBody>
-      </p:sp>
-      <p:sp>
-        <p:nvSpPr>
-          <p:cNvPr id="106" name="TextBox 105"/>
-          <p:cNvSpPr txBox="1"/>
-          <p:nvPr/>
-        </p:nvSpPr>
-        <p:spPr>
-          <a:xfrm>
-            <a:off x="8119872" y="1316736"/>
-            <a:ext cx="1536192" cy="182880"/>
-          </a:xfrm>
-          <a:prstGeom prst="rect">
-            <a:avLst/>
-          </a:prstGeom>
-          <a:noFill/>
-        </p:spPr>
-        <p:txBody>
-          <a:bodyPr wrap="square" lIns="0" rIns="0" tIns="0" bIns="0" anchor="t">
-            <a:noAutofit/>
-          </a:bodyPr>
-          <a:lstStyle/>
-          <a:p>
-            <a:pPr algn="l">
-              <a:lnSpc>
-                <a:spcPct val="112000"/>
-              </a:lnSpc>
-              <a:spcBef>
-                <a:spcPts val="0"/>
-              </a:spcBef>
-              <a:spcAft>
-                <a:spcPts val="0"/>
-              </a:spcAft>
-            </a:pPr>
-            <a:r>
-              <a:rPr sz="590" b="0" i="0">
-                <a:solidFill>
-                  <a:srgbClr val="475569"/>
-                </a:solidFill>
-                <a:latin typeface="Segoe UI"/>
-                <a:ea typeface="Microsoft YaHei"/>
-              </a:rPr>
-              <a:t>各建 内容·会议·积分</a:t>
-            </a:r>
-          </a:p>
-        </p:txBody>
-      </p:sp>
-      <p:sp>
-        <p:nvSpPr>
-          <p:cNvPr id="107" name="TextBox 106"/>
-          <p:cNvSpPr txBox="1"/>
-          <p:nvPr/>
-        </p:nvSpPr>
-        <p:spPr>
-          <a:xfrm>
-            <a:off x="8119872" y="1536192"/>
-            <a:ext cx="1536192" cy="182880"/>
-          </a:xfrm>
-          <a:prstGeom prst="rect">
-            <a:avLst/>
-          </a:prstGeom>
-          <a:noFill/>
-        </p:spPr>
-        <p:txBody>
-          <a:bodyPr wrap="square" lIns="0" rIns="0" tIns="0" bIns="0" anchor="t">
-            <a:noAutofit/>
-          </a:bodyPr>
-          <a:lstStyle/>
-          <a:p>
-            <a:pPr algn="l">
-              <a:lnSpc>
-                <a:spcPct val="112000"/>
-              </a:lnSpc>
-              <a:spcBef>
-                <a:spcPts val="0"/>
-              </a:spcBef>
-              <a:spcAft>
-                <a:spcPts val="0"/>
-              </a:spcAft>
-            </a:pPr>
-            <a:r>
-              <a:rPr sz="590" b="0" i="0">
-                <a:solidFill>
-                  <a:srgbClr val="475569"/>
-                </a:solidFill>
-                <a:latin typeface="Segoe UI"/>
-                <a:ea typeface="Microsoft YaHei"/>
-              </a:rPr>
-              <a:t>≈ 12 套重复实现</a:t>
-            </a:r>
-          </a:p>
-        </p:txBody>
-      </p:sp>
-      <p:sp>
-        <p:nvSpPr>
-          <p:cNvPr id="108" name="TextBox 107"/>
-          <p:cNvSpPr txBox="1"/>
-          <p:nvPr/>
-        </p:nvSpPr>
-        <p:spPr>
-          <a:xfrm>
-            <a:off x="8119872" y="1755648"/>
-            <a:ext cx="1536192" cy="182880"/>
-          </a:xfrm>
-          <a:prstGeom prst="rect">
-            <a:avLst/>
-          </a:prstGeom>
-          <a:noFill/>
-        </p:spPr>
-        <p:txBody>
-          <a:bodyPr wrap="square" lIns="0" rIns="0" tIns="0" bIns="0" anchor="t">
-            <a:noAutofit/>
-          </a:bodyPr>
-          <a:lstStyle/>
-          <a:p>
-            <a:pPr algn="l">
-              <a:lnSpc>
-                <a:spcPct val="112000"/>
-              </a:lnSpc>
-              <a:spcBef>
-                <a:spcPts val="0"/>
-              </a:spcBef>
-              <a:spcAft>
-                <a:spcPts val="0"/>
-              </a:spcAft>
-            </a:pPr>
-            <a:r>
-              <a:rPr sz="590" b="0" i="0">
-                <a:solidFill>
-                  <a:srgbClr val="475569"/>
-                </a:solidFill>
-                <a:latin typeface="Segoe UI"/>
-                <a:ea typeface="Microsoft YaHei"/>
-              </a:rPr>
-              <a:t>数据孤岛 · 体验割裂</a:t>
-            </a:r>
-          </a:p>
-        </p:txBody>
-      </p:sp>
-      <p:cxnSp>
-        <p:nvCxnSpPr>
-          <p:cNvPr id="109" name="Connector 108"/>
-          <p:cNvCxnSpPr/>
-          <p:nvPr/>
-        </p:nvCxnSpPr>
-        <p:spPr>
-          <a:xfrm>
-            <a:off x="9765792" y="1517904"/>
-            <a:ext cx="274320" cy="0"/>
-          </a:xfrm>
-          <a:prstGeom prst="line">
-            <a:avLst/>
-          </a:prstGeom>
-          <a:ln w="25400">
-            <a:solidFill>
-              <a:srgbClr val="64748B"/>
-            </a:solidFill>
-            <a:tailEnd type="triangle" w="med" len="med"/>
-          </a:ln>
-          <a:effectLst/>
-        </p:spPr>
-      </p:cxnSp>
-      <p:sp>
-        <p:nvSpPr>
-          <p:cNvPr id="110" name="Rounded Rectangle 109"/>
-          <p:cNvSpPr/>
-          <p:nvPr/>
-        </p:nvSpPr>
-        <p:spPr>
-          <a:xfrm>
-            <a:off x="10076688" y="859536"/>
-            <a:ext cx="1801368" cy="1316736"/>
-          </a:xfrm>
-          <a:prstGeom prst="roundRect">
-            <a:avLst>
-              <a:gd name="adj" fmla="val 3472"/>
-            </a:avLst>
-          </a:prstGeom>
-          <a:solidFill>
-            <a:srgbClr val="ECFDF5"/>
-          </a:solidFill>
-          <a:ln w="15240">
-            <a:solidFill>
-              <a:srgbClr val="A7F3D0"/>
-            </a:solidFill>
-          </a:ln>
-          <a:effectLst/>
-        </p:spPr>
-        <p:style>
-          <a:lnRef idx="1">
-            <a:schemeClr val="accent1"/>
-          </a:lnRef>
-          <a:fillRef idx="3">
-            <a:schemeClr val="accent1"/>
-          </a:fillRef>
-          <a:effectRef idx="2">
-            <a:schemeClr val="accent1"/>
-          </a:effectRef>
-          <a:fontRef idx="minor">
-            <a:schemeClr val="lt1"/>
-          </a:fontRef>
-        </p:style>
-        <p:txBody>
-          <a:bodyPr rtlCol="0" anchor="ctr"/>
-          <a:lstStyle/>
-          <a:p>
-            <a:pPr algn="ctr"/>
-          </a:p>
-        </p:txBody>
-      </p:sp>
-      <p:sp>
-        <p:nvSpPr>
-          <p:cNvPr id="111" name="TextBox 110"/>
-          <p:cNvSpPr txBox="1"/>
-          <p:nvPr/>
-        </p:nvSpPr>
-        <p:spPr>
-          <a:xfrm>
-            <a:off x="10168128" y="914400"/>
-            <a:ext cx="1618488" cy="128016"/>
-          </a:xfrm>
-          <a:prstGeom prst="rect">
-            <a:avLst/>
-          </a:prstGeom>
-          <a:noFill/>
-        </p:spPr>
-        <p:txBody>
-          <a:bodyPr wrap="square" lIns="0" rIns="0" tIns="0" bIns="0" anchor="t">
-            <a:noAutofit/>
-          </a:bodyPr>
-          <a:lstStyle/>
-          <a:p>
-            <a:pPr algn="l">
-              <a:lnSpc>
-                <a:spcPct val="112000"/>
-              </a:lnSpc>
-              <a:spcBef>
-                <a:spcPts val="0"/>
-              </a:spcBef>
-              <a:spcAft>
-                <a:spcPts val="0"/>
-              </a:spcAft>
-            </a:pPr>
-            <a:r>
-              <a:rPr sz="700" b="1" i="0">
-                <a:solidFill>
-                  <a:srgbClr val="047857"/>
-                </a:solidFill>
-                <a:latin typeface="Segoe UI"/>
-                <a:ea typeface="Microsoft YaHei"/>
-              </a:rPr>
-              <a:t>目标 · 平台统一 ✓</a:t>
-            </a:r>
-          </a:p>
-        </p:txBody>
-      </p:sp>
-      <p:sp>
-        <p:nvSpPr>
-          <p:cNvPr id="112" name="TextBox 111"/>
-          <p:cNvSpPr txBox="1"/>
-          <p:nvPr/>
-        </p:nvSpPr>
-        <p:spPr>
-          <a:xfrm>
-            <a:off x="10168128" y="1097280"/>
-            <a:ext cx="1636776" cy="182880"/>
-          </a:xfrm>
-          <a:prstGeom prst="rect">
-            <a:avLst/>
-          </a:prstGeom>
-          <a:noFill/>
-        </p:spPr>
-        <p:txBody>
-          <a:bodyPr wrap="square" lIns="0" rIns="0" tIns="0" bIns="0" anchor="t">
-            <a:noAutofit/>
-          </a:bodyPr>
-          <a:lstStyle/>
-          <a:p>
-            <a:pPr algn="l">
-              <a:lnSpc>
-                <a:spcPct val="112000"/>
-              </a:lnSpc>
-              <a:spcBef>
-                <a:spcPts val="0"/>
-              </a:spcBef>
-              <a:spcAft>
-                <a:spcPts val="0"/>
-              </a:spcAft>
-            </a:pPr>
-            <a:r>
-              <a:rPr sz="590" b="0" i="0">
-                <a:solidFill>
-                  <a:srgbClr val="475569"/>
-                </a:solidFill>
-                <a:latin typeface="Segoe UI"/>
-                <a:ea typeface="Microsoft YaHei"/>
-              </a:rPr>
-              <a:t>Capability Hub 1 套能力</a:t>
-            </a:r>
-          </a:p>
-        </p:txBody>
-      </p:sp>
-      <p:sp>
-        <p:nvSpPr>
-          <p:cNvPr id="113" name="TextBox 112"/>
-          <p:cNvSpPr txBox="1"/>
-          <p:nvPr/>
-        </p:nvSpPr>
-        <p:spPr>
-          <a:xfrm>
-            <a:off x="10168128" y="1316736"/>
-            <a:ext cx="1636776" cy="182880"/>
-          </a:xfrm>
-          <a:prstGeom prst="rect">
-            <a:avLst/>
-          </a:prstGeom>
-          <a:noFill/>
-        </p:spPr>
-        <p:txBody>
-          <a:bodyPr wrap="square" lIns="0" rIns="0" tIns="0" bIns="0" anchor="t">
-            <a:noAutofit/>
-          </a:bodyPr>
-          <a:lstStyle/>
-          <a:p>
-            <a:pPr algn="l">
-              <a:lnSpc>
-                <a:spcPct val="112000"/>
-              </a:lnSpc>
-              <a:spcBef>
-                <a:spcPts val="0"/>
-              </a:spcBef>
-              <a:spcAft>
-                <a:spcPts val="0"/>
-              </a:spcAft>
-            </a:pPr>
-            <a:r>
-              <a:rPr sz="590" b="0" i="0">
-                <a:solidFill>
-                  <a:srgbClr val="475569"/>
-                </a:solidFill>
-                <a:latin typeface="Segoe UI"/>
-                <a:ea typeface="Microsoft YaHei"/>
-              </a:rPr>
-              <a:t>应用 = 租户按需组合</a:t>
-            </a:r>
-          </a:p>
-        </p:txBody>
-      </p:sp>
-      <p:sp>
-        <p:nvSpPr>
-          <p:cNvPr id="114" name="TextBox 113"/>
-          <p:cNvSpPr txBox="1"/>
-          <p:nvPr/>
-        </p:nvSpPr>
-        <p:spPr>
-          <a:xfrm>
-            <a:off x="10168128" y="1536192"/>
-            <a:ext cx="1636776" cy="182880"/>
-          </a:xfrm>
-          <a:prstGeom prst="rect">
-            <a:avLst/>
-          </a:prstGeom>
-          <a:noFill/>
-        </p:spPr>
-        <p:txBody>
-          <a:bodyPr wrap="square" lIns="0" rIns="0" tIns="0" bIns="0" anchor="t">
-            <a:noAutofit/>
-          </a:bodyPr>
-          <a:lstStyle/>
-          <a:p>
-            <a:pPr algn="l">
-              <a:lnSpc>
-                <a:spcPct val="112000"/>
-              </a:lnSpc>
-              <a:spcBef>
-                <a:spcPts val="0"/>
-              </a:spcBef>
-              <a:spcAft>
-                <a:spcPts val="0"/>
-              </a:spcAft>
-            </a:pPr>
-            <a:r>
-              <a:rPr sz="590" b="0" i="0">
-                <a:solidFill>
-                  <a:srgbClr val="475569"/>
-                </a:solidFill>
-                <a:latin typeface="Segoe UI"/>
-                <a:ea typeface="Microsoft YaHei"/>
-              </a:rPr>
-              <a:t>能力 / 数据 / AI 三重复用</a:t>
-            </a:r>
-          </a:p>
-        </p:txBody>
-      </p:sp>
-      <p:sp>
-        <p:nvSpPr>
-          <p:cNvPr id="115" name="TextBox 114"/>
-          <p:cNvSpPr txBox="1"/>
-          <p:nvPr/>
-        </p:nvSpPr>
-        <p:spPr>
-          <a:xfrm>
-            <a:off x="10168128" y="1755648"/>
-            <a:ext cx="1636776" cy="182880"/>
-          </a:xfrm>
-          <a:prstGeom prst="rect">
-            <a:avLst/>
-          </a:prstGeom>
-          <a:noFill/>
-        </p:spPr>
-        <p:txBody>
-          <a:bodyPr wrap="square" lIns="0" rIns="0" tIns="0" bIns="0" anchor="t">
-            <a:noAutofit/>
-          </a:bodyPr>
-          <a:lstStyle/>
-          <a:p>
-            <a:pPr algn="l">
-              <a:lnSpc>
-                <a:spcPct val="112000"/>
-              </a:lnSpc>
-              <a:spcBef>
-                <a:spcPts val="0"/>
-              </a:spcBef>
-              <a:spcAft>
-                <a:spcPts val="0"/>
-              </a:spcAft>
-            </a:pPr>
-            <a:r>
-              <a:rPr sz="590" b="1" i="0">
-                <a:solidFill>
-                  <a:srgbClr val="475569"/>
-                </a:solidFill>
-                <a:latin typeface="Segoe UI"/>
-                <a:ea typeface="Microsoft YaHei"/>
-              </a:rPr>
-              <a:t>Build Once · Reuse Everywhere</a:t>
-            </a:r>
-          </a:p>
-        </p:txBody>
-      </p:sp>
-      <p:sp>
-        <p:nvSpPr>
-          <p:cNvPr id="116" name="Rounded Rectangle 115"/>
-          <p:cNvSpPr/>
-          <p:nvPr/>
-        </p:nvSpPr>
-        <p:spPr>
-          <a:xfrm>
-            <a:off x="7918704" y="2395728"/>
-            <a:ext cx="4069080" cy="2468880"/>
-          </a:xfrm>
-          <a:prstGeom prst="roundRect">
-            <a:avLst>
-              <a:gd name="adj" fmla="val 2592"/>
-            </a:avLst>
-          </a:prstGeom>
-          <a:solidFill>
-            <a:srgbClr val="FFFFFF"/>
-          </a:solidFill>
-          <a:ln w="15240">
-            <a:solidFill>
-              <a:srgbClr val="E2E8F0"/>
-            </a:solidFill>
-          </a:ln>
-          <a:effectLst>
-            <a:outerShdw blurRad="55000" dist="22000" dir="5400000" rotWithShape="0">
-              <a:srgbClr val="0F172A">
-                <a:alpha val="12000"/>
-              </a:srgbClr>
-            </a:outerShdw>
-          </a:effectLst>
-        </p:spPr>
-        <p:style>
-          <a:lnRef idx="1">
-            <a:schemeClr val="accent1"/>
-          </a:lnRef>
-          <a:fillRef idx="3">
-            <a:schemeClr val="accent1"/>
-          </a:fillRef>
-          <a:effectRef idx="2">
-            <a:schemeClr val="accent1"/>
-          </a:effectRef>
-          <a:fontRef idx="minor">
-            <a:schemeClr val="lt1"/>
-          </a:fontRef>
-        </p:style>
-        <p:txBody>
-          <a:bodyPr rtlCol="0" anchor="ctr"/>
-          <a:lstStyle/>
-          <a:p>
-            <a:pPr algn="ctr"/>
-          </a:p>
-        </p:txBody>
-      </p:sp>
-      <p:sp>
-        <p:nvSpPr>
-          <p:cNvPr id="117" name="TextBox 116"/>
-          <p:cNvSpPr txBox="1"/>
-          <p:nvPr/>
-        </p:nvSpPr>
-        <p:spPr>
-          <a:xfrm>
-            <a:off x="8028431" y="2468880"/>
-            <a:ext cx="3849624" cy="146304"/>
-          </a:xfrm>
-          <a:prstGeom prst="rect">
-            <a:avLst/>
-          </a:prstGeom>
-          <a:noFill/>
-        </p:spPr>
-        <p:txBody>
-          <a:bodyPr wrap="square" lIns="0" rIns="0" tIns="0" bIns="0" anchor="t">
-            <a:noAutofit/>
-          </a:bodyPr>
-          <a:lstStyle/>
-          <a:p>
-            <a:pPr algn="l">
-              <a:lnSpc>
-                <a:spcPct val="112000"/>
-              </a:lnSpc>
-              <a:spcBef>
-                <a:spcPts val="0"/>
-              </a:spcBef>
-              <a:spcAft>
-                <a:spcPts val="0"/>
-              </a:spcAft>
-            </a:pPr>
-            <a:r>
-              <a:rPr sz="819" b="1" i="0">
-                <a:solidFill>
-                  <a:srgbClr val="0F172A"/>
-                </a:solidFill>
-                <a:latin typeface="Segoe UI"/>
-                <a:ea typeface="Microsoft YaHei"/>
-              </a:rPr>
-              <a:t>能力复用矩阵 · 一次建设 → 处处消费</a:t>
-            </a:r>
-          </a:p>
-        </p:txBody>
-      </p:sp>
-      <p:sp>
-        <p:nvSpPr>
-          <p:cNvPr id="118" name="TextBox 117"/>
-          <p:cNvSpPr txBox="1"/>
-          <p:nvPr/>
-        </p:nvSpPr>
-        <p:spPr>
-          <a:xfrm>
-            <a:off x="8869680" y="2670048"/>
-            <a:ext cx="512064" cy="310896"/>
-          </a:xfrm>
-          <a:prstGeom prst="rect">
-            <a:avLst/>
-          </a:prstGeom>
-          <a:noFill/>
-        </p:spPr>
-        <p:txBody>
-          <a:bodyPr wrap="square" lIns="0" rIns="0" tIns="0" bIns="0" anchor="ctr">
-            <a:noAutofit/>
-          </a:bodyPr>
-          <a:lstStyle/>
-          <a:p>
-            <a:pPr algn="ctr">
-              <a:lnSpc>
-                <a:spcPct val="105000"/>
-              </a:lnSpc>
-              <a:spcBef>
-                <a:spcPts val="0"/>
-              </a:spcBef>
-              <a:spcAft>
-                <a:spcPts val="0"/>
-              </a:spcAft>
-            </a:pPr>
-            <a:r>
-              <a:rPr sz="560" b="1" i="0">
-                <a:solidFill>
-                  <a:srgbClr val="475569"/>
-                </a:solidFill>
-                <a:latin typeface="Segoe UI"/>
-                <a:ea typeface="Microsoft YaHei"/>
-              </a:rPr>
-              <a:t>小程序</a:t>
-            </a:r>
-          </a:p>
-          <a:p>
-            <a:pPr algn="ctr">
-              <a:lnSpc>
-                <a:spcPct val="105000"/>
-              </a:lnSpc>
-              <a:spcBef>
-                <a:spcPts val="0"/>
-              </a:spcBef>
-              <a:spcAft>
-                <a:spcPts val="0"/>
-              </a:spcAft>
-            </a:pPr>
-            <a:r>
-              <a:rPr sz="560" b="1" i="0">
-                <a:solidFill>
-                  <a:srgbClr val="475569"/>
-                </a:solidFill>
-                <a:latin typeface="Segoe UI"/>
-                <a:ea typeface="Microsoft YaHei"/>
-              </a:rPr>
-              <a:t>H5</a:t>
-            </a:r>
-          </a:p>
-        </p:txBody>
-      </p:sp>
-      <p:sp>
-        <p:nvSpPr>
-          <p:cNvPr id="119" name="TextBox 118"/>
-          <p:cNvSpPr txBox="1"/>
-          <p:nvPr/>
-        </p:nvSpPr>
-        <p:spPr>
-          <a:xfrm>
-            <a:off x="9418320" y="2670048"/>
-            <a:ext cx="512064" cy="310896"/>
-          </a:xfrm>
-          <a:prstGeom prst="rect">
-            <a:avLst/>
-          </a:prstGeom>
-          <a:noFill/>
-        </p:spPr>
-        <p:txBody>
-          <a:bodyPr wrap="square" lIns="0" rIns="0" tIns="0" bIns="0" anchor="ctr">
-            <a:noAutofit/>
-          </a:bodyPr>
-          <a:lstStyle/>
-          <a:p>
-            <a:pPr algn="ctr">
-              <a:lnSpc>
-                <a:spcPct val="105000"/>
-              </a:lnSpc>
-              <a:spcBef>
-                <a:spcPts val="0"/>
-              </a:spcBef>
-              <a:spcAft>
-                <a:spcPts val="0"/>
-              </a:spcAft>
-            </a:pPr>
-            <a:r>
-              <a:rPr sz="560" b="1" i="0">
-                <a:solidFill>
-                  <a:srgbClr val="475569"/>
-                </a:solidFill>
-                <a:latin typeface="Segoe UI"/>
-                <a:ea typeface="Microsoft YaHei"/>
-              </a:rPr>
-              <a:t>企微</a:t>
-            </a:r>
-          </a:p>
-        </p:txBody>
-      </p:sp>
-      <p:sp>
-        <p:nvSpPr>
-          <p:cNvPr id="120" name="TextBox 119"/>
-          <p:cNvSpPr txBox="1"/>
-          <p:nvPr/>
-        </p:nvSpPr>
-        <p:spPr>
-          <a:xfrm>
-            <a:off x="9966960" y="2670048"/>
-            <a:ext cx="512064" cy="310896"/>
-          </a:xfrm>
-          <a:prstGeom prst="rect">
-            <a:avLst/>
-          </a:prstGeom>
-          <a:noFill/>
-        </p:spPr>
-        <p:txBody>
-          <a:bodyPr wrap="square" lIns="0" rIns="0" tIns="0" bIns="0" anchor="ctr">
-            <a:noAutofit/>
-          </a:bodyPr>
-          <a:lstStyle/>
-          <a:p>
-            <a:pPr algn="ctr">
-              <a:lnSpc>
-                <a:spcPct val="105000"/>
-              </a:lnSpc>
-              <a:spcBef>
-                <a:spcPts val="0"/>
-              </a:spcBef>
-              <a:spcAft>
-                <a:spcPts val="0"/>
-              </a:spcAft>
-            </a:pPr>
-            <a:r>
-              <a:rPr sz="560" b="1" i="0">
-                <a:solidFill>
-                  <a:srgbClr val="475569"/>
-                </a:solidFill>
-                <a:latin typeface="Segoe UI"/>
-                <a:ea typeface="Microsoft YaHei"/>
-              </a:rPr>
-              <a:t>App</a:t>
-            </a:r>
-          </a:p>
-        </p:txBody>
-      </p:sp>
-      <p:sp>
-        <p:nvSpPr>
-          <p:cNvPr id="121" name="TextBox 120"/>
-          <p:cNvSpPr txBox="1"/>
-          <p:nvPr/>
-        </p:nvSpPr>
-        <p:spPr>
-          <a:xfrm>
-            <a:off x="10515600" y="2670048"/>
-            <a:ext cx="512064" cy="310896"/>
-          </a:xfrm>
-          <a:prstGeom prst="rect">
-            <a:avLst/>
-          </a:prstGeom>
-          <a:noFill/>
-        </p:spPr>
-        <p:txBody>
-          <a:bodyPr wrap="square" lIns="0" rIns="0" tIns="0" bIns="0" anchor="ctr">
-            <a:noAutofit/>
-          </a:bodyPr>
-          <a:lstStyle/>
-          <a:p>
-            <a:pPr algn="ctr">
-              <a:lnSpc>
-                <a:spcPct val="105000"/>
-              </a:lnSpc>
-              <a:spcBef>
-                <a:spcPts val="0"/>
-              </a:spcBef>
-              <a:spcAft>
-                <a:spcPts val="0"/>
-              </a:spcAft>
-            </a:pPr>
-            <a:r>
-              <a:rPr sz="560" b="1" i="0">
-                <a:solidFill>
-                  <a:srgbClr val="475569"/>
-                </a:solidFill>
-                <a:latin typeface="Segoe UI"/>
-                <a:ea typeface="Microsoft YaHei"/>
-              </a:rPr>
-              <a:t>Portal</a:t>
-            </a:r>
-          </a:p>
-        </p:txBody>
-      </p:sp>
-      <p:sp>
-        <p:nvSpPr>
-          <p:cNvPr id="122" name="TextBox 121"/>
-          <p:cNvSpPr txBox="1"/>
-          <p:nvPr/>
-        </p:nvSpPr>
-        <p:spPr>
-          <a:xfrm>
-            <a:off x="11064240" y="2670048"/>
-            <a:ext cx="512064" cy="310896"/>
-          </a:xfrm>
-          <a:prstGeom prst="rect">
-            <a:avLst/>
-          </a:prstGeom>
-          <a:noFill/>
-        </p:spPr>
-        <p:txBody>
-          <a:bodyPr wrap="square" lIns="0" rIns="0" tIns="0" bIns="0" anchor="ctr">
-            <a:noAutofit/>
-          </a:bodyPr>
-          <a:lstStyle/>
-          <a:p>
-            <a:pPr algn="ctr">
-              <a:lnSpc>
-                <a:spcPct val="105000"/>
-              </a:lnSpc>
-              <a:spcBef>
-                <a:spcPts val="0"/>
-              </a:spcBef>
-              <a:spcAft>
-                <a:spcPts val="0"/>
-              </a:spcAft>
-            </a:pPr>
-            <a:r>
-              <a:rPr sz="560" b="1" i="0">
-                <a:solidFill>
-                  <a:srgbClr val="475569"/>
-                </a:solidFill>
-                <a:latin typeface="Segoe UI"/>
-                <a:ea typeface="Microsoft YaHei"/>
-              </a:rPr>
-              <a:t>插件</a:t>
-            </a:r>
-          </a:p>
-        </p:txBody>
-      </p:sp>
-      <p:cxnSp>
-        <p:nvCxnSpPr>
-          <p:cNvPr id="123" name="Connector 122"/>
-          <p:cNvCxnSpPr/>
-          <p:nvPr/>
-        </p:nvCxnSpPr>
-        <p:spPr>
-          <a:xfrm>
-            <a:off x="8028431" y="2980944"/>
-            <a:ext cx="3849625" cy="0"/>
-          </a:xfrm>
-          <a:prstGeom prst="line">
-            <a:avLst/>
-          </a:prstGeom>
-          <a:ln w="10160">
-            <a:solidFill>
-              <a:srgbClr val="E2E8F0"/>
-            </a:solidFill>
-          </a:ln>
-          <a:effectLst/>
-        </p:spPr>
-      </p:cxnSp>
-      <p:sp>
-        <p:nvSpPr>
-          <p:cNvPr id="124" name="TextBox 123"/>
-          <p:cNvSpPr txBox="1"/>
-          <p:nvPr/>
-        </p:nvSpPr>
-        <p:spPr>
-          <a:xfrm>
-            <a:off x="8028431" y="3035808"/>
-            <a:ext cx="1042415" cy="219456"/>
-          </a:xfrm>
-          <a:prstGeom prst="rect">
-            <a:avLst/>
-          </a:prstGeom>
-          <a:noFill/>
-        </p:spPr>
-        <p:txBody>
-          <a:bodyPr wrap="square" lIns="0" rIns="0" tIns="0" bIns="0" anchor="ctr">
-            <a:noAutofit/>
-          </a:bodyPr>
-          <a:lstStyle/>
-          <a:p>
-            <a:pPr algn="l">
-              <a:lnSpc>
-                <a:spcPct val="112000"/>
-              </a:lnSpc>
-              <a:spcBef>
-                <a:spcPts val="0"/>
-              </a:spcBef>
-              <a:spcAft>
-                <a:spcPts val="0"/>
-              </a:spcAft>
-            </a:pPr>
-            <a:r>
-              <a:rPr sz="620" b="0" i="0">
-                <a:solidFill>
-                  <a:srgbClr val="0F172A"/>
-                </a:solidFill>
-                <a:latin typeface="Segoe UI"/>
-                <a:ea typeface="Microsoft YaHei"/>
-              </a:rPr>
-              <a:t>内容学术</a:t>
-            </a:r>
-          </a:p>
-        </p:txBody>
-      </p:sp>
-      <p:sp>
-        <p:nvSpPr>
-          <p:cNvPr id="125" name="Oval 124"/>
-          <p:cNvSpPr/>
-          <p:nvPr/>
-        </p:nvSpPr>
-        <p:spPr>
-          <a:xfrm>
-            <a:off x="9079992" y="3099815"/>
-            <a:ext cx="91440" cy="91440"/>
-          </a:xfrm>
-          <a:prstGeom prst="ellipse">
-            <a:avLst/>
-          </a:prstGeom>
-          <a:solidFill>
-            <a:srgbClr val="059669"/>
-          </a:solidFill>
-          <a:ln>
-            <a:noFill/>
-          </a:ln>
-          <a:effectLst/>
-        </p:spPr>
-        <p:style>
-          <a:lnRef idx="1">
-            <a:schemeClr val="accent1"/>
-          </a:lnRef>
-          <a:fillRef idx="3">
-            <a:schemeClr val="accent1"/>
-          </a:fillRef>
-          <a:effectRef idx="2">
-            <a:schemeClr val="accent1"/>
-          </a:effectRef>
-          <a:fontRef idx="minor">
-            <a:schemeClr val="lt1"/>
-          </a:fontRef>
-        </p:style>
-        <p:txBody>
-          <a:bodyPr rtlCol="0" anchor="ctr"/>
-          <a:lstStyle/>
-          <a:p>
-            <a:pPr algn="ctr"/>
-          </a:p>
-        </p:txBody>
-      </p:sp>
-      <p:sp>
-        <p:nvSpPr>
-          <p:cNvPr id="126" name="Oval 125"/>
-          <p:cNvSpPr/>
-          <p:nvPr/>
-        </p:nvSpPr>
-        <p:spPr>
-          <a:xfrm>
-            <a:off x="9628632" y="3099815"/>
-            <a:ext cx="91440" cy="91440"/>
-          </a:xfrm>
-          <a:prstGeom prst="ellipse">
-            <a:avLst/>
-          </a:prstGeom>
-          <a:solidFill>
-            <a:srgbClr val="059669"/>
-          </a:solidFill>
-          <a:ln>
-            <a:noFill/>
-          </a:ln>
-          <a:effectLst/>
-        </p:spPr>
-        <p:style>
-          <a:lnRef idx="1">
-            <a:schemeClr val="accent1"/>
-          </a:lnRef>
-          <a:fillRef idx="3">
-            <a:schemeClr val="accent1"/>
-          </a:fillRef>
-          <a:effectRef idx="2">
-            <a:schemeClr val="accent1"/>
-          </a:effectRef>
-          <a:fontRef idx="minor">
-            <a:schemeClr val="lt1"/>
-          </a:fontRef>
-        </p:style>
-        <p:txBody>
-          <a:bodyPr rtlCol="0" anchor="ctr"/>
-          <a:lstStyle/>
-          <a:p>
-            <a:pPr algn="ctr"/>
-          </a:p>
-        </p:txBody>
-      </p:sp>
-      <p:sp>
-        <p:nvSpPr>
-          <p:cNvPr id="127" name="Oval 126"/>
-          <p:cNvSpPr/>
-          <p:nvPr/>
-        </p:nvSpPr>
-        <p:spPr>
-          <a:xfrm>
-            <a:off x="10177272" y="3099815"/>
-            <a:ext cx="91440" cy="91440"/>
-          </a:xfrm>
-          <a:prstGeom prst="ellipse">
-            <a:avLst/>
-          </a:prstGeom>
-          <a:solidFill>
-            <a:srgbClr val="FFFFFF"/>
-          </a:solidFill>
-          <a:ln w="12700">
-            <a:solidFill>
-              <a:srgbClr val="059669"/>
-            </a:solidFill>
-          </a:ln>
-          <a:effectLst/>
-        </p:spPr>
-        <p:style>
-          <a:lnRef idx="1">
-            <a:schemeClr val="accent1"/>
-          </a:lnRef>
-          <a:fillRef idx="3">
-            <a:schemeClr val="accent1"/>
-          </a:fillRef>
-          <a:effectRef idx="2">
-            <a:schemeClr val="accent1"/>
-          </a:effectRef>
-          <a:fontRef idx="minor">
-            <a:schemeClr val="lt1"/>
-          </a:fontRef>
-        </p:style>
-        <p:txBody>
-          <a:bodyPr rtlCol="0" anchor="ctr"/>
-          <a:lstStyle/>
-          <a:p>
-            <a:pPr algn="ctr"/>
-          </a:p>
-        </p:txBody>
-      </p:sp>
-      <p:sp>
-        <p:nvSpPr>
-          <p:cNvPr id="128" name="Oval 127"/>
-          <p:cNvSpPr/>
-          <p:nvPr/>
-        </p:nvSpPr>
-        <p:spPr>
-          <a:xfrm>
-            <a:off x="10725912" y="3099815"/>
-            <a:ext cx="91440" cy="91440"/>
-          </a:xfrm>
-          <a:prstGeom prst="ellipse">
-            <a:avLst/>
-          </a:prstGeom>
-          <a:solidFill>
-            <a:srgbClr val="059669"/>
-          </a:solidFill>
-          <a:ln>
-            <a:noFill/>
-          </a:ln>
-          <a:effectLst/>
-        </p:spPr>
-        <p:style>
-          <a:lnRef idx="1">
-            <a:schemeClr val="accent1"/>
-          </a:lnRef>
-          <a:fillRef idx="3">
-            <a:schemeClr val="accent1"/>
-          </a:fillRef>
-          <a:effectRef idx="2">
-            <a:schemeClr val="accent1"/>
-          </a:effectRef>
-          <a:fontRef idx="minor">
-            <a:schemeClr val="lt1"/>
-          </a:fontRef>
-        </p:style>
-        <p:txBody>
-          <a:bodyPr rtlCol="0" anchor="ctr"/>
-          <a:lstStyle/>
-          <a:p>
-            <a:pPr algn="ctr"/>
-          </a:p>
-        </p:txBody>
-      </p:sp>
-      <p:sp>
-        <p:nvSpPr>
-          <p:cNvPr id="129" name="Oval 128"/>
-          <p:cNvSpPr/>
-          <p:nvPr/>
-        </p:nvSpPr>
-        <p:spPr>
-          <a:xfrm>
-            <a:off x="11274552" y="3099815"/>
-            <a:ext cx="91440" cy="91440"/>
-          </a:xfrm>
-          <a:prstGeom prst="ellipse">
-            <a:avLst/>
-          </a:prstGeom>
-          <a:solidFill>
-            <a:srgbClr val="059669"/>
-          </a:solidFill>
-          <a:ln>
-            <a:noFill/>
-          </a:ln>
-          <a:effectLst/>
-        </p:spPr>
-        <p:style>
-          <a:lnRef idx="1">
-            <a:schemeClr val="accent1"/>
-          </a:lnRef>
-          <a:fillRef idx="3">
-            <a:schemeClr val="accent1"/>
-          </a:fillRef>
-          <a:effectRef idx="2">
-            <a:schemeClr val="accent1"/>
-          </a:effectRef>
-          <a:fontRef idx="minor">
-            <a:schemeClr val="lt1"/>
-          </a:fontRef>
-        </p:style>
-        <p:txBody>
-          <a:bodyPr rtlCol="0" anchor="ctr"/>
-          <a:lstStyle/>
-          <a:p>
-            <a:pPr algn="ctr"/>
-          </a:p>
-        </p:txBody>
-      </p:sp>
-      <p:sp>
-        <p:nvSpPr>
-          <p:cNvPr id="130" name="TextBox 129"/>
-          <p:cNvSpPr txBox="1"/>
-          <p:nvPr/>
-        </p:nvSpPr>
-        <p:spPr>
-          <a:xfrm>
-            <a:off x="8028431" y="3300984"/>
-            <a:ext cx="1042415" cy="219456"/>
-          </a:xfrm>
-          <a:prstGeom prst="rect">
-            <a:avLst/>
-          </a:prstGeom>
-          <a:noFill/>
-        </p:spPr>
-        <p:txBody>
-          <a:bodyPr wrap="square" lIns="0" rIns="0" tIns="0" bIns="0" anchor="ctr">
-            <a:noAutofit/>
-          </a:bodyPr>
-          <a:lstStyle/>
-          <a:p>
-            <a:pPr algn="l">
-              <a:lnSpc>
-                <a:spcPct val="112000"/>
-              </a:lnSpc>
-              <a:spcBef>
-                <a:spcPts val="0"/>
-              </a:spcBef>
-              <a:spcAft>
-                <a:spcPts val="0"/>
-              </a:spcAft>
-            </a:pPr>
-            <a:r>
-              <a:rPr sz="620" b="0" i="0">
-                <a:solidFill>
-                  <a:srgbClr val="0F172A"/>
-                </a:solidFill>
-                <a:latin typeface="Segoe UI"/>
-                <a:ea typeface="Microsoft YaHei"/>
-              </a:rPr>
-              <a:t>会议积分</a:t>
-            </a:r>
-          </a:p>
-        </p:txBody>
-      </p:sp>
-      <p:sp>
-        <p:nvSpPr>
-          <p:cNvPr id="131" name="Oval 130"/>
-          <p:cNvSpPr/>
-          <p:nvPr/>
-        </p:nvSpPr>
-        <p:spPr>
-          <a:xfrm>
-            <a:off x="9079992" y="3364991"/>
-            <a:ext cx="91440" cy="91440"/>
-          </a:xfrm>
-          <a:prstGeom prst="ellipse">
-            <a:avLst/>
-          </a:prstGeom>
-          <a:solidFill>
-            <a:srgbClr val="059669"/>
-          </a:solidFill>
-          <a:ln>
-            <a:noFill/>
-          </a:ln>
-          <a:effectLst/>
-        </p:spPr>
-        <p:style>
-          <a:lnRef idx="1">
-            <a:schemeClr val="accent1"/>
-          </a:lnRef>
-          <a:fillRef idx="3">
-            <a:schemeClr val="accent1"/>
-          </a:fillRef>
-          <a:effectRef idx="2">
-            <a:schemeClr val="accent1"/>
-          </a:effectRef>
-          <a:fontRef idx="minor">
-            <a:schemeClr val="lt1"/>
-          </a:fontRef>
-        </p:style>
-        <p:txBody>
-          <a:bodyPr rtlCol="0" anchor="ctr"/>
-          <a:lstStyle/>
-          <a:p>
-            <a:pPr algn="ctr"/>
-          </a:p>
-        </p:txBody>
-      </p:sp>
-      <p:sp>
-        <p:nvSpPr>
-          <p:cNvPr id="132" name="Oval 131"/>
-          <p:cNvSpPr/>
-          <p:nvPr/>
-        </p:nvSpPr>
-        <p:spPr>
-          <a:xfrm>
-            <a:off x="9628632" y="3364991"/>
-            <a:ext cx="91440" cy="91440"/>
-          </a:xfrm>
-          <a:prstGeom prst="ellipse">
-            <a:avLst/>
-          </a:prstGeom>
-          <a:solidFill>
-            <a:srgbClr val="FFFFFF"/>
-          </a:solidFill>
-          <a:ln w="12700">
-            <a:solidFill>
-              <a:srgbClr val="059669"/>
-            </a:solidFill>
-          </a:ln>
-          <a:effectLst/>
-        </p:spPr>
-        <p:style>
-          <a:lnRef idx="1">
-            <a:schemeClr val="accent1"/>
-          </a:lnRef>
-          <a:fillRef idx="3">
-            <a:schemeClr val="accent1"/>
-          </a:fillRef>
-          <a:effectRef idx="2">
-            <a:schemeClr val="accent1"/>
-          </a:effectRef>
-          <a:fontRef idx="minor">
-            <a:schemeClr val="lt1"/>
-          </a:fontRef>
-        </p:style>
-        <p:txBody>
-          <a:bodyPr rtlCol="0" anchor="ctr"/>
-          <a:lstStyle/>
-          <a:p>
-            <a:pPr algn="ctr"/>
-          </a:p>
-        </p:txBody>
-      </p:sp>
-      <p:sp>
-        <p:nvSpPr>
-          <p:cNvPr id="133" name="Oval 132"/>
-          <p:cNvSpPr/>
-          <p:nvPr/>
-        </p:nvSpPr>
-        <p:spPr>
-          <a:xfrm>
-            <a:off x="10177272" y="3364991"/>
-            <a:ext cx="91440" cy="91440"/>
-          </a:xfrm>
-          <a:prstGeom prst="ellipse">
-            <a:avLst/>
-          </a:prstGeom>
-          <a:solidFill>
-            <a:srgbClr val="FFFFFF"/>
-          </a:solidFill>
-          <a:ln w="12700">
-            <a:solidFill>
-              <a:srgbClr val="059669"/>
-            </a:solidFill>
-          </a:ln>
-          <a:effectLst/>
-        </p:spPr>
-        <p:style>
-          <a:lnRef idx="1">
-            <a:schemeClr val="accent1"/>
-          </a:lnRef>
-          <a:fillRef idx="3">
-            <a:schemeClr val="accent1"/>
-          </a:fillRef>
-          <a:effectRef idx="2">
-            <a:schemeClr val="accent1"/>
-          </a:effectRef>
-          <a:fontRef idx="minor">
-            <a:schemeClr val="lt1"/>
-          </a:fontRef>
-        </p:style>
-        <p:txBody>
-          <a:bodyPr rtlCol="0" anchor="ctr"/>
-          <a:lstStyle/>
-          <a:p>
-            <a:pPr algn="ctr"/>
-          </a:p>
-        </p:txBody>
-      </p:sp>
-      <p:sp>
-        <p:nvSpPr>
-          <p:cNvPr id="134" name="Oval 133"/>
-          <p:cNvSpPr/>
-          <p:nvPr/>
-        </p:nvSpPr>
-        <p:spPr>
-          <a:xfrm>
-            <a:off x="10725912" y="3364991"/>
-            <a:ext cx="91440" cy="91440"/>
-          </a:xfrm>
-          <a:prstGeom prst="ellipse">
-            <a:avLst/>
-          </a:prstGeom>
-          <a:solidFill>
-            <a:srgbClr val="059669"/>
-          </a:solidFill>
-          <a:ln>
-            <a:noFill/>
-          </a:ln>
-          <a:effectLst/>
-        </p:spPr>
-        <p:style>
-          <a:lnRef idx="1">
-            <a:schemeClr val="accent1"/>
-          </a:lnRef>
-          <a:fillRef idx="3">
-            <a:schemeClr val="accent1"/>
-          </a:fillRef>
-          <a:effectRef idx="2">
-            <a:schemeClr val="accent1"/>
-          </a:effectRef>
-          <a:fontRef idx="minor">
-            <a:schemeClr val="lt1"/>
-          </a:fontRef>
-        </p:style>
-        <p:txBody>
-          <a:bodyPr rtlCol="0" anchor="ctr"/>
-          <a:lstStyle/>
-          <a:p>
-            <a:pPr algn="ctr"/>
-          </a:p>
-        </p:txBody>
-      </p:sp>
-      <p:sp>
-        <p:nvSpPr>
-          <p:cNvPr id="135" name="Oval 134"/>
-          <p:cNvSpPr/>
-          <p:nvPr/>
-        </p:nvSpPr>
-        <p:spPr>
-          <a:xfrm>
-            <a:off x="11274552" y="3364991"/>
-            <a:ext cx="91440" cy="91440"/>
-          </a:xfrm>
-          <a:prstGeom prst="ellipse">
-            <a:avLst/>
-          </a:prstGeom>
-          <a:solidFill>
-            <a:srgbClr val="FFFFFF"/>
-          </a:solidFill>
-          <a:ln w="12700">
-            <a:solidFill>
-              <a:srgbClr val="059669"/>
-            </a:solidFill>
-          </a:ln>
-          <a:effectLst/>
-        </p:spPr>
-        <p:style>
-          <a:lnRef idx="1">
-            <a:schemeClr val="accent1"/>
-          </a:lnRef>
-          <a:fillRef idx="3">
-            <a:schemeClr val="accent1"/>
-          </a:fillRef>
-          <a:effectRef idx="2">
-            <a:schemeClr val="accent1"/>
-          </a:effectRef>
-          <a:fontRef idx="minor">
-            <a:schemeClr val="lt1"/>
-          </a:fontRef>
-        </p:style>
-        <p:txBody>
-          <a:bodyPr rtlCol="0" anchor="ctr"/>
-          <a:lstStyle/>
-          <a:p>
-            <a:pPr algn="ctr"/>
-          </a:p>
-        </p:txBody>
-      </p:sp>
-      <p:sp>
-        <p:nvSpPr>
-          <p:cNvPr id="136" name="TextBox 135"/>
-          <p:cNvSpPr txBox="1"/>
-          <p:nvPr/>
-        </p:nvSpPr>
-        <p:spPr>
-          <a:xfrm>
-            <a:off x="8028431" y="3566160"/>
-            <a:ext cx="1042415" cy="219456"/>
-          </a:xfrm>
-          <a:prstGeom prst="rect">
-            <a:avLst/>
-          </a:prstGeom>
-          <a:noFill/>
-        </p:spPr>
-        <p:txBody>
-          <a:bodyPr wrap="square" lIns="0" rIns="0" tIns="0" bIns="0" anchor="ctr">
-            <a:noAutofit/>
-          </a:bodyPr>
-          <a:lstStyle/>
-          <a:p>
-            <a:pPr algn="l">
-              <a:lnSpc>
-                <a:spcPct val="112000"/>
-              </a:lnSpc>
-              <a:spcBef>
-                <a:spcPts val="0"/>
-              </a:spcBef>
-              <a:spcAft>
-                <a:spcPts val="0"/>
-              </a:spcAft>
-            </a:pPr>
-            <a:r>
-              <a:rPr sz="620" b="0" i="0">
-                <a:solidFill>
-                  <a:srgbClr val="0F172A"/>
-                </a:solidFill>
-                <a:latin typeface="Segoe UI"/>
-                <a:ea typeface="Microsoft YaHei"/>
-              </a:rPr>
-              <a:t>客户 360</a:t>
-            </a:r>
-          </a:p>
-        </p:txBody>
-      </p:sp>
-      <p:sp>
-        <p:nvSpPr>
-          <p:cNvPr id="137" name="Oval 136"/>
-          <p:cNvSpPr/>
-          <p:nvPr/>
-        </p:nvSpPr>
-        <p:spPr>
-          <a:xfrm>
-            <a:off x="9079992" y="3630168"/>
-            <a:ext cx="91440" cy="91440"/>
-          </a:xfrm>
-          <a:prstGeom prst="ellipse">
-            <a:avLst/>
-          </a:prstGeom>
-          <a:solidFill>
-            <a:srgbClr val="FFFFFF"/>
-          </a:solidFill>
-          <a:ln w="12700">
-            <a:solidFill>
-              <a:srgbClr val="059669"/>
-            </a:solidFill>
-          </a:ln>
-          <a:effectLst/>
-        </p:spPr>
-        <p:style>
-          <a:lnRef idx="1">
-            <a:schemeClr val="accent1"/>
-          </a:lnRef>
-          <a:fillRef idx="3">
-            <a:schemeClr val="accent1"/>
-          </a:fillRef>
-          <a:effectRef idx="2">
-            <a:schemeClr val="accent1"/>
-          </a:effectRef>
-          <a:fontRef idx="minor">
-            <a:schemeClr val="lt1"/>
-          </a:fontRef>
-        </p:style>
-        <p:txBody>
-          <a:bodyPr rtlCol="0" anchor="ctr"/>
-          <a:lstStyle/>
-          <a:p>
-            <a:pPr algn="ctr"/>
-          </a:p>
-        </p:txBody>
-      </p:sp>
-      <p:sp>
-        <p:nvSpPr>
-          <p:cNvPr id="138" name="Oval 137"/>
-          <p:cNvSpPr/>
-          <p:nvPr/>
-        </p:nvSpPr>
-        <p:spPr>
-          <a:xfrm>
-            <a:off x="9628632" y="3630168"/>
-            <a:ext cx="91440" cy="91440"/>
-          </a:xfrm>
-          <a:prstGeom prst="ellipse">
-            <a:avLst/>
-          </a:prstGeom>
-          <a:solidFill>
-            <a:srgbClr val="059669"/>
-          </a:solidFill>
-          <a:ln>
-            <a:noFill/>
-          </a:ln>
-          <a:effectLst/>
-        </p:spPr>
-        <p:style>
-          <a:lnRef idx="1">
-            <a:schemeClr val="accent1"/>
-          </a:lnRef>
-          <a:fillRef idx="3">
-            <a:schemeClr val="accent1"/>
-          </a:fillRef>
-          <a:effectRef idx="2">
-            <a:schemeClr val="accent1"/>
-          </a:effectRef>
-          <a:fontRef idx="minor">
-            <a:schemeClr val="lt1"/>
-          </a:fontRef>
-        </p:style>
-        <p:txBody>
-          <a:bodyPr rtlCol="0" anchor="ctr"/>
-          <a:lstStyle/>
-          <a:p>
-            <a:pPr algn="ctr"/>
-          </a:p>
-        </p:txBody>
-      </p:sp>
-      <p:sp>
-        <p:nvSpPr>
-          <p:cNvPr id="139" name="Oval 138"/>
-          <p:cNvSpPr/>
-          <p:nvPr/>
-        </p:nvSpPr>
-        <p:spPr>
-          <a:xfrm>
-            <a:off x="10177272" y="3630168"/>
-            <a:ext cx="91440" cy="91440"/>
-          </a:xfrm>
-          <a:prstGeom prst="ellipse">
-            <a:avLst/>
-          </a:prstGeom>
-          <a:solidFill>
-            <a:srgbClr val="059669"/>
-          </a:solidFill>
-          <a:ln>
-            <a:noFill/>
-          </a:ln>
-          <a:effectLst/>
-        </p:spPr>
-        <p:style>
-          <a:lnRef idx="1">
-            <a:schemeClr val="accent1"/>
-          </a:lnRef>
-          <a:fillRef idx="3">
-            <a:schemeClr val="accent1"/>
-          </a:fillRef>
-          <a:effectRef idx="2">
-            <a:schemeClr val="accent1"/>
-          </a:effectRef>
-          <a:fontRef idx="minor">
-            <a:schemeClr val="lt1"/>
-          </a:fontRef>
-        </p:style>
-        <p:txBody>
-          <a:bodyPr rtlCol="0" anchor="ctr"/>
-          <a:lstStyle/>
-          <a:p>
-            <a:pPr algn="ctr"/>
-          </a:p>
-        </p:txBody>
-      </p:sp>
-      <p:sp>
-        <p:nvSpPr>
-          <p:cNvPr id="140" name="Oval 139"/>
-          <p:cNvSpPr/>
-          <p:nvPr/>
-        </p:nvSpPr>
-        <p:spPr>
-          <a:xfrm>
-            <a:off x="10725912" y="3630168"/>
-            <a:ext cx="91440" cy="91440"/>
-          </a:xfrm>
-          <a:prstGeom prst="ellipse">
-            <a:avLst/>
-          </a:prstGeom>
-          <a:solidFill>
-            <a:srgbClr val="059669"/>
-          </a:solidFill>
-          <a:ln>
-            <a:noFill/>
-          </a:ln>
-          <a:effectLst/>
-        </p:spPr>
-        <p:style>
-          <a:lnRef idx="1">
-            <a:schemeClr val="accent1"/>
-          </a:lnRef>
-          <a:fillRef idx="3">
-            <a:schemeClr val="accent1"/>
-          </a:fillRef>
-          <a:effectRef idx="2">
-            <a:schemeClr val="accent1"/>
-          </a:effectRef>
-          <a:fontRef idx="minor">
-            <a:schemeClr val="lt1"/>
-          </a:fontRef>
-        </p:style>
-        <p:txBody>
-          <a:bodyPr rtlCol="0" anchor="ctr"/>
-          <a:lstStyle/>
-          <a:p>
-            <a:pPr algn="ctr"/>
-          </a:p>
-        </p:txBody>
-      </p:sp>
-      <p:sp>
-        <p:nvSpPr>
-          <p:cNvPr id="141" name="Oval 140"/>
-          <p:cNvSpPr/>
-          <p:nvPr/>
-        </p:nvSpPr>
-        <p:spPr>
-          <a:xfrm>
-            <a:off x="11274552" y="3630168"/>
-            <a:ext cx="91440" cy="91440"/>
-          </a:xfrm>
-          <a:prstGeom prst="ellipse">
-            <a:avLst/>
-          </a:prstGeom>
-          <a:solidFill>
-            <a:srgbClr val="059669"/>
-          </a:solidFill>
-          <a:ln>
-            <a:noFill/>
-          </a:ln>
-          <a:effectLst/>
-        </p:spPr>
-        <p:style>
-          <a:lnRef idx="1">
-            <a:schemeClr val="accent1"/>
-          </a:lnRef>
-          <a:fillRef idx="3">
-            <a:schemeClr val="accent1"/>
-          </a:fillRef>
-          <a:effectRef idx="2">
-            <a:schemeClr val="accent1"/>
-          </a:effectRef>
-          <a:fontRef idx="minor">
-            <a:schemeClr val="lt1"/>
-          </a:fontRef>
-        </p:style>
-        <p:txBody>
-          <a:bodyPr rtlCol="0" anchor="ctr"/>
-          <a:lstStyle/>
-          <a:p>
-            <a:pPr algn="ctr"/>
-          </a:p>
-        </p:txBody>
-      </p:sp>
-      <p:sp>
-        <p:nvSpPr>
-          <p:cNvPr id="142" name="TextBox 141"/>
-          <p:cNvSpPr txBox="1"/>
-          <p:nvPr/>
-        </p:nvSpPr>
-        <p:spPr>
-          <a:xfrm>
-            <a:off x="8028431" y="3831335"/>
-            <a:ext cx="1042415" cy="219456"/>
-          </a:xfrm>
-          <a:prstGeom prst="rect">
-            <a:avLst/>
-          </a:prstGeom>
-          <a:noFill/>
-        </p:spPr>
-        <p:txBody>
-          <a:bodyPr wrap="square" lIns="0" rIns="0" tIns="0" bIns="0" anchor="ctr">
-            <a:noAutofit/>
-          </a:bodyPr>
-          <a:lstStyle/>
-          <a:p>
-            <a:pPr algn="l">
-              <a:lnSpc>
-                <a:spcPct val="112000"/>
-              </a:lnSpc>
-              <a:spcBef>
-                <a:spcPts val="0"/>
-              </a:spcBef>
-              <a:spcAft>
-                <a:spcPts val="0"/>
-              </a:spcAft>
-            </a:pPr>
-            <a:r>
-              <a:rPr sz="620" b="0" i="0">
-                <a:solidFill>
-                  <a:srgbClr val="0F172A"/>
-                </a:solidFill>
-                <a:latin typeface="Segoe UI"/>
-                <a:ea typeface="Microsoft YaHei"/>
-              </a:rPr>
-              <a:t>拜访绩效</a:t>
-            </a:r>
-          </a:p>
-        </p:txBody>
-      </p:sp>
-      <p:sp>
-        <p:nvSpPr>
-          <p:cNvPr id="143" name="TextBox 142"/>
-          <p:cNvSpPr txBox="1"/>
-          <p:nvPr/>
-        </p:nvSpPr>
-        <p:spPr>
-          <a:xfrm>
-            <a:off x="9034272" y="3831335"/>
-            <a:ext cx="182880" cy="219456"/>
-          </a:xfrm>
-          <a:prstGeom prst="rect">
-            <a:avLst/>
-          </a:prstGeom>
-          <a:noFill/>
-        </p:spPr>
-        <p:txBody>
-          <a:bodyPr wrap="square" lIns="0" rIns="0" tIns="0" bIns="0" anchor="ctr">
-            <a:noAutofit/>
-          </a:bodyPr>
-          <a:lstStyle/>
-          <a:p>
-            <a:pPr algn="ctr">
-              <a:lnSpc>
-                <a:spcPct val="112000"/>
-              </a:lnSpc>
-              <a:spcBef>
-                <a:spcPts val="0"/>
-              </a:spcBef>
-              <a:spcAft>
-                <a:spcPts val="0"/>
-              </a:spcAft>
-            </a:pPr>
-            <a:r>
-              <a:rPr sz="600" b="0" i="0">
-                <a:solidFill>
-                  <a:srgbClr val="94A3B8"/>
-                </a:solidFill>
-                <a:latin typeface="Segoe UI"/>
-                <a:ea typeface="Microsoft YaHei"/>
-              </a:rPr>
-              <a:t>–</a:t>
-            </a:r>
-          </a:p>
-        </p:txBody>
-      </p:sp>
-      <p:sp>
-        <p:nvSpPr>
-          <p:cNvPr id="144" name="Oval 143"/>
-          <p:cNvSpPr/>
-          <p:nvPr/>
-        </p:nvSpPr>
-        <p:spPr>
-          <a:xfrm>
-            <a:off x="9628632" y="3895344"/>
-            <a:ext cx="91440" cy="91440"/>
-          </a:xfrm>
-          <a:prstGeom prst="ellipse">
-            <a:avLst/>
-          </a:prstGeom>
-          <a:solidFill>
-            <a:srgbClr val="059669"/>
-          </a:solidFill>
-          <a:ln>
-            <a:noFill/>
-          </a:ln>
-          <a:effectLst/>
-        </p:spPr>
-        <p:style>
-          <a:lnRef idx="1">
-            <a:schemeClr val="accent1"/>
-          </a:lnRef>
-          <a:fillRef idx="3">
-            <a:schemeClr val="accent1"/>
-          </a:fillRef>
-          <a:effectRef idx="2">
-            <a:schemeClr val="accent1"/>
-          </a:effectRef>
-          <a:fontRef idx="minor">
-            <a:schemeClr val="lt1"/>
-          </a:fontRef>
-        </p:style>
-        <p:txBody>
-          <a:bodyPr rtlCol="0" anchor="ctr"/>
-          <a:lstStyle/>
-          <a:p>
-            <a:pPr algn="ctr"/>
-          </a:p>
-        </p:txBody>
-      </p:sp>
-      <p:sp>
-        <p:nvSpPr>
-          <p:cNvPr id="145" name="Oval 144"/>
-          <p:cNvSpPr/>
-          <p:nvPr/>
-        </p:nvSpPr>
-        <p:spPr>
-          <a:xfrm>
-            <a:off x="10177272" y="3895344"/>
-            <a:ext cx="91440" cy="91440"/>
-          </a:xfrm>
-          <a:prstGeom prst="ellipse">
-            <a:avLst/>
-          </a:prstGeom>
-          <a:solidFill>
-            <a:srgbClr val="059669"/>
-          </a:solidFill>
-          <a:ln>
-            <a:noFill/>
-          </a:ln>
-          <a:effectLst/>
-        </p:spPr>
-        <p:style>
-          <a:lnRef idx="1">
-            <a:schemeClr val="accent1"/>
-          </a:lnRef>
-          <a:fillRef idx="3">
-            <a:schemeClr val="accent1"/>
-          </a:fillRef>
-          <a:effectRef idx="2">
-            <a:schemeClr val="accent1"/>
-          </a:effectRef>
-          <a:fontRef idx="minor">
-            <a:schemeClr val="lt1"/>
-          </a:fontRef>
-        </p:style>
-        <p:txBody>
-          <a:bodyPr rtlCol="0" anchor="ctr"/>
-          <a:lstStyle/>
-          <a:p>
-            <a:pPr algn="ctr"/>
-          </a:p>
-        </p:txBody>
-      </p:sp>
-      <p:sp>
-        <p:nvSpPr>
-          <p:cNvPr id="146" name="Oval 145"/>
-          <p:cNvSpPr/>
-          <p:nvPr/>
-        </p:nvSpPr>
-        <p:spPr>
-          <a:xfrm>
-            <a:off x="10725912" y="3895344"/>
-            <a:ext cx="91440" cy="91440"/>
-          </a:xfrm>
-          <a:prstGeom prst="ellipse">
-            <a:avLst/>
-          </a:prstGeom>
-          <a:solidFill>
-            <a:srgbClr val="059669"/>
-          </a:solidFill>
-          <a:ln>
-            <a:noFill/>
-          </a:ln>
-          <a:effectLst/>
-        </p:spPr>
-        <p:style>
-          <a:lnRef idx="1">
-            <a:schemeClr val="accent1"/>
-          </a:lnRef>
-          <a:fillRef idx="3">
-            <a:schemeClr val="accent1"/>
-          </a:fillRef>
-          <a:effectRef idx="2">
-            <a:schemeClr val="accent1"/>
-          </a:effectRef>
-          <a:fontRef idx="minor">
-            <a:schemeClr val="lt1"/>
-          </a:fontRef>
-        </p:style>
-        <p:txBody>
-          <a:bodyPr rtlCol="0" anchor="ctr"/>
-          <a:lstStyle/>
-          <a:p>
-            <a:pPr algn="ctr"/>
-          </a:p>
-        </p:txBody>
-      </p:sp>
-      <p:sp>
-        <p:nvSpPr>
-          <p:cNvPr id="147" name="TextBox 146"/>
-          <p:cNvSpPr txBox="1"/>
-          <p:nvPr/>
-        </p:nvSpPr>
-        <p:spPr>
-          <a:xfrm>
-            <a:off x="11228832" y="3831335"/>
-            <a:ext cx="182880" cy="219456"/>
-          </a:xfrm>
-          <a:prstGeom prst="rect">
-            <a:avLst/>
-          </a:prstGeom>
-          <a:noFill/>
-        </p:spPr>
-        <p:txBody>
-          <a:bodyPr wrap="square" lIns="0" rIns="0" tIns="0" bIns="0" anchor="ctr">
-            <a:noAutofit/>
-          </a:bodyPr>
-          <a:lstStyle/>
-          <a:p>
-            <a:pPr algn="ctr">
-              <a:lnSpc>
-                <a:spcPct val="112000"/>
-              </a:lnSpc>
-              <a:spcBef>
-                <a:spcPts val="0"/>
-              </a:spcBef>
-              <a:spcAft>
-                <a:spcPts val="0"/>
-              </a:spcAft>
-            </a:pPr>
-            <a:r>
-              <a:rPr sz="600" b="0" i="0">
-                <a:solidFill>
-                  <a:srgbClr val="94A3B8"/>
-                </a:solidFill>
-                <a:latin typeface="Segoe UI"/>
-                <a:ea typeface="Microsoft YaHei"/>
-              </a:rPr>
-              <a:t>–</a:t>
-            </a:r>
-          </a:p>
-        </p:txBody>
-      </p:sp>
-      <p:sp>
-        <p:nvSpPr>
-          <p:cNvPr id="148" name="TextBox 147"/>
-          <p:cNvSpPr txBox="1"/>
-          <p:nvPr/>
-        </p:nvSpPr>
-        <p:spPr>
-          <a:xfrm>
-            <a:off x="8028431" y="4096511"/>
-            <a:ext cx="1042415" cy="219456"/>
-          </a:xfrm>
-          <a:prstGeom prst="rect">
-            <a:avLst/>
-          </a:prstGeom>
-          <a:noFill/>
-        </p:spPr>
-        <p:txBody>
-          <a:bodyPr wrap="square" lIns="0" rIns="0" tIns="0" bIns="0" anchor="ctr">
-            <a:noAutofit/>
-          </a:bodyPr>
-          <a:lstStyle/>
-          <a:p>
-            <a:pPr algn="l">
-              <a:lnSpc>
-                <a:spcPct val="112000"/>
-              </a:lnSpc>
-              <a:spcBef>
-                <a:spcPts val="0"/>
-              </a:spcBef>
-              <a:spcAft>
-                <a:spcPts val="0"/>
-              </a:spcAft>
-            </a:pPr>
-            <a:r>
-              <a:rPr sz="620" b="0" i="0">
-                <a:solidFill>
-                  <a:srgbClr val="0F172A"/>
-                </a:solidFill>
-                <a:latin typeface="Segoe UI"/>
-                <a:ea typeface="Microsoft YaHei"/>
-              </a:rPr>
-              <a:t>报修服务</a:t>
-            </a:r>
-          </a:p>
-        </p:txBody>
-      </p:sp>
-      <p:sp>
-        <p:nvSpPr>
-          <p:cNvPr id="149" name="TextBox 148"/>
-          <p:cNvSpPr txBox="1"/>
-          <p:nvPr/>
-        </p:nvSpPr>
-        <p:spPr>
-          <a:xfrm>
-            <a:off x="9034272" y="4096511"/>
-            <a:ext cx="182880" cy="219456"/>
-          </a:xfrm>
-          <a:prstGeom prst="rect">
-            <a:avLst/>
-          </a:prstGeom>
-          <a:noFill/>
-        </p:spPr>
-        <p:txBody>
-          <a:bodyPr wrap="square" lIns="0" rIns="0" tIns="0" bIns="0" anchor="ctr">
-            <a:noAutofit/>
-          </a:bodyPr>
-          <a:lstStyle/>
-          <a:p>
-            <a:pPr algn="ctr">
-              <a:lnSpc>
-                <a:spcPct val="112000"/>
-              </a:lnSpc>
-              <a:spcBef>
-                <a:spcPts val="0"/>
-              </a:spcBef>
-              <a:spcAft>
-                <a:spcPts val="0"/>
-              </a:spcAft>
-            </a:pPr>
-            <a:r>
-              <a:rPr sz="600" b="0" i="0">
-                <a:solidFill>
-                  <a:srgbClr val="94A3B8"/>
-                </a:solidFill>
-                <a:latin typeface="Segoe UI"/>
-                <a:ea typeface="Microsoft YaHei"/>
-              </a:rPr>
-              <a:t>–</a:t>
-            </a:r>
-          </a:p>
-        </p:txBody>
-      </p:sp>
-      <p:sp>
-        <p:nvSpPr>
-          <p:cNvPr id="150" name="TextBox 149"/>
-          <p:cNvSpPr txBox="1"/>
-          <p:nvPr/>
-        </p:nvSpPr>
-        <p:spPr>
-          <a:xfrm>
-            <a:off x="9582912" y="4096511"/>
-            <a:ext cx="182880" cy="219456"/>
-          </a:xfrm>
-          <a:prstGeom prst="rect">
-            <a:avLst/>
-          </a:prstGeom>
-          <a:noFill/>
-        </p:spPr>
-        <p:txBody>
-          <a:bodyPr wrap="square" lIns="0" rIns="0" tIns="0" bIns="0" anchor="ctr">
-            <a:noAutofit/>
-          </a:bodyPr>
-          <a:lstStyle/>
-          <a:p>
-            <a:pPr algn="ctr">
-              <a:lnSpc>
-                <a:spcPct val="112000"/>
-              </a:lnSpc>
-              <a:spcBef>
-                <a:spcPts val="0"/>
-              </a:spcBef>
-              <a:spcAft>
-                <a:spcPts val="0"/>
-              </a:spcAft>
-            </a:pPr>
-            <a:r>
-              <a:rPr sz="600" b="0" i="0">
-                <a:solidFill>
-                  <a:srgbClr val="94A3B8"/>
-                </a:solidFill>
-                <a:latin typeface="Segoe UI"/>
-                <a:ea typeface="Microsoft YaHei"/>
-              </a:rPr>
-              <a:t>–</a:t>
-            </a:r>
-          </a:p>
-        </p:txBody>
-      </p:sp>
-      <p:sp>
-        <p:nvSpPr>
-          <p:cNvPr id="151" name="Oval 150"/>
-          <p:cNvSpPr/>
-          <p:nvPr/>
-        </p:nvSpPr>
-        <p:spPr>
-          <a:xfrm>
-            <a:off x="10177272" y="4160520"/>
-            <a:ext cx="91440" cy="91440"/>
-          </a:xfrm>
-          <a:prstGeom prst="ellipse">
-            <a:avLst/>
-          </a:prstGeom>
-          <a:solidFill>
-            <a:srgbClr val="059669"/>
-          </a:solidFill>
-          <a:ln>
-            <a:noFill/>
-          </a:ln>
-          <a:effectLst/>
-        </p:spPr>
-        <p:style>
-          <a:lnRef idx="1">
-            <a:schemeClr val="accent1"/>
-          </a:lnRef>
-          <a:fillRef idx="3">
-            <a:schemeClr val="accent1"/>
-          </a:fillRef>
-          <a:effectRef idx="2">
-            <a:schemeClr val="accent1"/>
-          </a:effectRef>
-          <a:fontRef idx="minor">
-            <a:schemeClr val="lt1"/>
-          </a:fontRef>
-        </p:style>
-        <p:txBody>
-          <a:bodyPr rtlCol="0" anchor="ctr"/>
-          <a:lstStyle/>
-          <a:p>
-            <a:pPr algn="ctr"/>
-          </a:p>
-        </p:txBody>
-      </p:sp>
-      <p:sp>
-        <p:nvSpPr>
-          <p:cNvPr id="152" name="Oval 151"/>
-          <p:cNvSpPr/>
-          <p:nvPr/>
-        </p:nvSpPr>
-        <p:spPr>
-          <a:xfrm>
-            <a:off x="10725912" y="4160520"/>
-            <a:ext cx="91440" cy="91440"/>
-          </a:xfrm>
-          <a:prstGeom prst="ellipse">
-            <a:avLst/>
-          </a:prstGeom>
-          <a:solidFill>
-            <a:srgbClr val="059669"/>
-          </a:solidFill>
-          <a:ln>
-            <a:noFill/>
-          </a:ln>
-          <a:effectLst/>
-        </p:spPr>
-        <p:style>
-          <a:lnRef idx="1">
-            <a:schemeClr val="accent1"/>
-          </a:lnRef>
-          <a:fillRef idx="3">
-            <a:schemeClr val="accent1"/>
-          </a:fillRef>
-          <a:effectRef idx="2">
-            <a:schemeClr val="accent1"/>
-          </a:effectRef>
-          <a:fontRef idx="minor">
-            <a:schemeClr val="lt1"/>
-          </a:fontRef>
-        </p:style>
-        <p:txBody>
-          <a:bodyPr rtlCol="0" anchor="ctr"/>
-          <a:lstStyle/>
-          <a:p>
-            <a:pPr algn="ctr"/>
-          </a:p>
-        </p:txBody>
-      </p:sp>
-      <p:sp>
-        <p:nvSpPr>
-          <p:cNvPr id="153" name="TextBox 152"/>
-          <p:cNvSpPr txBox="1"/>
-          <p:nvPr/>
-        </p:nvSpPr>
-        <p:spPr>
-          <a:xfrm>
-            <a:off x="11228832" y="4096511"/>
-            <a:ext cx="182880" cy="219456"/>
-          </a:xfrm>
-          <a:prstGeom prst="rect">
-            <a:avLst/>
-          </a:prstGeom>
-          <a:noFill/>
-        </p:spPr>
-        <p:txBody>
-          <a:bodyPr wrap="square" lIns="0" rIns="0" tIns="0" bIns="0" anchor="ctr">
-            <a:noAutofit/>
-          </a:bodyPr>
-          <a:lstStyle/>
-          <a:p>
-            <a:pPr algn="ctr">
-              <a:lnSpc>
-                <a:spcPct val="112000"/>
-              </a:lnSpc>
-              <a:spcBef>
-                <a:spcPts val="0"/>
-              </a:spcBef>
-              <a:spcAft>
-                <a:spcPts val="0"/>
-              </a:spcAft>
-            </a:pPr>
-            <a:r>
-              <a:rPr sz="600" b="0" i="0">
-                <a:solidFill>
-                  <a:srgbClr val="94A3B8"/>
-                </a:solidFill>
-                <a:latin typeface="Segoe UI"/>
-                <a:ea typeface="Microsoft YaHei"/>
-              </a:rPr>
-              <a:t>–</a:t>
-            </a:r>
-          </a:p>
-        </p:txBody>
-      </p:sp>
-      <p:sp>
-        <p:nvSpPr>
-          <p:cNvPr id="154" name="TextBox 153"/>
-          <p:cNvSpPr txBox="1"/>
-          <p:nvPr/>
-        </p:nvSpPr>
-        <p:spPr>
-          <a:xfrm>
-            <a:off x="8028431" y="4361688"/>
-            <a:ext cx="1042415" cy="219456"/>
-          </a:xfrm>
-          <a:prstGeom prst="rect">
-            <a:avLst/>
-          </a:prstGeom>
-          <a:noFill/>
-        </p:spPr>
-        <p:txBody>
-          <a:bodyPr wrap="square" lIns="0" rIns="0" tIns="0" bIns="0" anchor="ctr">
-            <a:noAutofit/>
-          </a:bodyPr>
-          <a:lstStyle/>
-          <a:p>
-            <a:pPr algn="l">
-              <a:lnSpc>
-                <a:spcPct val="112000"/>
-              </a:lnSpc>
-              <a:spcBef>
-                <a:spcPts val="0"/>
-              </a:spcBef>
-              <a:spcAft>
-                <a:spcPts val="0"/>
-              </a:spcAft>
-            </a:pPr>
-            <a:r>
-              <a:rPr sz="620" b="0" i="0">
-                <a:solidFill>
-                  <a:srgbClr val="0F172A"/>
-                </a:solidFill>
-                <a:latin typeface="Segoe UI"/>
-                <a:ea typeface="Microsoft YaHei"/>
-              </a:rPr>
-              <a:t>AI 能力</a:t>
-            </a:r>
-          </a:p>
-        </p:txBody>
-      </p:sp>
-      <p:sp>
-        <p:nvSpPr>
-          <p:cNvPr id="155" name="Oval 154"/>
-          <p:cNvSpPr/>
-          <p:nvPr/>
-        </p:nvSpPr>
-        <p:spPr>
-          <a:xfrm>
-            <a:off x="9079992" y="4425696"/>
-            <a:ext cx="91440" cy="91440"/>
-          </a:xfrm>
-          <a:prstGeom prst="ellipse">
-            <a:avLst/>
-          </a:prstGeom>
-          <a:solidFill>
-            <a:srgbClr val="059669"/>
-          </a:solidFill>
-          <a:ln>
-            <a:noFill/>
-          </a:ln>
-          <a:effectLst/>
-        </p:spPr>
-        <p:style>
-          <a:lnRef idx="1">
-            <a:schemeClr val="accent1"/>
-          </a:lnRef>
-          <a:fillRef idx="3">
-            <a:schemeClr val="accent1"/>
-          </a:fillRef>
-          <a:effectRef idx="2">
-            <a:schemeClr val="accent1"/>
-          </a:effectRef>
-          <a:fontRef idx="minor">
-            <a:schemeClr val="lt1"/>
-          </a:fontRef>
-        </p:style>
-        <p:txBody>
-          <a:bodyPr rtlCol="0" anchor="ctr"/>
-          <a:lstStyle/>
-          <a:p>
-            <a:pPr algn="ctr"/>
-          </a:p>
-        </p:txBody>
-      </p:sp>
-      <p:sp>
-        <p:nvSpPr>
-          <p:cNvPr id="156" name="Oval 155"/>
-          <p:cNvSpPr/>
-          <p:nvPr/>
-        </p:nvSpPr>
-        <p:spPr>
-          <a:xfrm>
-            <a:off x="9628632" y="4425696"/>
-            <a:ext cx="91440" cy="91440"/>
-          </a:xfrm>
-          <a:prstGeom prst="ellipse">
-            <a:avLst/>
-          </a:prstGeom>
-          <a:solidFill>
-            <a:srgbClr val="059669"/>
-          </a:solidFill>
-          <a:ln>
-            <a:noFill/>
-          </a:ln>
-          <a:effectLst/>
-        </p:spPr>
-        <p:style>
-          <a:lnRef idx="1">
-            <a:schemeClr val="accent1"/>
-          </a:lnRef>
-          <a:fillRef idx="3">
-            <a:schemeClr val="accent1"/>
-          </a:fillRef>
-          <a:effectRef idx="2">
-            <a:schemeClr val="accent1"/>
-          </a:effectRef>
-          <a:fontRef idx="minor">
-            <a:schemeClr val="lt1"/>
-          </a:fontRef>
-        </p:style>
-        <p:txBody>
-          <a:bodyPr rtlCol="0" anchor="ctr"/>
-          <a:lstStyle/>
-          <a:p>
-            <a:pPr algn="ctr"/>
-          </a:p>
-        </p:txBody>
-      </p:sp>
-      <p:sp>
-        <p:nvSpPr>
-          <p:cNvPr id="157" name="Oval 156"/>
-          <p:cNvSpPr/>
-          <p:nvPr/>
-        </p:nvSpPr>
-        <p:spPr>
-          <a:xfrm>
-            <a:off x="10177272" y="4425696"/>
-            <a:ext cx="91440" cy="91440"/>
-          </a:xfrm>
-          <a:prstGeom prst="ellipse">
-            <a:avLst/>
-          </a:prstGeom>
-          <a:solidFill>
-            <a:srgbClr val="FFFFFF"/>
-          </a:solidFill>
-          <a:ln w="12700">
-            <a:solidFill>
-              <a:srgbClr val="059669"/>
-            </a:solidFill>
-          </a:ln>
-          <a:effectLst/>
-        </p:spPr>
-        <p:style>
-          <a:lnRef idx="1">
-            <a:schemeClr val="accent1"/>
-          </a:lnRef>
-          <a:fillRef idx="3">
-            <a:schemeClr val="accent1"/>
-          </a:fillRef>
-          <a:effectRef idx="2">
-            <a:schemeClr val="accent1"/>
-          </a:effectRef>
-          <a:fontRef idx="minor">
-            <a:schemeClr val="lt1"/>
-          </a:fontRef>
-        </p:style>
-        <p:txBody>
-          <a:bodyPr rtlCol="0" anchor="ctr"/>
-          <a:lstStyle/>
-          <a:p>
-            <a:pPr algn="ctr"/>
-          </a:p>
-        </p:txBody>
-      </p:sp>
-      <p:sp>
-        <p:nvSpPr>
-          <p:cNvPr id="158" name="Oval 157"/>
-          <p:cNvSpPr/>
-          <p:nvPr/>
-        </p:nvSpPr>
-        <p:spPr>
-          <a:xfrm>
-            <a:off x="10725912" y="4425696"/>
-            <a:ext cx="91440" cy="91440"/>
-          </a:xfrm>
-          <a:prstGeom prst="ellipse">
-            <a:avLst/>
-          </a:prstGeom>
-          <a:solidFill>
-            <a:srgbClr val="059669"/>
-          </a:solidFill>
-          <a:ln>
-            <a:noFill/>
-          </a:ln>
-          <a:effectLst/>
-        </p:spPr>
-        <p:style>
-          <a:lnRef idx="1">
-            <a:schemeClr val="accent1"/>
-          </a:lnRef>
-          <a:fillRef idx="3">
-            <a:schemeClr val="accent1"/>
-          </a:fillRef>
-          <a:effectRef idx="2">
-            <a:schemeClr val="accent1"/>
-          </a:effectRef>
-          <a:fontRef idx="minor">
-            <a:schemeClr val="lt1"/>
-          </a:fontRef>
-        </p:style>
-        <p:txBody>
-          <a:bodyPr rtlCol="0" anchor="ctr"/>
-          <a:lstStyle/>
-          <a:p>
-            <a:pPr algn="ctr"/>
-          </a:p>
-        </p:txBody>
-      </p:sp>
-      <p:sp>
-        <p:nvSpPr>
-          <p:cNvPr id="159" name="Oval 158"/>
-          <p:cNvSpPr/>
-          <p:nvPr/>
-        </p:nvSpPr>
-        <p:spPr>
-          <a:xfrm>
-            <a:off x="11274552" y="4425696"/>
-            <a:ext cx="91440" cy="91440"/>
-          </a:xfrm>
-          <a:prstGeom prst="ellipse">
-            <a:avLst/>
-          </a:prstGeom>
-          <a:solidFill>
-            <a:srgbClr val="059669"/>
-          </a:solidFill>
-          <a:ln>
-            <a:noFill/>
-          </a:ln>
-          <a:effectLst/>
-        </p:spPr>
-        <p:style>
-          <a:lnRef idx="1">
-            <a:schemeClr val="accent1"/>
-          </a:lnRef>
-          <a:fillRef idx="3">
-            <a:schemeClr val="accent1"/>
-          </a:fillRef>
-          <a:effectRef idx="2">
-            <a:schemeClr val="accent1"/>
-          </a:effectRef>
-          <a:fontRef idx="minor">
-            <a:schemeClr val="lt1"/>
-          </a:fontRef>
-        </p:style>
-        <p:txBody>
-          <a:bodyPr rtlCol="0" anchor="ctr"/>
-          <a:lstStyle/>
-          <a:p>
-            <a:pPr algn="ctr"/>
-          </a:p>
-        </p:txBody>
-      </p:sp>
-      <p:sp>
-        <p:nvSpPr>
-          <p:cNvPr id="160" name="TextBox 159"/>
-          <p:cNvSpPr txBox="1"/>
-          <p:nvPr/>
-        </p:nvSpPr>
-        <p:spPr>
-          <a:xfrm>
-            <a:off x="8028431" y="4626864"/>
-            <a:ext cx="3849624" cy="128016"/>
-          </a:xfrm>
-          <a:prstGeom prst="rect">
-            <a:avLst/>
-          </a:prstGeom>
-          <a:noFill/>
-        </p:spPr>
-        <p:txBody>
-          <a:bodyPr wrap="square" lIns="0" rIns="0" tIns="0" bIns="0" anchor="t">
-            <a:noAutofit/>
-          </a:bodyPr>
-          <a:lstStyle/>
-          <a:p>
-            <a:pPr algn="l">
-              <a:lnSpc>
-                <a:spcPct val="112000"/>
-              </a:lnSpc>
-              <a:spcBef>
-                <a:spcPts val="0"/>
-              </a:spcBef>
-              <a:spcAft>
-                <a:spcPts val="0"/>
-              </a:spcAft>
-            </a:pPr>
-            <a:r>
-              <a:rPr sz="580" b="1" i="0">
-                <a:solidFill>
-                  <a:srgbClr val="047857"/>
-                </a:solidFill>
-                <a:latin typeface="Segoe UI"/>
-                <a:ea typeface="Microsoft YaHei"/>
-              </a:rPr>
-              <a:t>● 直接复用　○ 按需裁剪　– 不涉及 ｜ 例：新插件「术后随访」= C360 ＋ 内容 ＋ 积分 ＋ 通知，零新建</a:t>
-            </a:r>
-          </a:p>
-        </p:txBody>
-      </p:sp>
-      <p:sp>
-        <p:nvSpPr>
-          <p:cNvPr id="161" name="Rounded Rectangle 160"/>
-          <p:cNvSpPr/>
-          <p:nvPr/>
-        </p:nvSpPr>
-        <p:spPr>
-          <a:xfrm>
-            <a:off x="7918704" y="4956048"/>
-            <a:ext cx="4069080" cy="749808"/>
-          </a:xfrm>
-          <a:prstGeom prst="roundRect">
-            <a:avLst>
-              <a:gd name="adj" fmla="val 7317"/>
+              <a:gd name="adj" fmla="val 13636"/>
             </a:avLst>
           </a:prstGeom>
           <a:solidFill>
@@ -10483,14 +7764,14 @@
       </p:sp>
       <p:sp>
         <p:nvSpPr>
-          <p:cNvPr id="162" name="TextBox 161"/>
+          <p:cNvPr id="102" name="TextBox 101"/>
           <p:cNvSpPr txBox="1"/>
           <p:nvPr/>
         </p:nvSpPr>
         <p:spPr>
           <a:xfrm>
-            <a:off x="8028431" y="5020056"/>
-            <a:ext cx="3849624" cy="128016"/>
+            <a:off x="329184" y="5797296"/>
+            <a:ext cx="1371600" cy="402336"/>
           </a:xfrm>
           <a:prstGeom prst="rect">
             <a:avLst/>
@@ -10498,7 +7779,7 @@
           <a:noFill/>
         </p:spPr>
         <p:txBody>
-          <a:bodyPr wrap="square" lIns="0" rIns="0" tIns="0" bIns="0" anchor="t">
+          <a:bodyPr wrap="square" lIns="0" rIns="0" tIns="0" bIns="0" anchor="ctr">
             <a:noAutofit/>
           </a:bodyPr>
           <a:lstStyle/>
@@ -10515,32 +7796,32 @@
               </a:spcAft>
             </a:pPr>
             <a:r>
-              <a:rPr sz="780" b="1" i="0">
+              <a:rPr sz="740" b="1" i="0">
                 <a:solidFill>
                   <a:srgbClr val="1D4ED8"/>
                 </a:solidFill>
                 <a:latin typeface="Segoe UI"/>
                 <a:ea typeface="Microsoft YaHei"/>
               </a:rPr>
-              <a:t>租户级复用 · 治理与计量</a:t>
-            </a:r>
-          </a:p>
-        </p:txBody>
-      </p:sp>
-      <p:sp>
-        <p:nvSpPr>
-          <p:cNvPr id="163" name="Rounded Rectangle 162"/>
+              <a:t>租户级复用</a:t>
+            </a:r>
+          </a:p>
+        </p:txBody>
+      </p:sp>
+      <p:sp>
+        <p:nvSpPr>
+          <p:cNvPr id="103" name="Rounded Rectangle 102"/>
           <p:cNvSpPr/>
           <p:nvPr/>
         </p:nvSpPr>
         <p:spPr>
           <a:xfrm>
-            <a:off x="8028431" y="5175504"/>
-            <a:ext cx="1865376" cy="201168"/>
+            <a:off x="1792224" y="5870448"/>
+            <a:ext cx="2395728" cy="256032"/>
           </a:xfrm>
           <a:prstGeom prst="roundRect">
             <a:avLst>
-              <a:gd name="adj" fmla="val 18181"/>
+              <a:gd name="adj" fmla="val 14285"/>
             </a:avLst>
           </a:prstGeom>
           <a:solidFill>
@@ -10577,14 +7858,14 @@
       </p:sp>
       <p:sp>
         <p:nvSpPr>
-          <p:cNvPr id="164" name="TextBox 163"/>
+          <p:cNvPr id="104" name="TextBox 103"/>
           <p:cNvSpPr txBox="1"/>
           <p:nvPr/>
         </p:nvSpPr>
         <p:spPr>
           <a:xfrm>
-            <a:off x="8055863" y="5175504"/>
-            <a:ext cx="1810512" cy="201168"/>
+            <a:off x="1819656" y="5870448"/>
+            <a:ext cx="2340864" cy="256032"/>
           </a:xfrm>
           <a:prstGeom prst="rect">
             <a:avLst/>
@@ -10609,7 +7890,7 @@
               </a:spcAft>
             </a:pPr>
             <a:r>
-              <a:rPr sz="590" b="0" i="0">
+              <a:rPr sz="620" b="0" i="0">
                 <a:solidFill>
                   <a:srgbClr val="475569"/>
                 </a:solidFill>
@@ -10623,18 +7904,18 @@
       </p:sp>
       <p:sp>
         <p:nvSpPr>
-          <p:cNvPr id="165" name="Rounded Rectangle 164"/>
+          <p:cNvPr id="105" name="Rounded Rectangle 104"/>
           <p:cNvSpPr/>
           <p:nvPr/>
         </p:nvSpPr>
         <p:spPr>
           <a:xfrm>
-            <a:off x="9966959" y="5175504"/>
-            <a:ext cx="1865376" cy="201168"/>
+            <a:off x="4279392" y="5870448"/>
+            <a:ext cx="2395728" cy="256032"/>
           </a:xfrm>
           <a:prstGeom prst="roundRect">
             <a:avLst>
-              <a:gd name="adj" fmla="val 18181"/>
+              <a:gd name="adj" fmla="val 14285"/>
             </a:avLst>
           </a:prstGeom>
           <a:solidFill>
@@ -10671,14 +7952,14 @@
       </p:sp>
       <p:sp>
         <p:nvSpPr>
-          <p:cNvPr id="166" name="TextBox 165"/>
+          <p:cNvPr id="106" name="TextBox 105"/>
           <p:cNvSpPr txBox="1"/>
           <p:nvPr/>
         </p:nvSpPr>
         <p:spPr>
           <a:xfrm>
-            <a:off x="9994391" y="5175504"/>
-            <a:ext cx="1810512" cy="201168"/>
+            <a:off x="4306824" y="5870448"/>
+            <a:ext cx="2340864" cy="256032"/>
           </a:xfrm>
           <a:prstGeom prst="rect">
             <a:avLst/>
@@ -10703,7 +7984,7 @@
               </a:spcAft>
             </a:pPr>
             <a:r>
-              <a:rPr sz="590" b="0" i="0">
+              <a:rPr sz="620" b="0" i="0">
                 <a:solidFill>
                   <a:srgbClr val="475569"/>
                 </a:solidFill>
@@ -10717,18 +7998,18 @@
       </p:sp>
       <p:sp>
         <p:nvSpPr>
-          <p:cNvPr id="167" name="Rounded Rectangle 166"/>
+          <p:cNvPr id="107" name="Rounded Rectangle 106"/>
           <p:cNvSpPr/>
           <p:nvPr/>
         </p:nvSpPr>
         <p:spPr>
           <a:xfrm>
-            <a:off x="8028431" y="5413248"/>
-            <a:ext cx="1865376" cy="201168"/>
+            <a:off x="6766560" y="5870448"/>
+            <a:ext cx="2395728" cy="256032"/>
           </a:xfrm>
           <a:prstGeom prst="roundRect">
             <a:avLst>
-              <a:gd name="adj" fmla="val 18181"/>
+              <a:gd name="adj" fmla="val 14285"/>
             </a:avLst>
           </a:prstGeom>
           <a:solidFill>
@@ -10765,14 +8046,14 @@
       </p:sp>
       <p:sp>
         <p:nvSpPr>
-          <p:cNvPr id="168" name="TextBox 167"/>
+          <p:cNvPr id="108" name="TextBox 107"/>
           <p:cNvSpPr txBox="1"/>
           <p:nvPr/>
         </p:nvSpPr>
         <p:spPr>
           <a:xfrm>
-            <a:off x="8055863" y="5413248"/>
-            <a:ext cx="1810512" cy="201168"/>
+            <a:off x="6793992" y="5870448"/>
+            <a:ext cx="2340864" cy="256032"/>
           </a:xfrm>
           <a:prstGeom prst="rect">
             <a:avLst/>
@@ -10797,7 +8078,7 @@
               </a:spcAft>
             </a:pPr>
             <a:r>
-              <a:rPr sz="590" b="0" i="0">
+              <a:rPr sz="620" b="0" i="0">
                 <a:solidFill>
                   <a:srgbClr val="475569"/>
                 </a:solidFill>
@@ -10811,18 +8092,18 @@
       </p:sp>
       <p:sp>
         <p:nvSpPr>
-          <p:cNvPr id="169" name="Rounded Rectangle 168"/>
+          <p:cNvPr id="109" name="Rounded Rectangle 108"/>
           <p:cNvSpPr/>
           <p:nvPr/>
         </p:nvSpPr>
         <p:spPr>
           <a:xfrm>
-            <a:off x="9966959" y="5413248"/>
-            <a:ext cx="1865376" cy="201168"/>
+            <a:off x="9253728" y="5870448"/>
+            <a:ext cx="2395728" cy="256032"/>
           </a:xfrm>
           <a:prstGeom prst="roundRect">
             <a:avLst>
-              <a:gd name="adj" fmla="val 18181"/>
+              <a:gd name="adj" fmla="val 14285"/>
             </a:avLst>
           </a:prstGeom>
           <a:solidFill>
@@ -10859,14 +8140,14 @@
       </p:sp>
       <p:sp>
         <p:nvSpPr>
-          <p:cNvPr id="170" name="TextBox 169"/>
+          <p:cNvPr id="110" name="TextBox 109"/>
           <p:cNvSpPr txBox="1"/>
           <p:nvPr/>
         </p:nvSpPr>
         <p:spPr>
           <a:xfrm>
-            <a:off x="9994391" y="5413248"/>
-            <a:ext cx="1810512" cy="201168"/>
+            <a:off x="9281160" y="5870448"/>
+            <a:ext cx="2340864" cy="256032"/>
           </a:xfrm>
           <a:prstGeom prst="rect">
             <a:avLst/>
@@ -10891,7 +8172,7 @@
               </a:spcAft>
             </a:pPr>
             <a:r>
-              <a:rPr sz="590" b="0" i="0">
+              <a:rPr sz="620" b="0" i="0">
                 <a:solidFill>
                   <a:srgbClr val="475569"/>
                 </a:solidFill>
@@ -10905,13 +8186,13 @@
       </p:sp>
       <p:sp>
         <p:nvSpPr>
-          <p:cNvPr id="171" name="TextBox 170"/>
+          <p:cNvPr id="111" name="TextBox 110"/>
           <p:cNvSpPr txBox="1"/>
           <p:nvPr/>
         </p:nvSpPr>
         <p:spPr>
           <a:xfrm>
-            <a:off x="201168" y="5815584"/>
+            <a:off x="201168" y="6327648"/>
             <a:ext cx="11786616" cy="146304"/>
           </a:xfrm>
           <a:prstGeom prst="rect">

--- a/One-Abbott_共享应用平台_技术架构图集.pptx
+++ b/One-Abbott_共享应用平台_技术架构图集.pptx
@@ -14453,7 +14453,7 @@
         <p:spPr>
           <a:xfrm>
             <a:off x="201168" y="566928"/>
-            <a:ext cx="10204704" cy="365760"/>
+            <a:ext cx="10277856" cy="365760"/>
           </a:xfrm>
           <a:prstGeom prst="roundRect">
             <a:avLst>
@@ -14547,7 +14547,7 @@
         <p:spPr>
           <a:xfrm>
             <a:off x="1133856" y="658368"/>
-            <a:ext cx="1129284" cy="182880"/>
+            <a:ext cx="1126540" cy="182880"/>
           </a:xfrm>
           <a:prstGeom prst="roundRect">
             <a:avLst>
@@ -14595,7 +14595,7 @@
         <p:spPr>
           <a:xfrm>
             <a:off x="1161288" y="658368"/>
-            <a:ext cx="1074420" cy="182880"/>
+            <a:ext cx="1071676" cy="182880"/>
           </a:xfrm>
           <a:prstGeom prst="rect">
             <a:avLst/>
@@ -14640,8 +14640,8 @@
         </p:nvSpPr>
         <p:spPr>
           <a:xfrm>
-            <a:off x="2307031" y="658368"/>
-            <a:ext cx="1129284" cy="182880"/>
+            <a:off x="2304288" y="658368"/>
+            <a:ext cx="1126540" cy="182880"/>
           </a:xfrm>
           <a:prstGeom prst="roundRect">
             <a:avLst>
@@ -14688,8 +14688,8 @@
         </p:nvSpPr>
         <p:spPr>
           <a:xfrm>
-            <a:off x="2334463" y="658368"/>
-            <a:ext cx="1074420" cy="182880"/>
+            <a:off x="2331720" y="658368"/>
+            <a:ext cx="1071676" cy="182880"/>
           </a:xfrm>
           <a:prstGeom prst="rect">
             <a:avLst/>
@@ -14734,8 +14734,8 @@
         </p:nvSpPr>
         <p:spPr>
           <a:xfrm>
-            <a:off x="3480206" y="658368"/>
-            <a:ext cx="1129284" cy="182880"/>
+            <a:off x="3474720" y="658368"/>
+            <a:ext cx="1126540" cy="182880"/>
           </a:xfrm>
           <a:prstGeom prst="roundRect">
             <a:avLst>
@@ -14782,8 +14782,8 @@
         </p:nvSpPr>
         <p:spPr>
           <a:xfrm>
-            <a:off x="3507638" y="658368"/>
-            <a:ext cx="1074420" cy="182880"/>
+            <a:off x="3502151" y="658368"/>
+            <a:ext cx="1071676" cy="182880"/>
           </a:xfrm>
           <a:prstGeom prst="rect">
             <a:avLst/>
@@ -14828,8 +14828,8 @@
         </p:nvSpPr>
         <p:spPr>
           <a:xfrm>
-            <a:off x="4653381" y="658368"/>
-            <a:ext cx="1129284" cy="182880"/>
+            <a:off x="4645152" y="658368"/>
+            <a:ext cx="1126540" cy="182880"/>
           </a:xfrm>
           <a:prstGeom prst="roundRect">
             <a:avLst>
@@ -14876,8 +14876,8 @@
         </p:nvSpPr>
         <p:spPr>
           <a:xfrm>
-            <a:off x="4680813" y="658368"/>
-            <a:ext cx="1074420" cy="182880"/>
+            <a:off x="4672584" y="658368"/>
+            <a:ext cx="1071676" cy="182880"/>
           </a:xfrm>
           <a:prstGeom prst="rect">
             <a:avLst/>
@@ -14922,8 +14922,8 @@
         </p:nvSpPr>
         <p:spPr>
           <a:xfrm>
-            <a:off x="5826556" y="658368"/>
-            <a:ext cx="1129284" cy="182880"/>
+            <a:off x="5815584" y="658368"/>
+            <a:ext cx="1126540" cy="182880"/>
           </a:xfrm>
           <a:prstGeom prst="roundRect">
             <a:avLst>
@@ -14970,8 +14970,8 @@
         </p:nvSpPr>
         <p:spPr>
           <a:xfrm>
-            <a:off x="5853988" y="658368"/>
-            <a:ext cx="1074420" cy="182880"/>
+            <a:off x="5843016" y="658368"/>
+            <a:ext cx="1071676" cy="182880"/>
           </a:xfrm>
           <a:prstGeom prst="rect">
             <a:avLst/>
@@ -15016,8 +15016,8 @@
         </p:nvSpPr>
         <p:spPr>
           <a:xfrm>
-            <a:off x="6999731" y="658368"/>
-            <a:ext cx="1129284" cy="182880"/>
+            <a:off x="6986016" y="658368"/>
+            <a:ext cx="1126540" cy="182880"/>
           </a:xfrm>
           <a:prstGeom prst="roundRect">
             <a:avLst>
@@ -15064,8 +15064,8 @@
         </p:nvSpPr>
         <p:spPr>
           <a:xfrm>
-            <a:off x="7027164" y="658368"/>
-            <a:ext cx="1074420" cy="182880"/>
+            <a:off x="7013448" y="658368"/>
+            <a:ext cx="1071676" cy="182880"/>
           </a:xfrm>
           <a:prstGeom prst="rect">
             <a:avLst/>
@@ -15110,8 +15110,8 @@
         </p:nvSpPr>
         <p:spPr>
           <a:xfrm>
-            <a:off x="8172907" y="658368"/>
-            <a:ext cx="1129284" cy="182880"/>
+            <a:off x="8156448" y="658368"/>
+            <a:ext cx="1126540" cy="182880"/>
           </a:xfrm>
           <a:prstGeom prst="roundRect">
             <a:avLst>
@@ -15158,8 +15158,8 @@
         </p:nvSpPr>
         <p:spPr>
           <a:xfrm>
-            <a:off x="8200339" y="658368"/>
-            <a:ext cx="1074420" cy="182880"/>
+            <a:off x="8183879" y="658368"/>
+            <a:ext cx="1071676" cy="182880"/>
           </a:xfrm>
           <a:prstGeom prst="rect">
             <a:avLst/>
@@ -15204,8 +15204,8 @@
         </p:nvSpPr>
         <p:spPr>
           <a:xfrm>
-            <a:off x="9346082" y="658368"/>
-            <a:ext cx="1129284" cy="182880"/>
+            <a:off x="9326880" y="658368"/>
+            <a:ext cx="1126540" cy="182880"/>
           </a:xfrm>
           <a:prstGeom prst="roundRect">
             <a:avLst>
@@ -15252,8 +15252,8 @@
         </p:nvSpPr>
         <p:spPr>
           <a:xfrm>
-            <a:off x="9373514" y="658368"/>
-            <a:ext cx="1074420" cy="182880"/>
+            <a:off x="9354312" y="658368"/>
+            <a:ext cx="1071676" cy="182880"/>
           </a:xfrm>
           <a:prstGeom prst="rect">
             <a:avLst/>
@@ -15393,7 +15393,7 @@
         <p:spPr>
           <a:xfrm>
             <a:off x="201168" y="1261872"/>
-            <a:ext cx="10204704" cy="457200"/>
+            <a:ext cx="10277856" cy="457200"/>
           </a:xfrm>
           <a:prstGeom prst="roundRect">
             <a:avLst>
@@ -15487,7 +15487,7 @@
         <p:spPr>
           <a:xfrm>
             <a:off x="1133856" y="1389888"/>
-            <a:ext cx="1522476" cy="274320"/>
+            <a:ext cx="1554480" cy="274320"/>
           </a:xfrm>
           <a:prstGeom prst="roundRect">
             <a:avLst>
@@ -15535,7 +15535,7 @@
         <p:spPr>
           <a:xfrm>
             <a:off x="1161288" y="1389888"/>
-            <a:ext cx="1467612" cy="274320"/>
+            <a:ext cx="1499616" cy="274320"/>
           </a:xfrm>
           <a:prstGeom prst="rect">
             <a:avLst/>
@@ -15603,8 +15603,8 @@
         </p:nvSpPr>
         <p:spPr>
           <a:xfrm>
-            <a:off x="2702052" y="1389888"/>
-            <a:ext cx="1522476" cy="274320"/>
+            <a:off x="2688336" y="1389888"/>
+            <a:ext cx="1554480" cy="274320"/>
           </a:xfrm>
           <a:prstGeom prst="roundRect">
             <a:avLst>
@@ -15651,8 +15651,8 @@
         </p:nvSpPr>
         <p:spPr>
           <a:xfrm>
-            <a:off x="2729484" y="1389888"/>
-            <a:ext cx="1467612" cy="274320"/>
+            <a:off x="2715768" y="1389888"/>
+            <a:ext cx="1499616" cy="274320"/>
           </a:xfrm>
           <a:prstGeom prst="rect">
             <a:avLst/>
@@ -15720,8 +15720,8 @@
         </p:nvSpPr>
         <p:spPr>
           <a:xfrm>
-            <a:off x="4270248" y="1389888"/>
-            <a:ext cx="1522476" cy="274320"/>
+            <a:off x="4242816" y="1389888"/>
+            <a:ext cx="1554480" cy="274320"/>
           </a:xfrm>
           <a:prstGeom prst="roundRect">
             <a:avLst>
@@ -15768,8 +15768,8 @@
         </p:nvSpPr>
         <p:spPr>
           <a:xfrm>
-            <a:off x="4297680" y="1389888"/>
-            <a:ext cx="1467612" cy="274320"/>
+            <a:off x="4270248" y="1389888"/>
+            <a:ext cx="1499616" cy="274320"/>
           </a:xfrm>
           <a:prstGeom prst="rect">
             <a:avLst/>
@@ -15837,8 +15837,8 @@
         </p:nvSpPr>
         <p:spPr>
           <a:xfrm>
-            <a:off x="5838444" y="1389888"/>
-            <a:ext cx="1522476" cy="274320"/>
+            <a:off x="5797296" y="1389888"/>
+            <a:ext cx="1554480" cy="274320"/>
           </a:xfrm>
           <a:prstGeom prst="roundRect">
             <a:avLst>
@@ -15885,8 +15885,8 @@
         </p:nvSpPr>
         <p:spPr>
           <a:xfrm>
-            <a:off x="5865876" y="1389888"/>
-            <a:ext cx="1467612" cy="274320"/>
+            <a:off x="5824728" y="1389888"/>
+            <a:ext cx="1499616" cy="274320"/>
           </a:xfrm>
           <a:prstGeom prst="rect">
             <a:avLst/>
@@ -15954,8 +15954,8 @@
         </p:nvSpPr>
         <p:spPr>
           <a:xfrm>
-            <a:off x="7406640" y="1389888"/>
-            <a:ext cx="1522476" cy="274320"/>
+            <a:off x="7351775" y="1389888"/>
+            <a:ext cx="1554480" cy="274320"/>
           </a:xfrm>
           <a:prstGeom prst="roundRect">
             <a:avLst>
@@ -16002,8 +16002,8 @@
         </p:nvSpPr>
         <p:spPr>
           <a:xfrm>
-            <a:off x="7434071" y="1389888"/>
-            <a:ext cx="1467612" cy="274320"/>
+            <a:off x="7379207" y="1389888"/>
+            <a:ext cx="1499616" cy="274320"/>
           </a:xfrm>
           <a:prstGeom prst="rect">
             <a:avLst/>
@@ -16071,8 +16071,8 @@
         </p:nvSpPr>
         <p:spPr>
           <a:xfrm>
-            <a:off x="8974836" y="1389888"/>
-            <a:ext cx="1522476" cy="274320"/>
+            <a:off x="8906256" y="1389888"/>
+            <a:ext cx="1554480" cy="274320"/>
           </a:xfrm>
           <a:prstGeom prst="roundRect">
             <a:avLst>
@@ -16119,8 +16119,8 @@
         </p:nvSpPr>
         <p:spPr>
           <a:xfrm>
-            <a:off x="9002268" y="1389888"/>
-            <a:ext cx="1467612" cy="274320"/>
+            <a:off x="8933688" y="1389888"/>
+            <a:ext cx="1499616" cy="274320"/>
           </a:xfrm>
           <a:prstGeom prst="rect">
             <a:avLst/>
@@ -16189,7 +16189,7 @@
         <p:spPr>
           <a:xfrm>
             <a:off x="201168" y="1792224"/>
-            <a:ext cx="10204704" cy="1408176"/>
+            <a:ext cx="10277856" cy="1408176"/>
           </a:xfrm>
           <a:prstGeom prst="roundRect">
             <a:avLst>
@@ -16352,7 +16352,7 @@
         <p:spPr>
           <a:xfrm>
             <a:off x="1133856" y="2011680"/>
-            <a:ext cx="1129284" cy="877824"/>
+            <a:ext cx="1126540" cy="877824"/>
           </a:xfrm>
           <a:prstGeom prst="roundRect">
             <a:avLst>
@@ -16635,8 +16635,8 @@
         </p:nvSpPr>
         <p:spPr>
           <a:xfrm>
-            <a:off x="2307031" y="2011680"/>
-            <a:ext cx="1129284" cy="877824"/>
+            <a:off x="2304288" y="2011680"/>
+            <a:ext cx="1126540" cy="877824"/>
           </a:xfrm>
           <a:prstGeom prst="roundRect">
             <a:avLst>
@@ -16689,7 +16689,7 @@
         </p:nvSpPr>
         <p:spPr>
           <a:xfrm>
-            <a:off x="2343607" y="2043684"/>
+            <a:off x="2340864" y="2043684"/>
             <a:ext cx="1056132" cy="109728"/>
           </a:xfrm>
           <a:prstGeom prst="rect">
@@ -16735,7 +16735,7 @@
         </p:nvSpPr>
         <p:spPr>
           <a:xfrm>
-            <a:off x="2343607" y="2171700"/>
+            <a:off x="2340864" y="2171700"/>
             <a:ext cx="1056132" cy="128016"/>
           </a:xfrm>
           <a:prstGeom prst="rect">
@@ -16781,7 +16781,7 @@
         </p:nvSpPr>
         <p:spPr>
           <a:xfrm>
-            <a:off x="2361895" y="2331720"/>
+            <a:off x="2359152" y="2331720"/>
             <a:ext cx="1019556" cy="128016"/>
           </a:xfrm>
           <a:prstGeom prst="rect">
@@ -16827,7 +16827,7 @@
         </p:nvSpPr>
         <p:spPr>
           <a:xfrm>
-            <a:off x="2361895" y="2473451"/>
+            <a:off x="2359152" y="2473451"/>
             <a:ext cx="1019556" cy="128016"/>
           </a:xfrm>
           <a:prstGeom prst="rect">
@@ -16873,7 +16873,7 @@
         </p:nvSpPr>
         <p:spPr>
           <a:xfrm>
-            <a:off x="2361895" y="2615184"/>
+            <a:off x="2359152" y="2615184"/>
             <a:ext cx="1019556" cy="128016"/>
           </a:xfrm>
           <a:prstGeom prst="rect">
@@ -16919,8 +16919,8 @@
         </p:nvSpPr>
         <p:spPr>
           <a:xfrm>
-            <a:off x="3480206" y="2011680"/>
-            <a:ext cx="1129284" cy="877824"/>
+            <a:off x="3474720" y="2011680"/>
+            <a:ext cx="1126540" cy="877824"/>
           </a:xfrm>
           <a:prstGeom prst="roundRect">
             <a:avLst>
@@ -16973,7 +16973,7 @@
         </p:nvSpPr>
         <p:spPr>
           <a:xfrm>
-            <a:off x="3516782" y="2043684"/>
+            <a:off x="3511296" y="2043684"/>
             <a:ext cx="1056132" cy="109728"/>
           </a:xfrm>
           <a:prstGeom prst="rect">
@@ -17019,7 +17019,7 @@
         </p:nvSpPr>
         <p:spPr>
           <a:xfrm>
-            <a:off x="3516782" y="2171700"/>
+            <a:off x="3511296" y="2171700"/>
             <a:ext cx="1056132" cy="128016"/>
           </a:xfrm>
           <a:prstGeom prst="rect">
@@ -17065,7 +17065,7 @@
         </p:nvSpPr>
         <p:spPr>
           <a:xfrm>
-            <a:off x="3535070" y="2331720"/>
+            <a:off x="3529584" y="2331720"/>
             <a:ext cx="1019556" cy="128016"/>
           </a:xfrm>
           <a:prstGeom prst="rect">
@@ -17111,7 +17111,7 @@
         </p:nvSpPr>
         <p:spPr>
           <a:xfrm>
-            <a:off x="3535070" y="2473451"/>
+            <a:off x="3529584" y="2473451"/>
             <a:ext cx="1019556" cy="128016"/>
           </a:xfrm>
           <a:prstGeom prst="rect">
@@ -17157,7 +17157,7 @@
         </p:nvSpPr>
         <p:spPr>
           <a:xfrm>
-            <a:off x="3535070" y="2615184"/>
+            <a:off x="3529584" y="2615184"/>
             <a:ext cx="1019556" cy="128016"/>
           </a:xfrm>
           <a:prstGeom prst="rect">
@@ -17203,8 +17203,8 @@
         </p:nvSpPr>
         <p:spPr>
           <a:xfrm>
-            <a:off x="4653381" y="2011680"/>
-            <a:ext cx="1129284" cy="877824"/>
+            <a:off x="4645152" y="2011680"/>
+            <a:ext cx="1126540" cy="877824"/>
           </a:xfrm>
           <a:prstGeom prst="roundRect">
             <a:avLst>
@@ -17257,7 +17257,7 @@
         </p:nvSpPr>
         <p:spPr>
           <a:xfrm>
-            <a:off x="4689957" y="2043684"/>
+            <a:off x="4681728" y="2043684"/>
             <a:ext cx="1056132" cy="109728"/>
           </a:xfrm>
           <a:prstGeom prst="rect">
@@ -17303,7 +17303,7 @@
         </p:nvSpPr>
         <p:spPr>
           <a:xfrm>
-            <a:off x="4689957" y="2171700"/>
+            <a:off x="4681728" y="2171700"/>
             <a:ext cx="1056132" cy="128016"/>
           </a:xfrm>
           <a:prstGeom prst="rect">
@@ -17349,7 +17349,7 @@
         </p:nvSpPr>
         <p:spPr>
           <a:xfrm>
-            <a:off x="4708245" y="2331720"/>
+            <a:off x="4700016" y="2331720"/>
             <a:ext cx="1019556" cy="128016"/>
           </a:xfrm>
           <a:prstGeom prst="rect">
@@ -17395,7 +17395,7 @@
         </p:nvSpPr>
         <p:spPr>
           <a:xfrm>
-            <a:off x="4708245" y="2473451"/>
+            <a:off x="4700016" y="2473451"/>
             <a:ext cx="1019556" cy="128016"/>
           </a:xfrm>
           <a:prstGeom prst="rect">
@@ -17441,7 +17441,7 @@
         </p:nvSpPr>
         <p:spPr>
           <a:xfrm>
-            <a:off x="4708245" y="2615184"/>
+            <a:off x="4700016" y="2615184"/>
             <a:ext cx="1019556" cy="128016"/>
           </a:xfrm>
           <a:prstGeom prst="rect">
@@ -17487,8 +17487,8 @@
         </p:nvSpPr>
         <p:spPr>
           <a:xfrm>
-            <a:off x="5826556" y="2011680"/>
-            <a:ext cx="1129284" cy="877824"/>
+            <a:off x="5815584" y="2011680"/>
+            <a:ext cx="1126540" cy="877824"/>
           </a:xfrm>
           <a:prstGeom prst="roundRect">
             <a:avLst>
@@ -17541,7 +17541,7 @@
         </p:nvSpPr>
         <p:spPr>
           <a:xfrm>
-            <a:off x="5863132" y="2043684"/>
+            <a:off x="5852160" y="2043684"/>
             <a:ext cx="1056132" cy="109728"/>
           </a:xfrm>
           <a:prstGeom prst="rect">
@@ -17587,7 +17587,7 @@
         </p:nvSpPr>
         <p:spPr>
           <a:xfrm>
-            <a:off x="5863132" y="2171700"/>
+            <a:off x="5852160" y="2171700"/>
             <a:ext cx="1056132" cy="128016"/>
           </a:xfrm>
           <a:prstGeom prst="rect">
@@ -17633,7 +17633,7 @@
         </p:nvSpPr>
         <p:spPr>
           <a:xfrm>
-            <a:off x="5881420" y="2331720"/>
+            <a:off x="5870448" y="2331720"/>
             <a:ext cx="1019556" cy="128016"/>
           </a:xfrm>
           <a:prstGeom prst="rect">
@@ -17679,7 +17679,7 @@
         </p:nvSpPr>
         <p:spPr>
           <a:xfrm>
-            <a:off x="5881420" y="2473451"/>
+            <a:off x="5870448" y="2473451"/>
             <a:ext cx="1019556" cy="128016"/>
           </a:xfrm>
           <a:prstGeom prst="rect">
@@ -17725,7 +17725,7 @@
         </p:nvSpPr>
         <p:spPr>
           <a:xfrm>
-            <a:off x="5881420" y="2615184"/>
+            <a:off x="5870448" y="2615184"/>
             <a:ext cx="1019556" cy="128016"/>
           </a:xfrm>
           <a:prstGeom prst="rect">
@@ -17771,8 +17771,8 @@
         </p:nvSpPr>
         <p:spPr>
           <a:xfrm>
-            <a:off x="6999731" y="2011680"/>
-            <a:ext cx="1129284" cy="877824"/>
+            <a:off x="6986016" y="2011680"/>
+            <a:ext cx="1126540" cy="877824"/>
           </a:xfrm>
           <a:prstGeom prst="roundRect">
             <a:avLst>
@@ -17825,7 +17825,7 @@
         </p:nvSpPr>
         <p:spPr>
           <a:xfrm>
-            <a:off x="7036307" y="2043684"/>
+            <a:off x="7022592" y="2043684"/>
             <a:ext cx="1056132" cy="109728"/>
           </a:xfrm>
           <a:prstGeom prst="rect">
@@ -17871,7 +17871,7 @@
         </p:nvSpPr>
         <p:spPr>
           <a:xfrm>
-            <a:off x="7036307" y="2171700"/>
+            <a:off x="7022592" y="2171700"/>
             <a:ext cx="1056132" cy="128016"/>
           </a:xfrm>
           <a:prstGeom prst="rect">
@@ -17917,7 +17917,7 @@
         </p:nvSpPr>
         <p:spPr>
           <a:xfrm>
-            <a:off x="7054595" y="2331720"/>
+            <a:off x="7040880" y="2331720"/>
             <a:ext cx="1019556" cy="128016"/>
           </a:xfrm>
           <a:prstGeom prst="rect">
@@ -17963,7 +17963,7 @@
         </p:nvSpPr>
         <p:spPr>
           <a:xfrm>
-            <a:off x="7054595" y="2473451"/>
+            <a:off x="7040880" y="2473451"/>
             <a:ext cx="1019556" cy="128016"/>
           </a:xfrm>
           <a:prstGeom prst="rect">
@@ -18009,7 +18009,7 @@
         </p:nvSpPr>
         <p:spPr>
           <a:xfrm>
-            <a:off x="7054595" y="2615184"/>
+            <a:off x="7040880" y="2615184"/>
             <a:ext cx="1019556" cy="128016"/>
           </a:xfrm>
           <a:prstGeom prst="rect">
@@ -18055,8 +18055,8 @@
         </p:nvSpPr>
         <p:spPr>
           <a:xfrm>
-            <a:off x="8172907" y="2011680"/>
-            <a:ext cx="1129284" cy="877824"/>
+            <a:off x="8156448" y="2011680"/>
+            <a:ext cx="1126540" cy="877824"/>
           </a:xfrm>
           <a:prstGeom prst="roundRect">
             <a:avLst>
@@ -18109,7 +18109,7 @@
         </p:nvSpPr>
         <p:spPr>
           <a:xfrm>
-            <a:off x="8209483" y="2043684"/>
+            <a:off x="8193023" y="2043684"/>
             <a:ext cx="1056132" cy="109728"/>
           </a:xfrm>
           <a:prstGeom prst="rect">
@@ -18155,7 +18155,7 @@
         </p:nvSpPr>
         <p:spPr>
           <a:xfrm>
-            <a:off x="8209483" y="2171700"/>
+            <a:off x="8193023" y="2171700"/>
             <a:ext cx="1056132" cy="128016"/>
           </a:xfrm>
           <a:prstGeom prst="rect">
@@ -18201,7 +18201,7 @@
         </p:nvSpPr>
         <p:spPr>
           <a:xfrm>
-            <a:off x="8227771" y="2331720"/>
+            <a:off x="8211312" y="2331720"/>
             <a:ext cx="1019556" cy="128016"/>
           </a:xfrm>
           <a:prstGeom prst="rect">
@@ -18247,7 +18247,7 @@
         </p:nvSpPr>
         <p:spPr>
           <a:xfrm>
-            <a:off x="8227771" y="2473451"/>
+            <a:off x="8211312" y="2473451"/>
             <a:ext cx="1019556" cy="128016"/>
           </a:xfrm>
           <a:prstGeom prst="rect">
@@ -18293,7 +18293,7 @@
         </p:nvSpPr>
         <p:spPr>
           <a:xfrm>
-            <a:off x="8227771" y="2615184"/>
+            <a:off x="8211312" y="2615184"/>
             <a:ext cx="1019556" cy="128016"/>
           </a:xfrm>
           <a:prstGeom prst="rect">
@@ -18339,8 +18339,8 @@
         </p:nvSpPr>
         <p:spPr>
           <a:xfrm>
-            <a:off x="9346082" y="2011680"/>
-            <a:ext cx="1129284" cy="877824"/>
+            <a:off x="9326880" y="2011680"/>
+            <a:ext cx="1126540" cy="877824"/>
           </a:xfrm>
           <a:prstGeom prst="roundRect">
             <a:avLst>
@@ -18393,7 +18393,7 @@
         </p:nvSpPr>
         <p:spPr>
           <a:xfrm>
-            <a:off x="9382658" y="2043684"/>
+            <a:off x="9363456" y="2043684"/>
             <a:ext cx="1056132" cy="109728"/>
           </a:xfrm>
           <a:prstGeom prst="rect">
@@ -18439,7 +18439,7 @@
         </p:nvSpPr>
         <p:spPr>
           <a:xfrm>
-            <a:off x="9382658" y="2171700"/>
+            <a:off x="9363456" y="2171700"/>
             <a:ext cx="1056132" cy="128016"/>
           </a:xfrm>
           <a:prstGeom prst="rect">
@@ -18485,7 +18485,7 @@
         </p:nvSpPr>
         <p:spPr>
           <a:xfrm>
-            <a:off x="9400946" y="2331720"/>
+            <a:off x="9381744" y="2331720"/>
             <a:ext cx="1019556" cy="128016"/>
           </a:xfrm>
           <a:prstGeom prst="rect">
@@ -18531,7 +18531,7 @@
         </p:nvSpPr>
         <p:spPr>
           <a:xfrm>
-            <a:off x="9400946" y="2473451"/>
+            <a:off x="9381744" y="2473451"/>
             <a:ext cx="1019556" cy="128016"/>
           </a:xfrm>
           <a:prstGeom prst="rect">
@@ -18577,7 +18577,7 @@
         </p:nvSpPr>
         <p:spPr>
           <a:xfrm>
-            <a:off x="9400946" y="2615184"/>
+            <a:off x="9381744" y="2615184"/>
             <a:ext cx="1019556" cy="128016"/>
           </a:xfrm>
           <a:prstGeom prst="rect">
@@ -18812,7 +18812,7 @@
         <p:spPr>
           <a:xfrm>
             <a:off x="201168" y="3273552"/>
-            <a:ext cx="10204704" cy="1225296"/>
+            <a:ext cx="10277856" cy="1225296"/>
           </a:xfrm>
           <a:prstGeom prst="roundRect">
             <a:avLst>
@@ -19258,7 +19258,7 @@
         </p:nvSpPr>
         <p:spPr>
           <a:xfrm>
-            <a:off x="2475280" y="3346704"/>
+            <a:off x="2471623" y="3346704"/>
             <a:ext cx="1298448" cy="1078992"/>
           </a:xfrm>
           <a:prstGeom prst="roundRect">
@@ -19312,7 +19312,7 @@
         </p:nvSpPr>
         <p:spPr>
           <a:xfrm>
-            <a:off x="2502712" y="3383280"/>
+            <a:off x="2499055" y="3383280"/>
             <a:ext cx="1243584" cy="118872"/>
           </a:xfrm>
           <a:prstGeom prst="rect">
@@ -19358,7 +19358,7 @@
         </p:nvSpPr>
         <p:spPr>
           <a:xfrm>
-            <a:off x="2502712" y="3520440"/>
+            <a:off x="2499055" y="3520440"/>
             <a:ext cx="1243584" cy="100584"/>
           </a:xfrm>
           <a:prstGeom prst="rect">
@@ -19404,7 +19404,7 @@
         </p:nvSpPr>
         <p:spPr>
           <a:xfrm>
-            <a:off x="2521000" y="3675887"/>
+            <a:off x="2517343" y="3675887"/>
             <a:ext cx="1207008" cy="128016"/>
           </a:xfrm>
           <a:prstGeom prst="rect">
@@ -19450,7 +19450,7 @@
         </p:nvSpPr>
         <p:spPr>
           <a:xfrm>
-            <a:off x="2521000" y="3826763"/>
+            <a:off x="2517343" y="3826763"/>
             <a:ext cx="1207008" cy="128016"/>
           </a:xfrm>
           <a:prstGeom prst="rect">
@@ -19496,7 +19496,7 @@
         </p:nvSpPr>
         <p:spPr>
           <a:xfrm>
-            <a:off x="2521000" y="3977639"/>
+            <a:off x="2517343" y="3977639"/>
             <a:ext cx="1207008" cy="128016"/>
           </a:xfrm>
           <a:prstGeom prst="rect">
@@ -19542,7 +19542,7 @@
         </p:nvSpPr>
         <p:spPr>
           <a:xfrm>
-            <a:off x="2521000" y="4128515"/>
+            <a:off x="2517343" y="4128515"/>
             <a:ext cx="1207008" cy="128016"/>
           </a:xfrm>
           <a:prstGeom prst="rect">
@@ -19588,7 +19588,7 @@
         </p:nvSpPr>
         <p:spPr>
           <a:xfrm>
-            <a:off x="3816705" y="3346704"/>
+            <a:off x="3809390" y="3346704"/>
             <a:ext cx="1298448" cy="1078992"/>
           </a:xfrm>
           <a:prstGeom prst="roundRect">
@@ -19642,7 +19642,7 @@
         </p:nvSpPr>
         <p:spPr>
           <a:xfrm>
-            <a:off x="3844137" y="3383280"/>
+            <a:off x="3836822" y="3383280"/>
             <a:ext cx="1243584" cy="118872"/>
           </a:xfrm>
           <a:prstGeom prst="rect">
@@ -19688,7 +19688,7 @@
         </p:nvSpPr>
         <p:spPr>
           <a:xfrm>
-            <a:off x="3844137" y="3520440"/>
+            <a:off x="3836822" y="3520440"/>
             <a:ext cx="1243584" cy="100584"/>
           </a:xfrm>
           <a:prstGeom prst="rect">
@@ -19734,7 +19734,7 @@
         </p:nvSpPr>
         <p:spPr>
           <a:xfrm>
-            <a:off x="3862425" y="3675887"/>
+            <a:off x="3855110" y="3675887"/>
             <a:ext cx="1207008" cy="128016"/>
           </a:xfrm>
           <a:prstGeom prst="rect">
@@ -19780,7 +19780,7 @@
         </p:nvSpPr>
         <p:spPr>
           <a:xfrm>
-            <a:off x="3862425" y="3826763"/>
+            <a:off x="3855110" y="3826763"/>
             <a:ext cx="1207008" cy="128016"/>
           </a:xfrm>
           <a:prstGeom prst="rect">
@@ -19826,7 +19826,7 @@
         </p:nvSpPr>
         <p:spPr>
           <a:xfrm>
-            <a:off x="3862425" y="3977639"/>
+            <a:off x="3855110" y="3977639"/>
             <a:ext cx="1207008" cy="128016"/>
           </a:xfrm>
           <a:prstGeom prst="rect">
@@ -19872,7 +19872,7 @@
         </p:nvSpPr>
         <p:spPr>
           <a:xfrm>
-            <a:off x="3862425" y="4128515"/>
+            <a:off x="3855110" y="4128515"/>
             <a:ext cx="1207008" cy="128016"/>
           </a:xfrm>
           <a:prstGeom prst="rect">
@@ -19918,7 +19918,7 @@
         </p:nvSpPr>
         <p:spPr>
           <a:xfrm>
-            <a:off x="5158130" y="3346704"/>
+            <a:off x="5147157" y="3346704"/>
             <a:ext cx="1298448" cy="1078992"/>
           </a:xfrm>
           <a:prstGeom prst="roundRect">
@@ -19972,7 +19972,7 @@
         </p:nvSpPr>
         <p:spPr>
           <a:xfrm>
-            <a:off x="5185562" y="3383280"/>
+            <a:off x="5174589" y="3383280"/>
             <a:ext cx="1243584" cy="118872"/>
           </a:xfrm>
           <a:prstGeom prst="rect">
@@ -20018,7 +20018,7 @@
         </p:nvSpPr>
         <p:spPr>
           <a:xfrm>
-            <a:off x="5185562" y="3520440"/>
+            <a:off x="5174589" y="3520440"/>
             <a:ext cx="1243584" cy="100584"/>
           </a:xfrm>
           <a:prstGeom prst="rect">
@@ -20064,7 +20064,7 @@
         </p:nvSpPr>
         <p:spPr>
           <a:xfrm>
-            <a:off x="5203850" y="3675887"/>
+            <a:off x="5192877" y="3675887"/>
             <a:ext cx="1207008" cy="128016"/>
           </a:xfrm>
           <a:prstGeom prst="rect">
@@ -20110,7 +20110,7 @@
         </p:nvSpPr>
         <p:spPr>
           <a:xfrm>
-            <a:off x="5203850" y="3826763"/>
+            <a:off x="5192877" y="3826763"/>
             <a:ext cx="1207008" cy="128016"/>
           </a:xfrm>
           <a:prstGeom prst="rect">
@@ -20156,7 +20156,7 @@
         </p:nvSpPr>
         <p:spPr>
           <a:xfrm>
-            <a:off x="5203850" y="3977639"/>
+            <a:off x="5192877" y="3977639"/>
             <a:ext cx="1207008" cy="128016"/>
           </a:xfrm>
           <a:prstGeom prst="rect">
@@ -20202,7 +20202,7 @@
         </p:nvSpPr>
         <p:spPr>
           <a:xfrm>
-            <a:off x="5203850" y="4128515"/>
+            <a:off x="5192877" y="4128515"/>
             <a:ext cx="1207008" cy="128016"/>
           </a:xfrm>
           <a:prstGeom prst="rect">
@@ -20248,7 +20248,7 @@
         </p:nvSpPr>
         <p:spPr>
           <a:xfrm>
-            <a:off x="6499555" y="3346704"/>
+            <a:off x="6484924" y="3346704"/>
             <a:ext cx="1298448" cy="1078992"/>
           </a:xfrm>
           <a:prstGeom prst="roundRect">
@@ -20302,7 +20302,7 @@
         </p:nvSpPr>
         <p:spPr>
           <a:xfrm>
-            <a:off x="6526987" y="3383280"/>
+            <a:off x="6512356" y="3383280"/>
             <a:ext cx="1243584" cy="118872"/>
           </a:xfrm>
           <a:prstGeom prst="rect">
@@ -20348,7 +20348,7 @@
         </p:nvSpPr>
         <p:spPr>
           <a:xfrm>
-            <a:off x="6526987" y="3520440"/>
+            <a:off x="6512356" y="3520440"/>
             <a:ext cx="1243584" cy="100584"/>
           </a:xfrm>
           <a:prstGeom prst="rect">
@@ -20394,7 +20394,7 @@
         </p:nvSpPr>
         <p:spPr>
           <a:xfrm>
-            <a:off x="6545275" y="3675887"/>
+            <a:off x="6530644" y="3675887"/>
             <a:ext cx="1207008" cy="128016"/>
           </a:xfrm>
           <a:prstGeom prst="rect">
@@ -20440,7 +20440,7 @@
         </p:nvSpPr>
         <p:spPr>
           <a:xfrm>
-            <a:off x="6545275" y="3826763"/>
+            <a:off x="6530644" y="3826763"/>
             <a:ext cx="1207008" cy="128016"/>
           </a:xfrm>
           <a:prstGeom prst="rect">
@@ -20486,7 +20486,7 @@
         </p:nvSpPr>
         <p:spPr>
           <a:xfrm>
-            <a:off x="6545275" y="3977639"/>
+            <a:off x="6530644" y="3977639"/>
             <a:ext cx="1207008" cy="128016"/>
           </a:xfrm>
           <a:prstGeom prst="rect">
@@ -20532,7 +20532,7 @@
         </p:nvSpPr>
         <p:spPr>
           <a:xfrm>
-            <a:off x="6545275" y="4128515"/>
+            <a:off x="6530644" y="4128515"/>
             <a:ext cx="1207008" cy="128016"/>
           </a:xfrm>
           <a:prstGeom prst="rect">
@@ -20578,7 +20578,7 @@
         </p:nvSpPr>
         <p:spPr>
           <a:xfrm>
-            <a:off x="7840980" y="3346704"/>
+            <a:off x="7822692" y="3346704"/>
             <a:ext cx="1298448" cy="1078992"/>
           </a:xfrm>
           <a:prstGeom prst="roundRect">
@@ -20632,7 +20632,7 @@
         </p:nvSpPr>
         <p:spPr>
           <a:xfrm>
-            <a:off x="7868412" y="3383280"/>
+            <a:off x="7850123" y="3383280"/>
             <a:ext cx="1243584" cy="118872"/>
           </a:xfrm>
           <a:prstGeom prst="rect">
@@ -20678,7 +20678,7 @@
         </p:nvSpPr>
         <p:spPr>
           <a:xfrm>
-            <a:off x="7868412" y="3520440"/>
+            <a:off x="7850123" y="3520440"/>
             <a:ext cx="1243584" cy="100584"/>
           </a:xfrm>
           <a:prstGeom prst="rect">
@@ -20724,7 +20724,7 @@
         </p:nvSpPr>
         <p:spPr>
           <a:xfrm>
-            <a:off x="7886700" y="3675887"/>
+            <a:off x="7868412" y="3675887"/>
             <a:ext cx="1207008" cy="128016"/>
           </a:xfrm>
           <a:prstGeom prst="rect">
@@ -20770,7 +20770,7 @@
         </p:nvSpPr>
         <p:spPr>
           <a:xfrm>
-            <a:off x="7886700" y="3826763"/>
+            <a:off x="7868412" y="3826763"/>
             <a:ext cx="1207008" cy="128016"/>
           </a:xfrm>
           <a:prstGeom prst="rect">
@@ -20816,7 +20816,7 @@
         </p:nvSpPr>
         <p:spPr>
           <a:xfrm>
-            <a:off x="7886700" y="3977639"/>
+            <a:off x="7868412" y="3977639"/>
             <a:ext cx="1207008" cy="128016"/>
           </a:xfrm>
           <a:prstGeom prst="rect">
@@ -20862,7 +20862,7 @@
         </p:nvSpPr>
         <p:spPr>
           <a:xfrm>
-            <a:off x="7886700" y="4128515"/>
+            <a:off x="7868412" y="4128515"/>
             <a:ext cx="1207008" cy="128016"/>
           </a:xfrm>
           <a:prstGeom prst="rect">
@@ -20908,7 +20908,7 @@
         </p:nvSpPr>
         <p:spPr>
           <a:xfrm>
-            <a:off x="9182404" y="3346704"/>
+            <a:off x="9160459" y="3346704"/>
             <a:ext cx="1298448" cy="1078992"/>
           </a:xfrm>
           <a:prstGeom prst="roundRect">
@@ -20962,7 +20962,7 @@
         </p:nvSpPr>
         <p:spPr>
           <a:xfrm>
-            <a:off x="9209836" y="3383280"/>
+            <a:off x="9187891" y="3383280"/>
             <a:ext cx="1243584" cy="118872"/>
           </a:xfrm>
           <a:prstGeom prst="rect">
@@ -21008,7 +21008,7 @@
         </p:nvSpPr>
         <p:spPr>
           <a:xfrm>
-            <a:off x="9209836" y="3520440"/>
+            <a:off x="9187891" y="3520440"/>
             <a:ext cx="1243584" cy="100584"/>
           </a:xfrm>
           <a:prstGeom prst="rect">
@@ -21054,7 +21054,7 @@
         </p:nvSpPr>
         <p:spPr>
           <a:xfrm>
-            <a:off x="9228124" y="3675887"/>
+            <a:off x="9206179" y="3675887"/>
             <a:ext cx="1207008" cy="128016"/>
           </a:xfrm>
           <a:prstGeom prst="rect">
@@ -21100,7 +21100,7 @@
         </p:nvSpPr>
         <p:spPr>
           <a:xfrm>
-            <a:off x="9228124" y="3826763"/>
+            <a:off x="9206179" y="3826763"/>
             <a:ext cx="1207008" cy="128016"/>
           </a:xfrm>
           <a:prstGeom prst="rect">
@@ -21146,7 +21146,7 @@
         </p:nvSpPr>
         <p:spPr>
           <a:xfrm>
-            <a:off x="9228124" y="3977639"/>
+            <a:off x="9206179" y="3977639"/>
             <a:ext cx="1207008" cy="128016"/>
           </a:xfrm>
           <a:prstGeom prst="rect">
@@ -21192,7 +21192,7 @@
         </p:nvSpPr>
         <p:spPr>
           <a:xfrm>
-            <a:off x="9228124" y="4128515"/>
+            <a:off x="9206179" y="4128515"/>
             <a:ext cx="1207008" cy="128016"/>
           </a:xfrm>
           <a:prstGeom prst="rect">
@@ -21239,7 +21239,7 @@
         <p:spPr>
           <a:xfrm>
             <a:off x="201168" y="4553712"/>
-            <a:ext cx="10204704" cy="420624"/>
+            <a:ext cx="10277856" cy="420624"/>
           </a:xfrm>
           <a:prstGeom prst="roundRect">
             <a:avLst>
@@ -21472,7 +21472,7 @@
         </p:nvSpPr>
         <p:spPr>
           <a:xfrm>
-            <a:off x="2475280" y="4645152"/>
+            <a:off x="2471623" y="4645152"/>
             <a:ext cx="1298448" cy="256032"/>
           </a:xfrm>
           <a:prstGeom prst="roundRect">
@@ -21520,7 +21520,7 @@
         </p:nvSpPr>
         <p:spPr>
           <a:xfrm>
-            <a:off x="2502712" y="4645152"/>
+            <a:off x="2499055" y="4645152"/>
             <a:ext cx="1243584" cy="256032"/>
           </a:xfrm>
           <a:prstGeom prst="rect">
@@ -21589,7 +21589,7 @@
         </p:nvSpPr>
         <p:spPr>
           <a:xfrm>
-            <a:off x="3816705" y="4645152"/>
+            <a:off x="3809390" y="4645152"/>
             <a:ext cx="1298448" cy="256032"/>
           </a:xfrm>
           <a:prstGeom prst="roundRect">
@@ -21637,7 +21637,7 @@
         </p:nvSpPr>
         <p:spPr>
           <a:xfrm>
-            <a:off x="3844137" y="4645152"/>
+            <a:off x="3836822" y="4645152"/>
             <a:ext cx="1243584" cy="256032"/>
           </a:xfrm>
           <a:prstGeom prst="rect">
@@ -21706,7 +21706,7 @@
         </p:nvSpPr>
         <p:spPr>
           <a:xfrm>
-            <a:off x="5158130" y="4645152"/>
+            <a:off x="5147157" y="4645152"/>
             <a:ext cx="1298448" cy="256032"/>
           </a:xfrm>
           <a:prstGeom prst="roundRect">
@@ -21754,7 +21754,7 @@
         </p:nvSpPr>
         <p:spPr>
           <a:xfrm>
-            <a:off x="5185562" y="4645152"/>
+            <a:off x="5174589" y="4645152"/>
             <a:ext cx="1243584" cy="256032"/>
           </a:xfrm>
           <a:prstGeom prst="rect">
@@ -21823,7 +21823,7 @@
         </p:nvSpPr>
         <p:spPr>
           <a:xfrm>
-            <a:off x="6499555" y="4645152"/>
+            <a:off x="6484924" y="4645152"/>
             <a:ext cx="1298448" cy="256032"/>
           </a:xfrm>
           <a:prstGeom prst="roundRect">
@@ -21871,7 +21871,7 @@
         </p:nvSpPr>
         <p:spPr>
           <a:xfrm>
-            <a:off x="6526987" y="4645152"/>
+            <a:off x="6512356" y="4645152"/>
             <a:ext cx="1243584" cy="256032"/>
           </a:xfrm>
           <a:prstGeom prst="rect">
@@ -21940,7 +21940,7 @@
         </p:nvSpPr>
         <p:spPr>
           <a:xfrm>
-            <a:off x="7840980" y="4645152"/>
+            <a:off x="7822692" y="4645152"/>
             <a:ext cx="1298448" cy="256032"/>
           </a:xfrm>
           <a:prstGeom prst="roundRect">
@@ -21988,7 +21988,7 @@
         </p:nvSpPr>
         <p:spPr>
           <a:xfrm>
-            <a:off x="7868412" y="4645152"/>
+            <a:off x="7850123" y="4645152"/>
             <a:ext cx="1243584" cy="256032"/>
           </a:xfrm>
           <a:prstGeom prst="rect">
@@ -22057,7 +22057,7 @@
         </p:nvSpPr>
         <p:spPr>
           <a:xfrm>
-            <a:off x="9182404" y="4645152"/>
+            <a:off x="9160459" y="4645152"/>
             <a:ext cx="1298448" cy="256032"/>
           </a:xfrm>
           <a:prstGeom prst="roundRect">
@@ -22105,7 +22105,7 @@
         </p:nvSpPr>
         <p:spPr>
           <a:xfrm>
-            <a:off x="9209836" y="4645152"/>
+            <a:off x="9187891" y="4645152"/>
             <a:ext cx="1243584" cy="256032"/>
           </a:xfrm>
           <a:prstGeom prst="rect">
@@ -22175,7 +22175,7 @@
         <p:spPr>
           <a:xfrm>
             <a:off x="201168" y="5029200"/>
-            <a:ext cx="10204704" cy="731520"/>
+            <a:ext cx="10277856" cy="731520"/>
           </a:xfrm>
           <a:prstGeom prst="roundRect">
             <a:avLst>
@@ -23744,7 +23744,7 @@
         <p:spPr>
           <a:xfrm>
             <a:off x="201168" y="5815584"/>
-            <a:ext cx="10204704" cy="420624"/>
+            <a:ext cx="10277856" cy="420624"/>
           </a:xfrm>
           <a:prstGeom prst="roundRect">
             <a:avLst>
@@ -23861,7 +23861,7 @@
         <p:spPr>
           <a:xfrm>
             <a:off x="1133856" y="5907024"/>
-            <a:ext cx="1522476" cy="256032"/>
+            <a:ext cx="1554480" cy="256032"/>
           </a:xfrm>
           <a:prstGeom prst="roundRect">
             <a:avLst>
@@ -23909,7 +23909,7 @@
         <p:spPr>
           <a:xfrm>
             <a:off x="1161288" y="5907024"/>
-            <a:ext cx="1467612" cy="256032"/>
+            <a:ext cx="1499616" cy="256032"/>
           </a:xfrm>
           <a:prstGeom prst="rect">
             <a:avLst/>
@@ -23977,8 +23977,8 @@
         </p:nvSpPr>
         <p:spPr>
           <a:xfrm>
-            <a:off x="2702052" y="5907024"/>
-            <a:ext cx="1522476" cy="256032"/>
+            <a:off x="2688336" y="5907024"/>
+            <a:ext cx="1554480" cy="256032"/>
           </a:xfrm>
           <a:prstGeom prst="roundRect">
             <a:avLst>
@@ -24025,8 +24025,8 @@
         </p:nvSpPr>
         <p:spPr>
           <a:xfrm>
-            <a:off x="2729484" y="5907024"/>
-            <a:ext cx="1467612" cy="256032"/>
+            <a:off x="2715768" y="5907024"/>
+            <a:ext cx="1499616" cy="256032"/>
           </a:xfrm>
           <a:prstGeom prst="rect">
             <a:avLst/>
@@ -24094,8 +24094,8 @@
         </p:nvSpPr>
         <p:spPr>
           <a:xfrm>
-            <a:off x="4270248" y="5907024"/>
-            <a:ext cx="1522476" cy="256032"/>
+            <a:off x="4242816" y="5907024"/>
+            <a:ext cx="1554480" cy="256032"/>
           </a:xfrm>
           <a:prstGeom prst="roundRect">
             <a:avLst>
@@ -24142,8 +24142,8 @@
         </p:nvSpPr>
         <p:spPr>
           <a:xfrm>
-            <a:off x="4297680" y="5907024"/>
-            <a:ext cx="1467612" cy="256032"/>
+            <a:off x="4270248" y="5907024"/>
+            <a:ext cx="1499616" cy="256032"/>
           </a:xfrm>
           <a:prstGeom prst="rect">
             <a:avLst/>
@@ -24211,8 +24211,8 @@
         </p:nvSpPr>
         <p:spPr>
           <a:xfrm>
-            <a:off x="5838444" y="5907024"/>
-            <a:ext cx="1522476" cy="256032"/>
+            <a:off x="5797296" y="5907024"/>
+            <a:ext cx="1554480" cy="256032"/>
           </a:xfrm>
           <a:prstGeom prst="roundRect">
             <a:avLst>
@@ -24259,8 +24259,8 @@
         </p:nvSpPr>
         <p:spPr>
           <a:xfrm>
-            <a:off x="5865876" y="5907024"/>
-            <a:ext cx="1467612" cy="256032"/>
+            <a:off x="5824728" y="5907024"/>
+            <a:ext cx="1499616" cy="256032"/>
           </a:xfrm>
           <a:prstGeom prst="rect">
             <a:avLst/>
@@ -24328,8 +24328,8 @@
         </p:nvSpPr>
         <p:spPr>
           <a:xfrm>
-            <a:off x="7406640" y="5907024"/>
-            <a:ext cx="1522476" cy="256032"/>
+            <a:off x="7351775" y="5907024"/>
+            <a:ext cx="1554480" cy="256032"/>
           </a:xfrm>
           <a:prstGeom prst="roundRect">
             <a:avLst>
@@ -24376,8 +24376,8 @@
         </p:nvSpPr>
         <p:spPr>
           <a:xfrm>
-            <a:off x="7434071" y="5907024"/>
-            <a:ext cx="1467612" cy="256032"/>
+            <a:off x="7379207" y="5907024"/>
+            <a:ext cx="1499616" cy="256032"/>
           </a:xfrm>
           <a:prstGeom prst="rect">
             <a:avLst/>
@@ -24445,8 +24445,8 @@
         </p:nvSpPr>
         <p:spPr>
           <a:xfrm>
-            <a:off x="8974836" y="5907024"/>
-            <a:ext cx="1522476" cy="256032"/>
+            <a:off x="8906256" y="5907024"/>
+            <a:ext cx="1554480" cy="256032"/>
           </a:xfrm>
           <a:prstGeom prst="roundRect">
             <a:avLst>
@@ -24493,8 +24493,8 @@
         </p:nvSpPr>
         <p:spPr>
           <a:xfrm>
-            <a:off x="9002268" y="5907024"/>
-            <a:ext cx="1467612" cy="256032"/>
+            <a:off x="8933688" y="5907024"/>
+            <a:ext cx="1499616" cy="256032"/>
           </a:xfrm>
           <a:prstGeom prst="rect">
             <a:avLst/>
@@ -24563,7 +24563,7 @@
         <p:spPr>
           <a:xfrm>
             <a:off x="201168" y="6291072"/>
-            <a:ext cx="10204704" cy="310896"/>
+            <a:ext cx="10277856" cy="310896"/>
           </a:xfrm>
           <a:prstGeom prst="roundRect">
             <a:avLst>
@@ -24657,7 +24657,7 @@
         <p:spPr>
           <a:xfrm>
             <a:off x="1133856" y="6355080"/>
-            <a:ext cx="1129284" cy="182880"/>
+            <a:ext cx="1126540" cy="182880"/>
           </a:xfrm>
           <a:prstGeom prst="roundRect">
             <a:avLst>
@@ -24705,7 +24705,7 @@
         <p:spPr>
           <a:xfrm>
             <a:off x="1161288" y="6355080"/>
-            <a:ext cx="1074420" cy="182880"/>
+            <a:ext cx="1071676" cy="182880"/>
           </a:xfrm>
           <a:prstGeom prst="rect">
             <a:avLst/>
@@ -24750,8 +24750,8 @@
         </p:nvSpPr>
         <p:spPr>
           <a:xfrm>
-            <a:off x="2307031" y="6355080"/>
-            <a:ext cx="1129284" cy="182880"/>
+            <a:off x="2304288" y="6355080"/>
+            <a:ext cx="1126540" cy="182880"/>
           </a:xfrm>
           <a:prstGeom prst="roundRect">
             <a:avLst>
@@ -24798,8 +24798,8 @@
         </p:nvSpPr>
         <p:spPr>
           <a:xfrm>
-            <a:off x="2334463" y="6355080"/>
-            <a:ext cx="1074420" cy="182880"/>
+            <a:off x="2331720" y="6355080"/>
+            <a:ext cx="1071676" cy="182880"/>
           </a:xfrm>
           <a:prstGeom prst="rect">
             <a:avLst/>
@@ -24844,8 +24844,8 @@
         </p:nvSpPr>
         <p:spPr>
           <a:xfrm>
-            <a:off x="3480206" y="6355080"/>
-            <a:ext cx="1129284" cy="182880"/>
+            <a:off x="3474720" y="6355080"/>
+            <a:ext cx="1126540" cy="182880"/>
           </a:xfrm>
           <a:prstGeom prst="roundRect">
             <a:avLst>
@@ -24892,8 +24892,8 @@
         </p:nvSpPr>
         <p:spPr>
           <a:xfrm>
-            <a:off x="3507638" y="6355080"/>
-            <a:ext cx="1074420" cy="182880"/>
+            <a:off x="3502151" y="6355080"/>
+            <a:ext cx="1071676" cy="182880"/>
           </a:xfrm>
           <a:prstGeom prst="rect">
             <a:avLst/>
@@ -24938,8 +24938,8 @@
         </p:nvSpPr>
         <p:spPr>
           <a:xfrm>
-            <a:off x="4653381" y="6355080"/>
-            <a:ext cx="1129284" cy="182880"/>
+            <a:off x="4645152" y="6355080"/>
+            <a:ext cx="1126540" cy="182880"/>
           </a:xfrm>
           <a:prstGeom prst="roundRect">
             <a:avLst>
@@ -24986,8 +24986,8 @@
         </p:nvSpPr>
         <p:spPr>
           <a:xfrm>
-            <a:off x="4680813" y="6355080"/>
-            <a:ext cx="1074420" cy="182880"/>
+            <a:off x="4672584" y="6355080"/>
+            <a:ext cx="1071676" cy="182880"/>
           </a:xfrm>
           <a:prstGeom prst="rect">
             <a:avLst/>
@@ -25032,8 +25032,8 @@
         </p:nvSpPr>
         <p:spPr>
           <a:xfrm>
-            <a:off x="5826556" y="6355080"/>
-            <a:ext cx="1129284" cy="182880"/>
+            <a:off x="5815584" y="6355080"/>
+            <a:ext cx="1126540" cy="182880"/>
           </a:xfrm>
           <a:prstGeom prst="roundRect">
             <a:avLst>
@@ -25080,8 +25080,8 @@
         </p:nvSpPr>
         <p:spPr>
           <a:xfrm>
-            <a:off x="5853988" y="6355080"/>
-            <a:ext cx="1074420" cy="182880"/>
+            <a:off x="5843016" y="6355080"/>
+            <a:ext cx="1071676" cy="182880"/>
           </a:xfrm>
           <a:prstGeom prst="rect">
             <a:avLst/>
@@ -25126,8 +25126,8 @@
         </p:nvSpPr>
         <p:spPr>
           <a:xfrm>
-            <a:off x="6999731" y="6355080"/>
-            <a:ext cx="1129284" cy="182880"/>
+            <a:off x="6986016" y="6355080"/>
+            <a:ext cx="1126540" cy="182880"/>
           </a:xfrm>
           <a:prstGeom prst="roundRect">
             <a:avLst>
@@ -25174,8 +25174,8 @@
         </p:nvSpPr>
         <p:spPr>
           <a:xfrm>
-            <a:off x="7027164" y="6355080"/>
-            <a:ext cx="1074420" cy="182880"/>
+            <a:off x="7013448" y="6355080"/>
+            <a:ext cx="1071676" cy="182880"/>
           </a:xfrm>
           <a:prstGeom prst="rect">
             <a:avLst/>
@@ -25220,8 +25220,8 @@
         </p:nvSpPr>
         <p:spPr>
           <a:xfrm>
-            <a:off x="8172907" y="6355080"/>
-            <a:ext cx="1129284" cy="182880"/>
+            <a:off x="8156448" y="6355080"/>
+            <a:ext cx="1126540" cy="182880"/>
           </a:xfrm>
           <a:prstGeom prst="roundRect">
             <a:avLst>
@@ -25268,8 +25268,8 @@
         </p:nvSpPr>
         <p:spPr>
           <a:xfrm>
-            <a:off x="8200339" y="6355080"/>
-            <a:ext cx="1074420" cy="182880"/>
+            <a:off x="8183879" y="6355080"/>
+            <a:ext cx="1071676" cy="182880"/>
           </a:xfrm>
           <a:prstGeom prst="rect">
             <a:avLst/>
@@ -25314,8 +25314,8 @@
         </p:nvSpPr>
         <p:spPr>
           <a:xfrm>
-            <a:off x="9346082" y="6355080"/>
-            <a:ext cx="1129284" cy="182880"/>
+            <a:off x="9326880" y="6355080"/>
+            <a:ext cx="1126540" cy="182880"/>
           </a:xfrm>
           <a:prstGeom prst="roundRect">
             <a:avLst>
@@ -25362,8 +25362,8 @@
         </p:nvSpPr>
         <p:spPr>
           <a:xfrm>
-            <a:off x="9373514" y="6355080"/>
-            <a:ext cx="1074420" cy="182880"/>
+            <a:off x="9354312" y="6355080"/>
+            <a:ext cx="1071676" cy="182880"/>
           </a:xfrm>
           <a:prstGeom prst="rect">
             <a:avLst/>
